--- a/docs/expoGIT.pptx
+++ b/docs/expoGIT.pptx
@@ -2,29 +2,30 @@
 <file path=ppt/presentation.xml><?xml version="1.0" encoding="utf-8"?>
 <p:presentation xmlns:a="http://schemas.openxmlformats.org/drawingml/2006/main" xmlns:r="http://schemas.openxmlformats.org/officeDocument/2006/relationships" xmlns:p="http://schemas.openxmlformats.org/presentationml/2006/main" saveSubsetFonts="1">
   <p:sldMasterIdLst>
-    <p:sldMasterId id="2147483648" r:id="rId1"/>
+    <p:sldMasterId id="2147483660" r:id="rId1"/>
   </p:sldMasterIdLst>
   <p:sldIdLst>
     <p:sldId id="256" r:id="rId2"/>
     <p:sldId id="265" r:id="rId3"/>
-    <p:sldId id="266" r:id="rId4"/>
-    <p:sldId id="267" r:id="rId5"/>
-    <p:sldId id="257" r:id="rId6"/>
-    <p:sldId id="261" r:id="rId7"/>
-    <p:sldId id="258" r:id="rId8"/>
-    <p:sldId id="262" r:id="rId9"/>
-    <p:sldId id="259" r:id="rId10"/>
-    <p:sldId id="260" r:id="rId11"/>
-    <p:sldId id="263" r:id="rId12"/>
-    <p:sldId id="264" r:id="rId13"/>
+    <p:sldId id="268" r:id="rId4"/>
+    <p:sldId id="266" r:id="rId5"/>
+    <p:sldId id="267" r:id="rId6"/>
+    <p:sldId id="257" r:id="rId7"/>
+    <p:sldId id="261" r:id="rId8"/>
+    <p:sldId id="258" r:id="rId9"/>
+    <p:sldId id="262" r:id="rId10"/>
+    <p:sldId id="259" r:id="rId11"/>
+    <p:sldId id="260" r:id="rId12"/>
+    <p:sldId id="263" r:id="rId13"/>
+    <p:sldId id="264" r:id="rId14"/>
   </p:sldIdLst>
   <p:sldSz cx="12192000" cy="6858000"/>
   <p:notesSz cx="6858000" cy="9144000"/>
   <p:defaultTextStyle>
     <a:defPPr>
-      <a:defRPr lang="es-CO"/>
+      <a:defRPr lang="en-US"/>
     </a:defPPr>
-    <a:lvl1pPr marL="0" algn="l" defTabSz="914400" rtl="0" eaLnBrk="1" latinLnBrk="0" hangingPunct="1">
+    <a:lvl1pPr marL="0" algn="l" defTabSz="457200" rtl="0" eaLnBrk="1" latinLnBrk="0" hangingPunct="1">
       <a:defRPr sz="1800" kern="1200">
         <a:solidFill>
           <a:schemeClr val="tx1"/>
@@ -34,7 +35,7 @@
         <a:cs typeface="+mn-cs"/>
       </a:defRPr>
     </a:lvl1pPr>
-    <a:lvl2pPr marL="457200" algn="l" defTabSz="914400" rtl="0" eaLnBrk="1" latinLnBrk="0" hangingPunct="1">
+    <a:lvl2pPr marL="457200" algn="l" defTabSz="457200" rtl="0" eaLnBrk="1" latinLnBrk="0" hangingPunct="1">
       <a:defRPr sz="1800" kern="1200">
         <a:solidFill>
           <a:schemeClr val="tx1"/>
@@ -44,7 +45,7 @@
         <a:cs typeface="+mn-cs"/>
       </a:defRPr>
     </a:lvl2pPr>
-    <a:lvl3pPr marL="914400" algn="l" defTabSz="914400" rtl="0" eaLnBrk="1" latinLnBrk="0" hangingPunct="1">
+    <a:lvl3pPr marL="914400" algn="l" defTabSz="457200" rtl="0" eaLnBrk="1" latinLnBrk="0" hangingPunct="1">
       <a:defRPr sz="1800" kern="1200">
         <a:solidFill>
           <a:schemeClr val="tx1"/>
@@ -54,7 +55,7 @@
         <a:cs typeface="+mn-cs"/>
       </a:defRPr>
     </a:lvl3pPr>
-    <a:lvl4pPr marL="1371600" algn="l" defTabSz="914400" rtl="0" eaLnBrk="1" latinLnBrk="0" hangingPunct="1">
+    <a:lvl4pPr marL="1371600" algn="l" defTabSz="457200" rtl="0" eaLnBrk="1" latinLnBrk="0" hangingPunct="1">
       <a:defRPr sz="1800" kern="1200">
         <a:solidFill>
           <a:schemeClr val="tx1"/>
@@ -64,7 +65,7 @@
         <a:cs typeface="+mn-cs"/>
       </a:defRPr>
     </a:lvl4pPr>
-    <a:lvl5pPr marL="1828800" algn="l" defTabSz="914400" rtl="0" eaLnBrk="1" latinLnBrk="0" hangingPunct="1">
+    <a:lvl5pPr marL="1828800" algn="l" defTabSz="457200" rtl="0" eaLnBrk="1" latinLnBrk="0" hangingPunct="1">
       <a:defRPr sz="1800" kern="1200">
         <a:solidFill>
           <a:schemeClr val="tx1"/>
@@ -74,7 +75,7 @@
         <a:cs typeface="+mn-cs"/>
       </a:defRPr>
     </a:lvl5pPr>
-    <a:lvl6pPr marL="2286000" algn="l" defTabSz="914400" rtl="0" eaLnBrk="1" latinLnBrk="0" hangingPunct="1">
+    <a:lvl6pPr marL="2286000" algn="l" defTabSz="457200" rtl="0" eaLnBrk="1" latinLnBrk="0" hangingPunct="1">
       <a:defRPr sz="1800" kern="1200">
         <a:solidFill>
           <a:schemeClr val="tx1"/>
@@ -84,7 +85,7 @@
         <a:cs typeface="+mn-cs"/>
       </a:defRPr>
     </a:lvl6pPr>
-    <a:lvl7pPr marL="2743200" algn="l" defTabSz="914400" rtl="0" eaLnBrk="1" latinLnBrk="0" hangingPunct="1">
+    <a:lvl7pPr marL="2743200" algn="l" defTabSz="457200" rtl="0" eaLnBrk="1" latinLnBrk="0" hangingPunct="1">
       <a:defRPr sz="1800" kern="1200">
         <a:solidFill>
           <a:schemeClr val="tx1"/>
@@ -94,7 +95,7 @@
         <a:cs typeface="+mn-cs"/>
       </a:defRPr>
     </a:lvl7pPr>
-    <a:lvl8pPr marL="3200400" algn="l" defTabSz="914400" rtl="0" eaLnBrk="1" latinLnBrk="0" hangingPunct="1">
+    <a:lvl8pPr marL="3200400" algn="l" defTabSz="457200" rtl="0" eaLnBrk="1" latinLnBrk="0" hangingPunct="1">
       <a:defRPr sz="1800" kern="1200">
         <a:solidFill>
           <a:schemeClr val="tx1"/>
@@ -104,7 +105,7 @@
         <a:cs typeface="+mn-cs"/>
       </a:defRPr>
     </a:lvl8pPr>
-    <a:lvl9pPr marL="3657600" algn="l" defTabSz="914400" rtl="0" eaLnBrk="1" latinLnBrk="0" hangingPunct="1">
+    <a:lvl9pPr marL="3657600" algn="l" defTabSz="457200" rtl="0" eaLnBrk="1" latinLnBrk="0" hangingPunct="1">
       <a:defRPr sz="1800" kern="1200">
         <a:solidFill>
           <a:schemeClr val="tx1"/>
@@ -119,7 +120,7 @@
 </file>
 
 <file path=ppt/slideLayouts/slideLayout1.xml><?xml version="1.0" encoding="utf-8"?>
-<p:sldLayout xmlns:a="http://schemas.openxmlformats.org/drawingml/2006/main" xmlns:r="http://schemas.openxmlformats.org/officeDocument/2006/relationships" xmlns:p="http://schemas.openxmlformats.org/presentationml/2006/main" type="title" preserve="1">
+<p:sldLayout xmlns:a="http://schemas.openxmlformats.org/drawingml/2006/main" xmlns:r="http://schemas.openxmlformats.org/officeDocument/2006/relationships" xmlns:p="http://schemas.openxmlformats.org/presentationml/2006/main" showMasterSp="0" type="title" preserve="1">
   <p:cSld name="Diapositiva de título">
     <p:spTree>
       <p:nvGrpSpPr>
@@ -137,13 +138,262 @@
       </p:grpSpPr>
       <p:sp>
         <p:nvSpPr>
-          <p:cNvPr id="2" name="Título 1">
-            <a:extLst>
-              <a:ext uri="{FF2B5EF4-FFF2-40B4-BE49-F238E27FC236}">
-                <a16:creationId xmlns:a16="http://schemas.microsoft.com/office/drawing/2014/main" id="{E1ABE4D5-7404-7FA0-EDD4-0BFE03EBBA0E}"/>
-              </a:ext>
-            </a:extLst>
-          </p:cNvPr>
+          <p:cNvPr id="7" name="Rectangle 6"/>
+          <p:cNvSpPr/>
+          <p:nvPr/>
+        </p:nvSpPr>
+        <p:spPr>
+          <a:xfrm>
+            <a:off x="920834" y="1346946"/>
+            <a:ext cx="10222992" cy="80683"/>
+          </a:xfrm>
+          <a:prstGeom prst="rect">
+            <a:avLst/>
+          </a:prstGeom>
+          <a:blipFill dpi="0" rotWithShape="1">
+            <a:blip r:embed="rId2">
+              <a:alphaModFix amt="85000"/>
+              <a:lum bright="70000" contrast="-70000"/>
+              <a:extLst>
+                <a:ext uri="{BEBA8EAE-BF5A-486C-A8C5-ECC9F3942E4B}">
+                  <a14:imgProps xmlns:a14="http://schemas.microsoft.com/office/drawing/2010/main">
+                    <a14:imgLayer r:embed="rId3">
+                      <a14:imgEffect>
+                        <a14:sharpenSoften amount="61000"/>
+                      </a14:imgEffect>
+                    </a14:imgLayer>
+                  </a14:imgProps>
+                </a:ext>
+                <a:ext uri="{28A0092B-C50C-407E-A947-70E740481C1C}">
+                  <a14:useLocalDpi xmlns:a14="http://schemas.microsoft.com/office/drawing/2010/main" val="0"/>
+                </a:ext>
+              </a:extLst>
+            </a:blip>
+            <a:srcRect/>
+            <a:tile tx="0" ty="-762000" sx="92000" sy="89000" flip="xy" algn="ctr"/>
+          </a:blipFill>
+          <a:ln>
+            <a:noFill/>
+          </a:ln>
+        </p:spPr>
+        <p:style>
+          <a:lnRef idx="2">
+            <a:schemeClr val="accent1">
+              <a:shade val="50000"/>
+            </a:schemeClr>
+          </a:lnRef>
+          <a:fillRef idx="1">
+            <a:schemeClr val="accent1"/>
+          </a:fillRef>
+          <a:effectRef idx="0">
+            <a:schemeClr val="accent1"/>
+          </a:effectRef>
+          <a:fontRef idx="minor">
+            <a:schemeClr val="lt1"/>
+          </a:fontRef>
+        </p:style>
+      </p:sp>
+      <p:sp>
+        <p:nvSpPr>
+          <p:cNvPr id="8" name="Rectangle 7"/>
+          <p:cNvSpPr/>
+          <p:nvPr/>
+        </p:nvSpPr>
+        <p:spPr>
+          <a:xfrm>
+            <a:off x="920834" y="4299696"/>
+            <a:ext cx="10222992" cy="80683"/>
+          </a:xfrm>
+          <a:prstGeom prst="rect">
+            <a:avLst/>
+          </a:prstGeom>
+          <a:blipFill dpi="0" rotWithShape="1">
+            <a:blip r:embed="rId2">
+              <a:alphaModFix amt="85000"/>
+              <a:lum bright="70000" contrast="-70000"/>
+              <a:extLst>
+                <a:ext uri="{BEBA8EAE-BF5A-486C-A8C5-ECC9F3942E4B}">
+                  <a14:imgProps xmlns:a14="http://schemas.microsoft.com/office/drawing/2010/main">
+                    <a14:imgLayer r:embed="rId3">
+                      <a14:imgEffect>
+                        <a14:sharpenSoften amount="61000"/>
+                      </a14:imgEffect>
+                    </a14:imgLayer>
+                  </a14:imgProps>
+                </a:ext>
+                <a:ext uri="{28A0092B-C50C-407E-A947-70E740481C1C}">
+                  <a14:useLocalDpi xmlns:a14="http://schemas.microsoft.com/office/drawing/2010/main" val="0"/>
+                </a:ext>
+              </a:extLst>
+            </a:blip>
+            <a:srcRect/>
+            <a:tile tx="0" ty="-717550" sx="92000" sy="89000" flip="xy" algn="ctr"/>
+          </a:blipFill>
+          <a:ln>
+            <a:noFill/>
+          </a:ln>
+        </p:spPr>
+        <p:style>
+          <a:lnRef idx="2">
+            <a:schemeClr val="accent1">
+              <a:shade val="50000"/>
+            </a:schemeClr>
+          </a:lnRef>
+          <a:fillRef idx="1">
+            <a:schemeClr val="accent1"/>
+          </a:fillRef>
+          <a:effectRef idx="0">
+            <a:schemeClr val="accent1"/>
+          </a:effectRef>
+          <a:fontRef idx="minor">
+            <a:schemeClr val="lt1"/>
+          </a:fontRef>
+        </p:style>
+      </p:sp>
+      <p:sp>
+        <p:nvSpPr>
+          <p:cNvPr id="9" name="Rectangle 8"/>
+          <p:cNvSpPr/>
+          <p:nvPr/>
+        </p:nvSpPr>
+        <p:spPr>
+          <a:xfrm>
+            <a:off x="920834" y="1484779"/>
+            <a:ext cx="10222992" cy="2743200"/>
+          </a:xfrm>
+          <a:prstGeom prst="rect">
+            <a:avLst/>
+          </a:prstGeom>
+          <a:blipFill dpi="0" rotWithShape="1">
+            <a:blip r:embed="rId2">
+              <a:alphaModFix amt="85000"/>
+              <a:lum bright="70000" contrast="-70000"/>
+              <a:extLst>
+                <a:ext uri="{BEBA8EAE-BF5A-486C-A8C5-ECC9F3942E4B}">
+                  <a14:imgProps xmlns:a14="http://schemas.microsoft.com/office/drawing/2010/main">
+                    <a14:imgLayer r:embed="rId3">
+                      <a14:imgEffect>
+                        <a14:sharpenSoften amount="61000"/>
+                      </a14:imgEffect>
+                    </a14:imgLayer>
+                  </a14:imgProps>
+                </a:ext>
+                <a:ext uri="{28A0092B-C50C-407E-A947-70E740481C1C}">
+                  <a14:useLocalDpi xmlns:a14="http://schemas.microsoft.com/office/drawing/2010/main" val="0"/>
+                </a:ext>
+              </a:extLst>
+            </a:blip>
+            <a:srcRect/>
+            <a:tile tx="0" ty="-704850" sx="92000" sy="89000" flip="xy" algn="ctr"/>
+          </a:blipFill>
+          <a:ln>
+            <a:noFill/>
+          </a:ln>
+        </p:spPr>
+        <p:style>
+          <a:lnRef idx="2">
+            <a:schemeClr val="accent1">
+              <a:shade val="50000"/>
+            </a:schemeClr>
+          </a:lnRef>
+          <a:fillRef idx="1">
+            <a:schemeClr val="accent1"/>
+          </a:fillRef>
+          <a:effectRef idx="0">
+            <a:schemeClr val="accent1"/>
+          </a:effectRef>
+          <a:fontRef idx="minor">
+            <a:schemeClr val="lt1"/>
+          </a:fontRef>
+        </p:style>
+      </p:sp>
+      <p:grpSp>
+        <p:nvGrpSpPr>
+          <p:cNvPr id="10" name="Group 9"/>
+          <p:cNvGrpSpPr/>
+          <p:nvPr/>
+        </p:nvGrpSpPr>
+        <p:grpSpPr>
+          <a:xfrm>
+            <a:off x="9649215" y="4068923"/>
+            <a:ext cx="1080904" cy="1080902"/>
+            <a:chOff x="9685338" y="4460675"/>
+            <a:chExt cx="1080904" cy="1080902"/>
+          </a:xfrm>
+        </p:grpSpPr>
+        <p:sp>
+          <p:nvSpPr>
+            <p:cNvPr id="11" name="Oval 10"/>
+            <p:cNvSpPr/>
+            <p:nvPr/>
+          </p:nvSpPr>
+          <p:spPr>
+            <a:xfrm>
+              <a:off x="9685338" y="4460675"/>
+              <a:ext cx="1080904" cy="1080902"/>
+            </a:xfrm>
+            <a:prstGeom prst="ellipse">
+              <a:avLst/>
+            </a:prstGeom>
+            <a:blipFill dpi="0" rotWithShape="1">
+              <a:blip r:embed="rId4">
+                <a:duotone>
+                  <a:schemeClr val="accent1">
+                    <a:shade val="45000"/>
+                    <a:satMod val="135000"/>
+                  </a:schemeClr>
+                  <a:prstClr val="white"/>
+                </a:duotone>
+                <a:extLst>
+                  <a:ext uri="{BEBA8EAE-BF5A-486C-A8C5-ECC9F3942E4B}">
+                    <a14:imgProps xmlns:a14="http://schemas.microsoft.com/office/drawing/2010/main">
+                      <a14:imgLayer r:embed="rId5">
+                        <a14:imgEffect>
+                          <a14:saturation sat="95000"/>
+                        </a14:imgEffect>
+                      </a14:imgLayer>
+                    </a14:imgProps>
+                  </a:ext>
+                </a:extLst>
+              </a:blip>
+              <a:srcRect/>
+              <a:tile tx="0" ty="0" sx="85000" sy="85000" flip="none" algn="tl"/>
+            </a:blipFill>
+            <a:ln w="25400" cap="flat" cmpd="sng" algn="ctr">
+              <a:noFill/>
+              <a:prstDash val="solid"/>
+            </a:ln>
+            <a:effectLst/>
+          </p:spPr>
+        </p:sp>
+        <p:sp>
+          <p:nvSpPr>
+            <p:cNvPr id="12" name="Oval 11"/>
+            <p:cNvSpPr/>
+            <p:nvPr/>
+          </p:nvSpPr>
+          <p:spPr>
+            <a:xfrm>
+              <a:off x="9793429" y="4568765"/>
+              <a:ext cx="864723" cy="864722"/>
+            </a:xfrm>
+            <a:prstGeom prst="ellipse">
+              <a:avLst/>
+            </a:prstGeom>
+            <a:noFill/>
+            <a:ln w="25400" cap="flat" cmpd="sng" algn="ctr">
+              <a:solidFill>
+                <a:sysClr val="window" lastClr="FFFFFF"/>
+              </a:solidFill>
+              <a:prstDash val="solid"/>
+            </a:ln>
+            <a:effectLst/>
+          </p:spPr>
+        </p:sp>
+      </p:grpSp>
+      <p:sp>
+        <p:nvSpPr>
+          <p:cNvPr id="2" name="Title 1"/>
           <p:cNvSpPr>
             <a:spLocks noGrp="1"/>
           </p:cNvSpPr>
@@ -153,15 +403,26 @@
         </p:nvSpPr>
         <p:spPr>
           <a:xfrm>
-            <a:off x="1524000" y="1122363"/>
-            <a:ext cx="9144000" cy="2387600"/>
+            <a:off x="1051560" y="1432223"/>
+            <a:ext cx="9966960" cy="3035808"/>
           </a:xfrm>
         </p:spPr>
         <p:txBody>
-          <a:bodyPr anchor="b"/>
+          <a:bodyPr anchor="ctr">
+            <a:noAutofit/>
+          </a:bodyPr>
           <a:lstStyle>
-            <a:lvl1pPr algn="ctr">
-              <a:defRPr sz="6000"/>
+            <a:lvl1pPr algn="l">
+              <a:lnSpc>
+                <a:spcPct val="80000"/>
+              </a:lnSpc>
+              <a:defRPr sz="9600" cap="all" baseline="0">
+                <a:blipFill dpi="0" rotWithShape="1">
+                  <a:blip r:embed="rId4"/>
+                  <a:srcRect/>
+                  <a:tile tx="6350" ty="-127000" sx="65000" sy="64000" flip="none" algn="tl"/>
+                </a:blipFill>
+              </a:defRPr>
             </a:lvl1pPr>
           </a:lstStyle>
           <a:p>
@@ -169,19 +430,13 @@
               <a:rPr lang="es-ES"/>
               <a:t>Haga clic para modificar el estilo de título del patrón</a:t>
             </a:r>
-            <a:endParaRPr lang="es-CO"/>
-          </a:p>
-        </p:txBody>
-      </p:sp>
-      <p:sp>
-        <p:nvSpPr>
-          <p:cNvPr id="3" name="Subtítulo 2">
-            <a:extLst>
-              <a:ext uri="{FF2B5EF4-FFF2-40B4-BE49-F238E27FC236}">
-                <a16:creationId xmlns:a16="http://schemas.microsoft.com/office/drawing/2014/main" id="{F1C64838-4C4D-1D88-D9FC-A582DB24B75E}"/>
-              </a:ext>
-            </a:extLst>
-          </p:cNvPr>
+            <a:endParaRPr lang="en-US" dirty="0"/>
+          </a:p>
+        </p:txBody>
+      </p:sp>
+      <p:sp>
+        <p:nvSpPr>
+          <p:cNvPr id="3" name="Subtitle 2"/>
           <p:cNvSpPr>
             <a:spLocks noGrp="1"/>
           </p:cNvSpPr>
@@ -191,48 +446,54 @@
         </p:nvSpPr>
         <p:spPr>
           <a:xfrm>
-            <a:off x="1524000" y="3602038"/>
-            <a:ext cx="9144000" cy="1655762"/>
+            <a:off x="1069848" y="4389120"/>
+            <a:ext cx="7891272" cy="1069848"/>
           </a:xfrm>
         </p:spPr>
         <p:txBody>
-          <a:bodyPr/>
+          <a:bodyPr>
+            <a:normAutofit/>
+          </a:bodyPr>
           <a:lstStyle>
-            <a:lvl1pPr marL="0" indent="0" algn="ctr">
+            <a:lvl1pPr marL="0" indent="0" algn="l">
               <a:buNone/>
-              <a:defRPr sz="2400"/>
+              <a:defRPr sz="2200">
+                <a:solidFill>
+                  <a:schemeClr val="tx1"/>
+                </a:solidFill>
+              </a:defRPr>
             </a:lvl1pPr>
             <a:lvl2pPr marL="457200" indent="0" algn="ctr">
               <a:buNone/>
-              <a:defRPr sz="2000"/>
+              <a:defRPr sz="2200"/>
             </a:lvl2pPr>
             <a:lvl3pPr marL="914400" indent="0" algn="ctr">
               <a:buNone/>
-              <a:defRPr sz="1800"/>
+              <a:defRPr sz="2200"/>
             </a:lvl3pPr>
             <a:lvl4pPr marL="1371600" indent="0" algn="ctr">
               <a:buNone/>
-              <a:defRPr sz="1600"/>
+              <a:defRPr sz="2000"/>
             </a:lvl4pPr>
             <a:lvl5pPr marL="1828800" indent="0" algn="ctr">
               <a:buNone/>
-              <a:defRPr sz="1600"/>
+              <a:defRPr sz="2000"/>
             </a:lvl5pPr>
             <a:lvl6pPr marL="2286000" indent="0" algn="ctr">
               <a:buNone/>
-              <a:defRPr sz="1600"/>
+              <a:defRPr sz="2000"/>
             </a:lvl6pPr>
             <a:lvl7pPr marL="2743200" indent="0" algn="ctr">
               <a:buNone/>
-              <a:defRPr sz="1600"/>
+              <a:defRPr sz="2000"/>
             </a:lvl7pPr>
             <a:lvl8pPr marL="3200400" indent="0" algn="ctr">
               <a:buNone/>
-              <a:defRPr sz="1600"/>
+              <a:defRPr sz="2000"/>
             </a:lvl8pPr>
             <a:lvl9pPr marL="3657600" indent="0" algn="ctr">
               <a:buNone/>
-              <a:defRPr sz="1600"/>
+              <a:defRPr sz="2000"/>
             </a:lvl9pPr>
           </a:lstStyle>
           <a:p>
@@ -240,19 +501,13 @@
               <a:rPr lang="es-ES"/>
               <a:t>Haga clic para modificar el estilo de subtítulo del patrón</a:t>
             </a:r>
-            <a:endParaRPr lang="es-CO"/>
-          </a:p>
-        </p:txBody>
-      </p:sp>
-      <p:sp>
-        <p:nvSpPr>
-          <p:cNvPr id="4" name="Marcador de fecha 3">
-            <a:extLst>
-              <a:ext uri="{FF2B5EF4-FFF2-40B4-BE49-F238E27FC236}">
-                <a16:creationId xmlns:a16="http://schemas.microsoft.com/office/drawing/2014/main" id="{93E30A12-62AF-1C26-9DDB-468C61ABC2BE}"/>
-              </a:ext>
-            </a:extLst>
-          </p:cNvPr>
+            <a:endParaRPr lang="en-US" dirty="0"/>
+          </a:p>
+        </p:txBody>
+      </p:sp>
+      <p:sp>
+        <p:nvSpPr>
+          <p:cNvPr id="4" name="Date Placeholder 3"/>
           <p:cNvSpPr>
             <a:spLocks noGrp="1"/>
           </p:cNvSpPr>
@@ -275,13 +530,7 @@
       </p:sp>
       <p:sp>
         <p:nvSpPr>
-          <p:cNvPr id="5" name="Marcador de pie de página 4">
-            <a:extLst>
-              <a:ext uri="{FF2B5EF4-FFF2-40B4-BE49-F238E27FC236}">
-                <a16:creationId xmlns:a16="http://schemas.microsoft.com/office/drawing/2014/main" id="{509271AD-D774-846E-5A18-F912FC5121A4}"/>
-              </a:ext>
-            </a:extLst>
-          </p:cNvPr>
+          <p:cNvPr id="5" name="Footer Placeholder 4"/>
           <p:cNvSpPr>
             <a:spLocks noGrp="1"/>
           </p:cNvSpPr>
@@ -300,13 +549,7 @@
       </p:sp>
       <p:sp>
         <p:nvSpPr>
-          <p:cNvPr id="6" name="Marcador de número de diapositiva 5">
-            <a:extLst>
-              <a:ext uri="{FF2B5EF4-FFF2-40B4-BE49-F238E27FC236}">
-                <a16:creationId xmlns:a16="http://schemas.microsoft.com/office/drawing/2014/main" id="{D27C2B00-3031-03F4-72D2-A83ED25E033B}"/>
-              </a:ext>
-            </a:extLst>
-          </p:cNvPr>
+          <p:cNvPr id="6" name="Slide Number Placeholder 5"/>
           <p:cNvSpPr>
             <a:spLocks noGrp="1"/>
           </p:cNvSpPr>
@@ -314,10 +557,19 @@
             <p:ph type="sldNum" sz="quarter" idx="12"/>
           </p:nvPr>
         </p:nvSpPr>
-        <p:spPr/>
+        <p:spPr>
+          <a:xfrm>
+            <a:off x="9592733" y="4289334"/>
+            <a:ext cx="1193868" cy="640080"/>
+          </a:xfrm>
+        </p:spPr>
         <p:txBody>
           <a:bodyPr/>
-          <a:lstStyle/>
+          <a:lstStyle>
+            <a:lvl1pPr>
+              <a:defRPr sz="2800"/>
+            </a:lvl1pPr>
+          </a:lstStyle>
           <a:p>
             <a:fld id="{36DE4F9D-57CD-4FDA-BF2D-60B37CCD6CA4}" type="slidenum">
               <a:rPr lang="es-CO" smtClean="0"/>
@@ -330,7 +582,7 @@
     </p:spTree>
     <p:extLst>
       <p:ext uri="{BB962C8B-B14F-4D97-AF65-F5344CB8AC3E}">
-        <p14:creationId xmlns:p14="http://schemas.microsoft.com/office/powerpoint/2010/main" val="3344403879"/>
+        <p14:creationId xmlns:p14="http://schemas.microsoft.com/office/powerpoint/2010/main" val="955765830"/>
       </p:ext>
     </p:extLst>
   </p:cSld>
@@ -359,13 +611,7 @@
       </p:grpSpPr>
       <p:sp>
         <p:nvSpPr>
-          <p:cNvPr id="2" name="Título 1">
-            <a:extLst>
-              <a:ext uri="{FF2B5EF4-FFF2-40B4-BE49-F238E27FC236}">
-                <a16:creationId xmlns:a16="http://schemas.microsoft.com/office/drawing/2014/main" id="{9F8B5E40-F471-ACF6-CA90-12DC9A976BFB}"/>
-              </a:ext>
-            </a:extLst>
-          </p:cNvPr>
+          <p:cNvPr id="2" name="Title 1"/>
           <p:cNvSpPr>
             <a:spLocks noGrp="1"/>
           </p:cNvSpPr>
@@ -382,19 +628,13 @@
               <a:rPr lang="es-ES"/>
               <a:t>Haga clic para modificar el estilo de título del patrón</a:t>
             </a:r>
-            <a:endParaRPr lang="es-CO"/>
-          </a:p>
-        </p:txBody>
-      </p:sp>
-      <p:sp>
-        <p:nvSpPr>
-          <p:cNvPr id="3" name="Marcador de texto vertical 2">
-            <a:extLst>
-              <a:ext uri="{FF2B5EF4-FFF2-40B4-BE49-F238E27FC236}">
-                <a16:creationId xmlns:a16="http://schemas.microsoft.com/office/drawing/2014/main" id="{38C9FC64-8596-19E0-9671-7B030E942027}"/>
-              </a:ext>
-            </a:extLst>
-          </p:cNvPr>
+            <a:endParaRPr lang="en-US" dirty="0"/>
+          </a:p>
+        </p:txBody>
+      </p:sp>
+      <p:sp>
+        <p:nvSpPr>
+          <p:cNvPr id="3" name="Vertical Text Placeholder 2"/>
           <p:cNvSpPr>
             <a:spLocks noGrp="1"/>
           </p:cNvSpPr>
@@ -440,19 +680,13 @@
               <a:rPr lang="es-ES"/>
               <a:t>Quinto nivel</a:t>
             </a:r>
-            <a:endParaRPr lang="es-CO"/>
-          </a:p>
-        </p:txBody>
-      </p:sp>
-      <p:sp>
-        <p:nvSpPr>
-          <p:cNvPr id="4" name="Marcador de fecha 3">
-            <a:extLst>
-              <a:ext uri="{FF2B5EF4-FFF2-40B4-BE49-F238E27FC236}">
-                <a16:creationId xmlns:a16="http://schemas.microsoft.com/office/drawing/2014/main" id="{6EA7A199-460C-8477-238C-4D312FA95DF8}"/>
-              </a:ext>
-            </a:extLst>
-          </p:cNvPr>
+            <a:endParaRPr lang="en-US" dirty="0"/>
+          </a:p>
+        </p:txBody>
+      </p:sp>
+      <p:sp>
+        <p:nvSpPr>
+          <p:cNvPr id="4" name="Date Placeholder 3"/>
           <p:cNvSpPr>
             <a:spLocks noGrp="1"/>
           </p:cNvSpPr>
@@ -475,13 +709,7 @@
       </p:sp>
       <p:sp>
         <p:nvSpPr>
-          <p:cNvPr id="5" name="Marcador de pie de página 4">
-            <a:extLst>
-              <a:ext uri="{FF2B5EF4-FFF2-40B4-BE49-F238E27FC236}">
-                <a16:creationId xmlns:a16="http://schemas.microsoft.com/office/drawing/2014/main" id="{8957F63D-064B-E0DF-30DB-A1240BFB6142}"/>
-              </a:ext>
-            </a:extLst>
-          </p:cNvPr>
+          <p:cNvPr id="5" name="Footer Placeholder 4"/>
           <p:cNvSpPr>
             <a:spLocks noGrp="1"/>
           </p:cNvSpPr>
@@ -500,13 +728,7 @@
       </p:sp>
       <p:sp>
         <p:nvSpPr>
-          <p:cNvPr id="6" name="Marcador de número de diapositiva 5">
-            <a:extLst>
-              <a:ext uri="{FF2B5EF4-FFF2-40B4-BE49-F238E27FC236}">
-                <a16:creationId xmlns:a16="http://schemas.microsoft.com/office/drawing/2014/main" id="{8393A802-F8E0-8DA1-9924-394C1267D926}"/>
-              </a:ext>
-            </a:extLst>
-          </p:cNvPr>
+          <p:cNvPr id="6" name="Slide Number Placeholder 5"/>
           <p:cNvSpPr>
             <a:spLocks noGrp="1"/>
           </p:cNvSpPr>
@@ -530,7 +752,7 @@
     </p:spTree>
     <p:extLst>
       <p:ext uri="{BB962C8B-B14F-4D97-AF65-F5344CB8AC3E}">
-        <p14:creationId xmlns:p14="http://schemas.microsoft.com/office/powerpoint/2010/main" val="417082947"/>
+        <p14:creationId xmlns:p14="http://schemas.microsoft.com/office/powerpoint/2010/main" val="3703951250"/>
       </p:ext>
     </p:extLst>
   </p:cSld>
@@ -559,13 +781,7 @@
       </p:grpSpPr>
       <p:sp>
         <p:nvSpPr>
-          <p:cNvPr id="2" name="Título vertical 1">
-            <a:extLst>
-              <a:ext uri="{FF2B5EF4-FFF2-40B4-BE49-F238E27FC236}">
-                <a16:creationId xmlns:a16="http://schemas.microsoft.com/office/drawing/2014/main" id="{639BE439-D85D-EBDE-584D-5F65313A3F47}"/>
-              </a:ext>
-            </a:extLst>
-          </p:cNvPr>
+          <p:cNvPr id="2" name="Vertical Title 1"/>
           <p:cNvSpPr>
             <a:spLocks noGrp="1"/>
           </p:cNvSpPr>
@@ -575,8 +791,8 @@
         </p:nvSpPr>
         <p:spPr>
           <a:xfrm>
-            <a:off x="8724900" y="365125"/>
-            <a:ext cx="2628900" cy="5811838"/>
+            <a:off x="8724900" y="533400"/>
+            <a:ext cx="2552700" cy="5638800"/>
           </a:xfrm>
         </p:spPr>
         <p:txBody>
@@ -587,19 +803,13 @@
               <a:rPr lang="es-ES"/>
               <a:t>Haga clic para modificar el estilo de título del patrón</a:t>
             </a:r>
-            <a:endParaRPr lang="es-CO"/>
-          </a:p>
-        </p:txBody>
-      </p:sp>
-      <p:sp>
-        <p:nvSpPr>
-          <p:cNvPr id="3" name="Marcador de texto vertical 2">
-            <a:extLst>
-              <a:ext uri="{FF2B5EF4-FFF2-40B4-BE49-F238E27FC236}">
-                <a16:creationId xmlns:a16="http://schemas.microsoft.com/office/drawing/2014/main" id="{0CE947C1-B9BD-A0D1-AC9E-5D2458920828}"/>
-              </a:ext>
-            </a:extLst>
-          </p:cNvPr>
+            <a:endParaRPr lang="en-US" dirty="0"/>
+          </a:p>
+        </p:txBody>
+      </p:sp>
+      <p:sp>
+        <p:nvSpPr>
+          <p:cNvPr id="3" name="Vertical Text Placeholder 2"/>
           <p:cNvSpPr>
             <a:spLocks noGrp="1"/>
           </p:cNvSpPr>
@@ -609,8 +819,8 @@
         </p:nvSpPr>
         <p:spPr>
           <a:xfrm>
-            <a:off x="838200" y="365125"/>
-            <a:ext cx="7734300" cy="5811838"/>
+            <a:off x="1066800" y="533400"/>
+            <a:ext cx="7505700" cy="5638800"/>
           </a:xfrm>
         </p:spPr>
         <p:txBody>
@@ -650,19 +860,13 @@
               <a:rPr lang="es-ES"/>
               <a:t>Quinto nivel</a:t>
             </a:r>
-            <a:endParaRPr lang="es-CO"/>
-          </a:p>
-        </p:txBody>
-      </p:sp>
-      <p:sp>
-        <p:nvSpPr>
-          <p:cNvPr id="4" name="Marcador de fecha 3">
-            <a:extLst>
-              <a:ext uri="{FF2B5EF4-FFF2-40B4-BE49-F238E27FC236}">
-                <a16:creationId xmlns:a16="http://schemas.microsoft.com/office/drawing/2014/main" id="{6BBADC5A-2A26-BF91-A867-4539DA3B44B9}"/>
-              </a:ext>
-            </a:extLst>
-          </p:cNvPr>
+            <a:endParaRPr lang="en-US" dirty="0"/>
+          </a:p>
+        </p:txBody>
+      </p:sp>
+      <p:sp>
+        <p:nvSpPr>
+          <p:cNvPr id="4" name="Date Placeholder 3"/>
           <p:cNvSpPr>
             <a:spLocks noGrp="1"/>
           </p:cNvSpPr>
@@ -685,13 +889,7 @@
       </p:sp>
       <p:sp>
         <p:nvSpPr>
-          <p:cNvPr id="5" name="Marcador de pie de página 4">
-            <a:extLst>
-              <a:ext uri="{FF2B5EF4-FFF2-40B4-BE49-F238E27FC236}">
-                <a16:creationId xmlns:a16="http://schemas.microsoft.com/office/drawing/2014/main" id="{0B5993E5-09A1-ED01-0EBD-3A4809220AA2}"/>
-              </a:ext>
-            </a:extLst>
-          </p:cNvPr>
+          <p:cNvPr id="5" name="Footer Placeholder 4"/>
           <p:cNvSpPr>
             <a:spLocks noGrp="1"/>
           </p:cNvSpPr>
@@ -710,13 +908,7 @@
       </p:sp>
       <p:sp>
         <p:nvSpPr>
-          <p:cNvPr id="6" name="Marcador de número de diapositiva 5">
-            <a:extLst>
-              <a:ext uri="{FF2B5EF4-FFF2-40B4-BE49-F238E27FC236}">
-                <a16:creationId xmlns:a16="http://schemas.microsoft.com/office/drawing/2014/main" id="{FE05FEBF-C34A-B2F6-01EF-324FCCC7D08A}"/>
-              </a:ext>
-            </a:extLst>
-          </p:cNvPr>
+          <p:cNvPr id="6" name="Slide Number Placeholder 5"/>
           <p:cNvSpPr>
             <a:spLocks noGrp="1"/>
           </p:cNvSpPr>
@@ -740,7 +932,7 @@
     </p:spTree>
     <p:extLst>
       <p:ext uri="{BB962C8B-B14F-4D97-AF65-F5344CB8AC3E}">
-        <p14:creationId xmlns:p14="http://schemas.microsoft.com/office/powerpoint/2010/main" val="1613023158"/>
+        <p14:creationId xmlns:p14="http://schemas.microsoft.com/office/powerpoint/2010/main" val="2251546233"/>
       </p:ext>
     </p:extLst>
   </p:cSld>
@@ -769,13 +961,7 @@
       </p:grpSpPr>
       <p:sp>
         <p:nvSpPr>
-          <p:cNvPr id="2" name="Título 1">
-            <a:extLst>
-              <a:ext uri="{FF2B5EF4-FFF2-40B4-BE49-F238E27FC236}">
-                <a16:creationId xmlns:a16="http://schemas.microsoft.com/office/drawing/2014/main" id="{01638C34-6052-5CD2-1BA7-9B55F9417F9A}"/>
-              </a:ext>
-            </a:extLst>
-          </p:cNvPr>
+          <p:cNvPr id="2" name="Title 1"/>
           <p:cNvSpPr>
             <a:spLocks noGrp="1"/>
           </p:cNvSpPr>
@@ -792,19 +978,13 @@
               <a:rPr lang="es-ES"/>
               <a:t>Haga clic para modificar el estilo de título del patrón</a:t>
             </a:r>
-            <a:endParaRPr lang="es-CO"/>
-          </a:p>
-        </p:txBody>
-      </p:sp>
-      <p:sp>
-        <p:nvSpPr>
-          <p:cNvPr id="3" name="Marcador de contenido 2">
-            <a:extLst>
-              <a:ext uri="{FF2B5EF4-FFF2-40B4-BE49-F238E27FC236}">
-                <a16:creationId xmlns:a16="http://schemas.microsoft.com/office/drawing/2014/main" id="{3227EA39-B2E7-8EE7-1643-0715ED39A5AC}"/>
-              </a:ext>
-            </a:extLst>
-          </p:cNvPr>
+            <a:endParaRPr lang="en-US" dirty="0"/>
+          </a:p>
+        </p:txBody>
+      </p:sp>
+      <p:sp>
+        <p:nvSpPr>
+          <p:cNvPr id="3" name="Content Placeholder 2"/>
           <p:cNvSpPr>
             <a:spLocks noGrp="1"/>
           </p:cNvSpPr>
@@ -850,19 +1030,13 @@
               <a:rPr lang="es-ES"/>
               <a:t>Quinto nivel</a:t>
             </a:r>
-            <a:endParaRPr lang="es-CO"/>
-          </a:p>
-        </p:txBody>
-      </p:sp>
-      <p:sp>
-        <p:nvSpPr>
-          <p:cNvPr id="4" name="Marcador de fecha 3">
-            <a:extLst>
-              <a:ext uri="{FF2B5EF4-FFF2-40B4-BE49-F238E27FC236}">
-                <a16:creationId xmlns:a16="http://schemas.microsoft.com/office/drawing/2014/main" id="{A8D809DB-6759-3FC1-0963-63E1A93300E2}"/>
-              </a:ext>
-            </a:extLst>
-          </p:cNvPr>
+            <a:endParaRPr lang="en-US" dirty="0"/>
+          </a:p>
+        </p:txBody>
+      </p:sp>
+      <p:sp>
+        <p:nvSpPr>
+          <p:cNvPr id="4" name="Date Placeholder 3"/>
           <p:cNvSpPr>
             <a:spLocks noGrp="1"/>
           </p:cNvSpPr>
@@ -885,13 +1059,7 @@
       </p:sp>
       <p:sp>
         <p:nvSpPr>
-          <p:cNvPr id="5" name="Marcador de pie de página 4">
-            <a:extLst>
-              <a:ext uri="{FF2B5EF4-FFF2-40B4-BE49-F238E27FC236}">
-                <a16:creationId xmlns:a16="http://schemas.microsoft.com/office/drawing/2014/main" id="{0FF05086-B0E6-1723-8439-8FA8602AAA0F}"/>
-              </a:ext>
-            </a:extLst>
-          </p:cNvPr>
+          <p:cNvPr id="5" name="Footer Placeholder 4"/>
           <p:cNvSpPr>
             <a:spLocks noGrp="1"/>
           </p:cNvSpPr>
@@ -910,13 +1078,7 @@
       </p:sp>
       <p:sp>
         <p:nvSpPr>
-          <p:cNvPr id="6" name="Marcador de número de diapositiva 5">
-            <a:extLst>
-              <a:ext uri="{FF2B5EF4-FFF2-40B4-BE49-F238E27FC236}">
-                <a16:creationId xmlns:a16="http://schemas.microsoft.com/office/drawing/2014/main" id="{8B9638D4-A406-5EBA-B7AF-A004DD55EE7E}"/>
-              </a:ext>
-            </a:extLst>
-          </p:cNvPr>
+          <p:cNvPr id="6" name="Slide Number Placeholder 5"/>
           <p:cNvSpPr>
             <a:spLocks noGrp="1"/>
           </p:cNvSpPr>
@@ -940,7 +1102,7 @@
     </p:spTree>
     <p:extLst>
       <p:ext uri="{BB962C8B-B14F-4D97-AF65-F5344CB8AC3E}">
-        <p14:creationId xmlns:p14="http://schemas.microsoft.com/office/powerpoint/2010/main" val="1026754523"/>
+        <p14:creationId xmlns:p14="http://schemas.microsoft.com/office/powerpoint/2010/main" val="3269547654"/>
       </p:ext>
     </p:extLst>
   </p:cSld>
@@ -951,7 +1113,7 @@
 </file>
 
 <file path=ppt/slideLayouts/slideLayout3.xml><?xml version="1.0" encoding="utf-8"?>
-<p:sldLayout xmlns:a="http://schemas.openxmlformats.org/drawingml/2006/main" xmlns:r="http://schemas.openxmlformats.org/officeDocument/2006/relationships" xmlns:p="http://schemas.openxmlformats.org/presentationml/2006/main" type="secHead" preserve="1">
+<p:sldLayout xmlns:a="http://schemas.openxmlformats.org/drawingml/2006/main" xmlns:r="http://schemas.openxmlformats.org/officeDocument/2006/relationships" xmlns:p="http://schemas.openxmlformats.org/presentationml/2006/main" showMasterSp="0" type="secHead" preserve="1">
   <p:cSld name="Encabezado de sección">
     <p:spTree>
       <p:nvGrpSpPr>
@@ -969,13 +1131,64 @@
       </p:grpSpPr>
       <p:sp>
         <p:nvSpPr>
-          <p:cNvPr id="2" name="Título 1">
-            <a:extLst>
-              <a:ext uri="{FF2B5EF4-FFF2-40B4-BE49-F238E27FC236}">
-                <a16:creationId xmlns:a16="http://schemas.microsoft.com/office/drawing/2014/main" id="{8161C3A9-5204-8CA8-CAF3-486FF56300A1}"/>
-              </a:ext>
-            </a:extLst>
-          </p:cNvPr>
+          <p:cNvPr id="7" name="Rectangle 6"/>
+          <p:cNvSpPr/>
+          <p:nvPr/>
+        </p:nvSpPr>
+        <p:spPr>
+          <a:xfrm>
+            <a:off x="0" y="4917989"/>
+            <a:ext cx="12192000" cy="1940010"/>
+          </a:xfrm>
+          <a:prstGeom prst="rect">
+            <a:avLst/>
+          </a:prstGeom>
+          <a:blipFill dpi="0" rotWithShape="1">
+            <a:blip r:embed="rId2">
+              <a:alphaModFix amt="85000"/>
+              <a:lum bright="70000" contrast="-70000"/>
+              <a:extLst>
+                <a:ext uri="{BEBA8EAE-BF5A-486C-A8C5-ECC9F3942E4B}">
+                  <a14:imgProps xmlns:a14="http://schemas.microsoft.com/office/drawing/2010/main">
+                    <a14:imgLayer r:embed="rId3">
+                      <a14:imgEffect>
+                        <a14:sharpenSoften amount="61000"/>
+                      </a14:imgEffect>
+                    </a14:imgLayer>
+                  </a14:imgProps>
+                </a:ext>
+                <a:ext uri="{28A0092B-C50C-407E-A947-70E740481C1C}">
+                  <a14:useLocalDpi xmlns:a14="http://schemas.microsoft.com/office/drawing/2010/main" val="0"/>
+                </a:ext>
+              </a:extLst>
+            </a:blip>
+            <a:srcRect/>
+            <a:tile tx="0" ty="-704850" sx="92000" sy="89000" flip="xy" algn="ctr"/>
+          </a:blipFill>
+          <a:ln>
+            <a:noFill/>
+          </a:ln>
+        </p:spPr>
+        <p:style>
+          <a:lnRef idx="2">
+            <a:schemeClr val="accent1">
+              <a:shade val="50000"/>
+            </a:schemeClr>
+          </a:lnRef>
+          <a:fillRef idx="1">
+            <a:schemeClr val="accent1"/>
+          </a:fillRef>
+          <a:effectRef idx="0">
+            <a:schemeClr val="accent1"/>
+          </a:effectRef>
+          <a:fontRef idx="minor">
+            <a:schemeClr val="lt1"/>
+          </a:fontRef>
+        </p:style>
+      </p:sp>
+      <p:sp>
+        <p:nvSpPr>
+          <p:cNvPr id="2" name="Title 1"/>
           <p:cNvSpPr>
             <a:spLocks noGrp="1"/>
           </p:cNvSpPr>
@@ -985,15 +1198,20 @@
         </p:nvSpPr>
         <p:spPr>
           <a:xfrm>
-            <a:off x="831850" y="1709738"/>
-            <a:ext cx="10515600" cy="2852737"/>
+            <a:off x="2167128" y="1225296"/>
+            <a:ext cx="9281160" cy="3520440"/>
           </a:xfrm>
         </p:spPr>
         <p:txBody>
-          <a:bodyPr anchor="b"/>
+          <a:bodyPr anchor="ctr">
+            <a:normAutofit/>
+          </a:bodyPr>
           <a:lstStyle>
             <a:lvl1pPr>
-              <a:defRPr sz="6000"/>
+              <a:lnSpc>
+                <a:spcPct val="80000"/>
+              </a:lnSpc>
+              <a:defRPr sz="8000" b="0"/>
             </a:lvl1pPr>
           </a:lstStyle>
           <a:p>
@@ -1001,19 +1219,13 @@
               <a:rPr lang="es-ES"/>
               <a:t>Haga clic para modificar el estilo de título del patrón</a:t>
             </a:r>
-            <a:endParaRPr lang="es-CO"/>
-          </a:p>
-        </p:txBody>
-      </p:sp>
-      <p:sp>
-        <p:nvSpPr>
-          <p:cNvPr id="3" name="Marcador de texto 2">
-            <a:extLst>
-              <a:ext uri="{FF2B5EF4-FFF2-40B4-BE49-F238E27FC236}">
-                <a16:creationId xmlns:a16="http://schemas.microsoft.com/office/drawing/2014/main" id="{C5A32C7C-D42C-EA5C-A0EC-E1E489E7577D}"/>
-              </a:ext>
-            </a:extLst>
-          </p:cNvPr>
+            <a:endParaRPr lang="en-US" dirty="0"/>
+          </a:p>
+        </p:txBody>
+      </p:sp>
+      <p:sp>
+        <p:nvSpPr>
+          <p:cNvPr id="3" name="Text Placeholder 2"/>
           <p:cNvSpPr>
             <a:spLocks noGrp="1"/>
           </p:cNvSpPr>
@@ -1023,99 +1235,99 @@
         </p:nvSpPr>
         <p:spPr>
           <a:xfrm>
-            <a:off x="831850" y="4589463"/>
-            <a:ext cx="10515600" cy="1500187"/>
+            <a:off x="2165774" y="5020056"/>
+            <a:ext cx="9052560" cy="1066800"/>
           </a:xfrm>
         </p:spPr>
         <p:txBody>
-          <a:bodyPr/>
+          <a:bodyPr anchor="t">
+            <a:normAutofit/>
+          </a:bodyPr>
           <a:lstStyle>
             <a:lvl1pPr marL="0" indent="0">
               <a:buNone/>
-              <a:defRPr sz="2400">
+              <a:defRPr sz="2000">
                 <a:solidFill>
-                  <a:schemeClr val="tx1">
-                    <a:tint val="82000"/>
-                  </a:schemeClr>
+                  <a:schemeClr val="tx1"/>
                 </a:solidFill>
               </a:defRPr>
             </a:lvl1pPr>
             <a:lvl2pPr marL="457200" indent="0">
               <a:buNone/>
-              <a:defRPr sz="2000">
+              <a:defRPr sz="1800">
                 <a:solidFill>
                   <a:schemeClr val="tx1">
-                    <a:tint val="82000"/>
+                    <a:tint val="75000"/>
                   </a:schemeClr>
                 </a:solidFill>
               </a:defRPr>
             </a:lvl2pPr>
             <a:lvl3pPr marL="914400" indent="0">
               <a:buNone/>
-              <a:defRPr sz="1800">
+              <a:defRPr sz="1600">
                 <a:solidFill>
                   <a:schemeClr val="tx1">
-                    <a:tint val="82000"/>
+                    <a:tint val="75000"/>
                   </a:schemeClr>
                 </a:solidFill>
               </a:defRPr>
             </a:lvl3pPr>
             <a:lvl4pPr marL="1371600" indent="0">
               <a:buNone/>
-              <a:defRPr sz="1600">
+              <a:defRPr sz="1400">
                 <a:solidFill>
                   <a:schemeClr val="tx1">
-                    <a:tint val="82000"/>
+                    <a:tint val="75000"/>
                   </a:schemeClr>
                 </a:solidFill>
               </a:defRPr>
             </a:lvl4pPr>
             <a:lvl5pPr marL="1828800" indent="0">
               <a:buNone/>
-              <a:defRPr sz="1600">
+              <a:defRPr sz="1400">
                 <a:solidFill>
                   <a:schemeClr val="tx1">
-                    <a:tint val="82000"/>
+                    <a:tint val="75000"/>
                   </a:schemeClr>
                 </a:solidFill>
               </a:defRPr>
             </a:lvl5pPr>
             <a:lvl6pPr marL="2286000" indent="0">
               <a:buNone/>
-              <a:defRPr sz="1600">
+              <a:defRPr sz="1400">
                 <a:solidFill>
                   <a:schemeClr val="tx1">
-                    <a:tint val="82000"/>
+                    <a:tint val="75000"/>
                   </a:schemeClr>
                 </a:solidFill>
               </a:defRPr>
             </a:lvl6pPr>
             <a:lvl7pPr marL="2743200" indent="0">
               <a:buNone/>
-              <a:defRPr sz="1600">
+              <a:defRPr sz="1400">
                 <a:solidFill>
                   <a:schemeClr val="tx1">
-                    <a:tint val="82000"/>
+                    <a:tint val="75000"/>
                   </a:schemeClr>
                 </a:solidFill>
               </a:defRPr>
             </a:lvl7pPr>
             <a:lvl8pPr marL="3200400" indent="0">
               <a:buNone/>
-              <a:defRPr sz="1600">
+              <a:defRPr sz="1400">
                 <a:solidFill>
                   <a:schemeClr val="tx1">
-                    <a:tint val="82000"/>
+                    <a:tint val="75000"/>
                   </a:schemeClr>
                 </a:solidFill>
               </a:defRPr>
             </a:lvl8pPr>
             <a:lvl9pPr marL="3657600" indent="0">
               <a:buNone/>
-              <a:defRPr sz="1600">
+              <a:defRPr sz="1400">
                 <a:solidFill>
                   <a:schemeClr val="tx1">
-                    <a:tint val="82000"/>
+                    <a:tint val="75000"/>
                   </a:schemeClr>
                 </a:solidFill>
               </a:defRPr>
@@ -1132,13 +1344,7 @@
       </p:sp>
       <p:sp>
         <p:nvSpPr>
-          <p:cNvPr id="4" name="Marcador de fecha 3">
-            <a:extLst>
-              <a:ext uri="{FF2B5EF4-FFF2-40B4-BE49-F238E27FC236}">
-                <a16:creationId xmlns:a16="http://schemas.microsoft.com/office/drawing/2014/main" id="{48112AB6-26CC-FD6A-CF07-58B1D95D6735}"/>
-              </a:ext>
-            </a:extLst>
-          </p:cNvPr>
+          <p:cNvPr id="4" name="Date Placeholder 3"/>
           <p:cNvSpPr>
             <a:spLocks noGrp="1"/>
           </p:cNvSpPr>
@@ -1146,7 +1352,12 @@
             <p:ph type="dt" sz="half" idx="10"/>
           </p:nvPr>
         </p:nvSpPr>
-        <p:spPr/>
+        <p:spPr>
+          <a:xfrm>
+            <a:off x="8593667" y="6272784"/>
+            <a:ext cx="2644309" cy="365125"/>
+          </a:xfrm>
+        </p:spPr>
         <p:txBody>
           <a:bodyPr/>
           <a:lstStyle/>
@@ -1161,13 +1372,7 @@
       </p:sp>
       <p:sp>
         <p:nvSpPr>
-          <p:cNvPr id="5" name="Marcador de pie de página 4">
-            <a:extLst>
-              <a:ext uri="{FF2B5EF4-FFF2-40B4-BE49-F238E27FC236}">
-                <a16:creationId xmlns:a16="http://schemas.microsoft.com/office/drawing/2014/main" id="{377B62A1-88AA-00AE-78CF-359DDE237A59}"/>
-              </a:ext>
-            </a:extLst>
-          </p:cNvPr>
+          <p:cNvPr id="5" name="Footer Placeholder 4"/>
           <p:cNvSpPr>
             <a:spLocks noGrp="1"/>
           </p:cNvSpPr>
@@ -1175,7 +1380,12 @@
             <p:ph type="ftr" sz="quarter" idx="11"/>
           </p:nvPr>
         </p:nvSpPr>
-        <p:spPr/>
+        <p:spPr>
+          <a:xfrm>
+            <a:off x="2182708" y="6272784"/>
+            <a:ext cx="6327648" cy="365125"/>
+          </a:xfrm>
+        </p:spPr>
         <p:txBody>
           <a:bodyPr/>
           <a:lstStyle/>
@@ -1184,15 +1394,93 @@
           </a:p>
         </p:txBody>
       </p:sp>
-      <p:sp>
-        <p:nvSpPr>
-          <p:cNvPr id="6" name="Marcador de número de diapositiva 5">
-            <a:extLst>
-              <a:ext uri="{FF2B5EF4-FFF2-40B4-BE49-F238E27FC236}">
-                <a16:creationId xmlns:a16="http://schemas.microsoft.com/office/drawing/2014/main" id="{65C22A07-64C7-C31B-DDF8-4CA35D38B124}"/>
-              </a:ext>
-            </a:extLst>
-          </p:cNvPr>
+      <p:grpSp>
+        <p:nvGrpSpPr>
+          <p:cNvPr id="8" name="Group 7"/>
+          <p:cNvGrpSpPr/>
+          <p:nvPr/>
+        </p:nvGrpSpPr>
+        <p:grpSpPr>
+          <a:xfrm>
+            <a:off x="897399" y="2325848"/>
+            <a:ext cx="1080904" cy="1080902"/>
+            <a:chOff x="9685338" y="4460675"/>
+            <a:chExt cx="1080904" cy="1080902"/>
+          </a:xfrm>
+        </p:grpSpPr>
+        <p:sp>
+          <p:nvSpPr>
+            <p:cNvPr id="9" name="Oval 8"/>
+            <p:cNvSpPr/>
+            <p:nvPr/>
+          </p:nvSpPr>
+          <p:spPr>
+            <a:xfrm>
+              <a:off x="9685338" y="4460675"/>
+              <a:ext cx="1080904" cy="1080902"/>
+            </a:xfrm>
+            <a:prstGeom prst="ellipse">
+              <a:avLst/>
+            </a:prstGeom>
+            <a:blipFill dpi="0" rotWithShape="1">
+              <a:blip r:embed="rId4">
+                <a:duotone>
+                  <a:schemeClr val="accent1">
+                    <a:shade val="45000"/>
+                    <a:satMod val="135000"/>
+                  </a:schemeClr>
+                  <a:prstClr val="white"/>
+                </a:duotone>
+                <a:extLst>
+                  <a:ext uri="{BEBA8EAE-BF5A-486C-A8C5-ECC9F3942E4B}">
+                    <a14:imgProps xmlns:a14="http://schemas.microsoft.com/office/drawing/2010/main">
+                      <a14:imgLayer r:embed="rId5">
+                        <a14:imgEffect>
+                          <a14:saturation sat="95000"/>
+                        </a14:imgEffect>
+                      </a14:imgLayer>
+                    </a14:imgProps>
+                  </a:ext>
+                </a:extLst>
+              </a:blip>
+              <a:srcRect/>
+              <a:tile tx="0" ty="0" sx="85000" sy="85000" flip="none" algn="tl"/>
+            </a:blipFill>
+            <a:ln w="25400" cap="flat" cmpd="sng" algn="ctr">
+              <a:noFill/>
+              <a:prstDash val="solid"/>
+            </a:ln>
+            <a:effectLst/>
+          </p:spPr>
+        </p:sp>
+        <p:sp>
+          <p:nvSpPr>
+            <p:cNvPr id="10" name="Oval 9"/>
+            <p:cNvSpPr/>
+            <p:nvPr/>
+          </p:nvSpPr>
+          <p:spPr>
+            <a:xfrm>
+              <a:off x="9793429" y="4568765"/>
+              <a:ext cx="864723" cy="864722"/>
+            </a:xfrm>
+            <a:prstGeom prst="ellipse">
+              <a:avLst/>
+            </a:prstGeom>
+            <a:noFill/>
+            <a:ln w="25400" cap="flat" cmpd="sng" algn="ctr">
+              <a:solidFill>
+                <a:sysClr val="window" lastClr="FFFFFF"/>
+              </a:solidFill>
+              <a:prstDash val="solid"/>
+            </a:ln>
+            <a:effectLst/>
+          </p:spPr>
+        </p:sp>
+      </p:grpSp>
+      <p:sp>
+        <p:nvSpPr>
+          <p:cNvPr id="6" name="Slide Number Placeholder 5"/>
           <p:cNvSpPr>
             <a:spLocks noGrp="1"/>
           </p:cNvSpPr>
@@ -1200,10 +1488,19 @@
             <p:ph type="sldNum" sz="quarter" idx="12"/>
           </p:nvPr>
         </p:nvSpPr>
-        <p:spPr/>
+        <p:spPr>
+          <a:xfrm>
+            <a:off x="843702" y="2506133"/>
+            <a:ext cx="1188298" cy="720332"/>
+          </a:xfrm>
+        </p:spPr>
         <p:txBody>
           <a:bodyPr/>
-          <a:lstStyle/>
+          <a:lstStyle>
+            <a:lvl1pPr>
+              <a:defRPr sz="2800"/>
+            </a:lvl1pPr>
+          </a:lstStyle>
           <a:p>
             <a:fld id="{36DE4F9D-57CD-4FDA-BF2D-60B37CCD6CA4}" type="slidenum">
               <a:rPr lang="es-CO" smtClean="0"/>
@@ -1216,7 +1513,7 @@
     </p:spTree>
     <p:extLst>
       <p:ext uri="{BB962C8B-B14F-4D97-AF65-F5344CB8AC3E}">
-        <p14:creationId xmlns:p14="http://schemas.microsoft.com/office/powerpoint/2010/main" val="1991432840"/>
+        <p14:creationId xmlns:p14="http://schemas.microsoft.com/office/powerpoint/2010/main" val="763396253"/>
       </p:ext>
     </p:extLst>
   </p:cSld>
@@ -1245,13 +1542,7 @@
       </p:grpSpPr>
       <p:sp>
         <p:nvSpPr>
-          <p:cNvPr id="2" name="Título 1">
-            <a:extLst>
-              <a:ext uri="{FF2B5EF4-FFF2-40B4-BE49-F238E27FC236}">
-                <a16:creationId xmlns:a16="http://schemas.microsoft.com/office/drawing/2014/main" id="{1890F070-B3ED-9F77-6C3C-C6C7839E9437}"/>
-              </a:ext>
-            </a:extLst>
-          </p:cNvPr>
+          <p:cNvPr id="2" name="Title 1"/>
           <p:cNvSpPr>
             <a:spLocks noGrp="1"/>
           </p:cNvSpPr>
@@ -1268,19 +1559,13 @@
               <a:rPr lang="es-ES"/>
               <a:t>Haga clic para modificar el estilo de título del patrón</a:t>
             </a:r>
-            <a:endParaRPr lang="es-CO"/>
-          </a:p>
-        </p:txBody>
-      </p:sp>
-      <p:sp>
-        <p:nvSpPr>
-          <p:cNvPr id="3" name="Marcador de contenido 2">
-            <a:extLst>
-              <a:ext uri="{FF2B5EF4-FFF2-40B4-BE49-F238E27FC236}">
-                <a16:creationId xmlns:a16="http://schemas.microsoft.com/office/drawing/2014/main" id="{1CBAEB19-19C1-31E3-A24A-644858FC32EA}"/>
-              </a:ext>
-            </a:extLst>
-          </p:cNvPr>
+            <a:endParaRPr lang="en-US" dirty="0"/>
+          </a:p>
+        </p:txBody>
+      </p:sp>
+      <p:sp>
+        <p:nvSpPr>
+          <p:cNvPr id="3" name="Content Placeholder 2"/>
           <p:cNvSpPr>
             <a:spLocks noGrp="1"/>
           </p:cNvSpPr>
@@ -1290,13 +1575,41 @@
         </p:nvSpPr>
         <p:spPr>
           <a:xfrm>
-            <a:off x="838200" y="1825625"/>
-            <a:ext cx="5181600" cy="4351338"/>
+            <a:off x="1069848" y="2194560"/>
+            <a:ext cx="4754880" cy="3977640"/>
           </a:xfrm>
         </p:spPr>
         <p:txBody>
           <a:bodyPr/>
-          <a:lstStyle/>
+          <a:lstStyle>
+            <a:lvl1pPr>
+              <a:defRPr sz="2000"/>
+            </a:lvl1pPr>
+            <a:lvl2pPr>
+              <a:defRPr sz="1800"/>
+            </a:lvl2pPr>
+            <a:lvl3pPr>
+              <a:defRPr sz="1600"/>
+            </a:lvl3pPr>
+            <a:lvl4pPr>
+              <a:defRPr sz="1600"/>
+            </a:lvl4pPr>
+            <a:lvl5pPr>
+              <a:defRPr sz="1600"/>
+            </a:lvl5pPr>
+            <a:lvl6pPr>
+              <a:defRPr sz="1600"/>
+            </a:lvl6pPr>
+            <a:lvl7pPr>
+              <a:defRPr sz="1600"/>
+            </a:lvl7pPr>
+            <a:lvl8pPr>
+              <a:defRPr sz="1600"/>
+            </a:lvl8pPr>
+            <a:lvl9pPr>
+              <a:defRPr sz="1600"/>
+            </a:lvl9pPr>
+          </a:lstStyle>
           <a:p>
             <a:pPr lvl="0"/>
             <a:r>
@@ -1331,19 +1644,13 @@
               <a:rPr lang="es-ES"/>
               <a:t>Quinto nivel</a:t>
             </a:r>
-            <a:endParaRPr lang="es-CO"/>
-          </a:p>
-        </p:txBody>
-      </p:sp>
-      <p:sp>
-        <p:nvSpPr>
-          <p:cNvPr id="4" name="Marcador de contenido 3">
-            <a:extLst>
-              <a:ext uri="{FF2B5EF4-FFF2-40B4-BE49-F238E27FC236}">
-                <a16:creationId xmlns:a16="http://schemas.microsoft.com/office/drawing/2014/main" id="{277E06BA-5C26-FA03-36DC-436A7D9F690C}"/>
-              </a:ext>
-            </a:extLst>
-          </p:cNvPr>
+            <a:endParaRPr lang="en-US" dirty="0"/>
+          </a:p>
+        </p:txBody>
+      </p:sp>
+      <p:sp>
+        <p:nvSpPr>
+          <p:cNvPr id="4" name="Content Placeholder 3"/>
           <p:cNvSpPr>
             <a:spLocks noGrp="1"/>
           </p:cNvSpPr>
@@ -1353,13 +1660,41 @@
         </p:nvSpPr>
         <p:spPr>
           <a:xfrm>
-            <a:off x="6172200" y="1825625"/>
-            <a:ext cx="5181600" cy="4351338"/>
+            <a:off x="6364224" y="2194560"/>
+            <a:ext cx="4754880" cy="3977640"/>
           </a:xfrm>
         </p:spPr>
         <p:txBody>
           <a:bodyPr/>
-          <a:lstStyle/>
+          <a:lstStyle>
+            <a:lvl1pPr>
+              <a:defRPr sz="2000"/>
+            </a:lvl1pPr>
+            <a:lvl2pPr>
+              <a:defRPr sz="1800"/>
+            </a:lvl2pPr>
+            <a:lvl3pPr>
+              <a:defRPr sz="1600"/>
+            </a:lvl3pPr>
+            <a:lvl4pPr>
+              <a:defRPr sz="1600"/>
+            </a:lvl4pPr>
+            <a:lvl5pPr>
+              <a:defRPr sz="1600"/>
+            </a:lvl5pPr>
+            <a:lvl6pPr>
+              <a:defRPr sz="1600"/>
+            </a:lvl6pPr>
+            <a:lvl7pPr>
+              <a:defRPr sz="1600"/>
+            </a:lvl7pPr>
+            <a:lvl8pPr>
+              <a:defRPr sz="1600"/>
+            </a:lvl8pPr>
+            <a:lvl9pPr>
+              <a:defRPr sz="1600"/>
+            </a:lvl9pPr>
+          </a:lstStyle>
           <a:p>
             <a:pPr lvl="0"/>
             <a:r>
@@ -1394,19 +1729,13 @@
               <a:rPr lang="es-ES"/>
               <a:t>Quinto nivel</a:t>
             </a:r>
-            <a:endParaRPr lang="es-CO"/>
-          </a:p>
-        </p:txBody>
-      </p:sp>
-      <p:sp>
-        <p:nvSpPr>
-          <p:cNvPr id="5" name="Marcador de fecha 4">
-            <a:extLst>
-              <a:ext uri="{FF2B5EF4-FFF2-40B4-BE49-F238E27FC236}">
-                <a16:creationId xmlns:a16="http://schemas.microsoft.com/office/drawing/2014/main" id="{CD9A31DD-45D9-A455-BA5B-694B97A49026}"/>
-              </a:ext>
-            </a:extLst>
-          </p:cNvPr>
+            <a:endParaRPr lang="en-US" dirty="0"/>
+          </a:p>
+        </p:txBody>
+      </p:sp>
+      <p:sp>
+        <p:nvSpPr>
+          <p:cNvPr id="5" name="Date Placeholder 4"/>
           <p:cNvSpPr>
             <a:spLocks noGrp="1"/>
           </p:cNvSpPr>
@@ -1429,13 +1758,7 @@
       </p:sp>
       <p:sp>
         <p:nvSpPr>
-          <p:cNvPr id="6" name="Marcador de pie de página 5">
-            <a:extLst>
-              <a:ext uri="{FF2B5EF4-FFF2-40B4-BE49-F238E27FC236}">
-                <a16:creationId xmlns:a16="http://schemas.microsoft.com/office/drawing/2014/main" id="{7D7724DB-3A6A-2B9E-3380-1F28FC2D3054}"/>
-              </a:ext>
-            </a:extLst>
-          </p:cNvPr>
+          <p:cNvPr id="6" name="Footer Placeholder 5"/>
           <p:cNvSpPr>
             <a:spLocks noGrp="1"/>
           </p:cNvSpPr>
@@ -1454,13 +1777,7 @@
       </p:sp>
       <p:sp>
         <p:nvSpPr>
-          <p:cNvPr id="7" name="Marcador de número de diapositiva 6">
-            <a:extLst>
-              <a:ext uri="{FF2B5EF4-FFF2-40B4-BE49-F238E27FC236}">
-                <a16:creationId xmlns:a16="http://schemas.microsoft.com/office/drawing/2014/main" id="{6F202DB6-0789-E005-0140-82322208EEB2}"/>
-              </a:ext>
-            </a:extLst>
-          </p:cNvPr>
+          <p:cNvPr id="7" name="Slide Number Placeholder 6"/>
           <p:cNvSpPr>
             <a:spLocks noGrp="1"/>
           </p:cNvSpPr>
@@ -1484,7 +1801,7 @@
     </p:spTree>
     <p:extLst>
       <p:ext uri="{BB962C8B-B14F-4D97-AF65-F5344CB8AC3E}">
-        <p14:creationId xmlns:p14="http://schemas.microsoft.com/office/powerpoint/2010/main" val="1913997731"/>
+        <p14:creationId xmlns:p14="http://schemas.microsoft.com/office/powerpoint/2010/main" val="2661847330"/>
       </p:ext>
     </p:extLst>
   </p:cSld>
@@ -1513,13 +1830,7 @@
       </p:grpSpPr>
       <p:sp>
         <p:nvSpPr>
-          <p:cNvPr id="2" name="Título 1">
-            <a:extLst>
-              <a:ext uri="{FF2B5EF4-FFF2-40B4-BE49-F238E27FC236}">
-                <a16:creationId xmlns:a16="http://schemas.microsoft.com/office/drawing/2014/main" id="{13055012-FF83-5DFA-CEF8-70F75E7A5F5E}"/>
-              </a:ext>
-            </a:extLst>
-          </p:cNvPr>
+          <p:cNvPr id="10" name="Title 9"/>
           <p:cNvSpPr>
             <a:spLocks noGrp="1"/>
           </p:cNvSpPr>
@@ -1527,12 +1838,7 @@
             <p:ph type="title"/>
           </p:nvPr>
         </p:nvSpPr>
-        <p:spPr>
-          <a:xfrm>
-            <a:off x="839788" y="365125"/>
-            <a:ext cx="10515600" cy="1325563"/>
-          </a:xfrm>
-        </p:spPr>
+        <p:spPr/>
         <p:txBody>
           <a:bodyPr/>
           <a:lstStyle/>
@@ -1541,19 +1847,13 @@
               <a:rPr lang="es-ES"/>
               <a:t>Haga clic para modificar el estilo de título del patrón</a:t>
             </a:r>
-            <a:endParaRPr lang="es-CO"/>
-          </a:p>
-        </p:txBody>
-      </p:sp>
-      <p:sp>
-        <p:nvSpPr>
-          <p:cNvPr id="3" name="Marcador de texto 2">
-            <a:extLst>
-              <a:ext uri="{FF2B5EF4-FFF2-40B4-BE49-F238E27FC236}">
-                <a16:creationId xmlns:a16="http://schemas.microsoft.com/office/drawing/2014/main" id="{1B48803D-4B13-6A99-AE00-61AA8EC9C7AE}"/>
-              </a:ext>
-            </a:extLst>
-          </p:cNvPr>
+            <a:endParaRPr lang="en-US" dirty="0"/>
+          </a:p>
+        </p:txBody>
+      </p:sp>
+      <p:sp>
+        <p:nvSpPr>
+          <p:cNvPr id="3" name="Text Placeholder 2"/>
           <p:cNvSpPr>
             <a:spLocks noGrp="1"/>
           </p:cNvSpPr>
@@ -1563,16 +1863,24 @@
         </p:nvSpPr>
         <p:spPr>
           <a:xfrm>
-            <a:off x="839788" y="1681163"/>
-            <a:ext cx="5157787" cy="823912"/>
+            <a:off x="1066800" y="2048256"/>
+            <a:ext cx="4754880" cy="640080"/>
           </a:xfrm>
         </p:spPr>
         <p:txBody>
-          <a:bodyPr anchor="b"/>
+          <a:bodyPr anchor="ctr">
+            <a:normAutofit/>
+          </a:bodyPr>
           <a:lstStyle>
             <a:lvl1pPr marL="0" indent="0">
               <a:buNone/>
-              <a:defRPr sz="2400" b="1"/>
+              <a:defRPr sz="2000" b="1">
+                <a:solidFill>
+                  <a:schemeClr val="accent1">
+                    <a:lumMod val="75000"/>
+                  </a:schemeClr>
+                </a:solidFill>
+              </a:defRPr>
             </a:lvl1pPr>
             <a:lvl2pPr marL="457200" indent="0">
               <a:buNone/>
@@ -1618,13 +1926,7 @@
       </p:sp>
       <p:sp>
         <p:nvSpPr>
-          <p:cNvPr id="4" name="Marcador de contenido 3">
-            <a:extLst>
-              <a:ext uri="{FF2B5EF4-FFF2-40B4-BE49-F238E27FC236}">
-                <a16:creationId xmlns:a16="http://schemas.microsoft.com/office/drawing/2014/main" id="{647F715B-D364-F549-C860-49C9743AA2A7}"/>
-              </a:ext>
-            </a:extLst>
-          </p:cNvPr>
+          <p:cNvPr id="4" name="Content Placeholder 3"/>
           <p:cNvSpPr>
             <a:spLocks noGrp="1"/>
           </p:cNvSpPr>
@@ -1634,13 +1936,41 @@
         </p:nvSpPr>
         <p:spPr>
           <a:xfrm>
-            <a:off x="839788" y="2505075"/>
-            <a:ext cx="5157787" cy="3684588"/>
+            <a:off x="1069848" y="2743200"/>
+            <a:ext cx="4754880" cy="3291840"/>
           </a:xfrm>
         </p:spPr>
         <p:txBody>
           <a:bodyPr/>
-          <a:lstStyle/>
+          <a:lstStyle>
+            <a:lvl1pPr>
+              <a:defRPr sz="2000"/>
+            </a:lvl1pPr>
+            <a:lvl2pPr>
+              <a:defRPr sz="1800"/>
+            </a:lvl2pPr>
+            <a:lvl3pPr>
+              <a:defRPr sz="1600"/>
+            </a:lvl3pPr>
+            <a:lvl4pPr>
+              <a:defRPr sz="1600"/>
+            </a:lvl4pPr>
+            <a:lvl5pPr>
+              <a:defRPr sz="1600"/>
+            </a:lvl5pPr>
+            <a:lvl6pPr>
+              <a:defRPr sz="1600"/>
+            </a:lvl6pPr>
+            <a:lvl7pPr>
+              <a:defRPr sz="1600"/>
+            </a:lvl7pPr>
+            <a:lvl8pPr>
+              <a:defRPr sz="1600"/>
+            </a:lvl8pPr>
+            <a:lvl9pPr>
+              <a:defRPr sz="1600"/>
+            </a:lvl9pPr>
+          </a:lstStyle>
           <a:p>
             <a:pPr lvl="0"/>
             <a:r>
@@ -1675,19 +2005,13 @@
               <a:rPr lang="es-ES"/>
               <a:t>Quinto nivel</a:t>
             </a:r>
-            <a:endParaRPr lang="es-CO"/>
-          </a:p>
-        </p:txBody>
-      </p:sp>
-      <p:sp>
-        <p:nvSpPr>
-          <p:cNvPr id="5" name="Marcador de texto 4">
-            <a:extLst>
-              <a:ext uri="{FF2B5EF4-FFF2-40B4-BE49-F238E27FC236}">
-                <a16:creationId xmlns:a16="http://schemas.microsoft.com/office/drawing/2014/main" id="{175ACA40-36F7-F0B1-450D-F4B489638E69}"/>
-              </a:ext>
-            </a:extLst>
-          </p:cNvPr>
+            <a:endParaRPr lang="en-US" dirty="0"/>
+          </a:p>
+        </p:txBody>
+      </p:sp>
+      <p:sp>
+        <p:nvSpPr>
+          <p:cNvPr id="5" name="Text Placeholder 4"/>
           <p:cNvSpPr>
             <a:spLocks noGrp="1"/>
           </p:cNvSpPr>
@@ -1697,16 +2021,24 @@
         </p:nvSpPr>
         <p:spPr>
           <a:xfrm>
-            <a:off x="6172200" y="1681163"/>
-            <a:ext cx="5183188" cy="823912"/>
+            <a:off x="6364224" y="2048256"/>
+            <a:ext cx="4754880" cy="640080"/>
           </a:xfrm>
         </p:spPr>
         <p:txBody>
-          <a:bodyPr anchor="b"/>
+          <a:bodyPr anchor="ctr">
+            <a:normAutofit/>
+          </a:bodyPr>
           <a:lstStyle>
             <a:lvl1pPr marL="0" indent="0">
               <a:buNone/>
-              <a:defRPr sz="2400" b="1"/>
+              <a:defRPr sz="2000" b="1">
+                <a:solidFill>
+                  <a:schemeClr val="accent1">
+                    <a:lumMod val="75000"/>
+                  </a:schemeClr>
+                </a:solidFill>
+              </a:defRPr>
             </a:lvl1pPr>
             <a:lvl2pPr marL="457200" indent="0">
               <a:buNone/>
@@ -1752,13 +2084,7 @@
       </p:sp>
       <p:sp>
         <p:nvSpPr>
-          <p:cNvPr id="6" name="Marcador de contenido 5">
-            <a:extLst>
-              <a:ext uri="{FF2B5EF4-FFF2-40B4-BE49-F238E27FC236}">
-                <a16:creationId xmlns:a16="http://schemas.microsoft.com/office/drawing/2014/main" id="{9B739E11-C081-52EE-BAFA-9236ED156C0D}"/>
-              </a:ext>
-            </a:extLst>
-          </p:cNvPr>
+          <p:cNvPr id="6" name="Content Placeholder 5"/>
           <p:cNvSpPr>
             <a:spLocks noGrp="1"/>
           </p:cNvSpPr>
@@ -1768,13 +2094,41 @@
         </p:nvSpPr>
         <p:spPr>
           <a:xfrm>
-            <a:off x="6172200" y="2505075"/>
-            <a:ext cx="5183188" cy="3684588"/>
+            <a:off x="6364224" y="2743200"/>
+            <a:ext cx="4754880" cy="3291840"/>
           </a:xfrm>
         </p:spPr>
         <p:txBody>
           <a:bodyPr/>
-          <a:lstStyle/>
+          <a:lstStyle>
+            <a:lvl1pPr>
+              <a:defRPr sz="2000"/>
+            </a:lvl1pPr>
+            <a:lvl2pPr>
+              <a:defRPr sz="1800"/>
+            </a:lvl2pPr>
+            <a:lvl3pPr>
+              <a:defRPr sz="1600"/>
+            </a:lvl3pPr>
+            <a:lvl4pPr>
+              <a:defRPr sz="1600"/>
+            </a:lvl4pPr>
+            <a:lvl5pPr>
+              <a:defRPr sz="1600"/>
+            </a:lvl5pPr>
+            <a:lvl6pPr>
+              <a:defRPr sz="1600"/>
+            </a:lvl6pPr>
+            <a:lvl7pPr>
+              <a:defRPr sz="1600"/>
+            </a:lvl7pPr>
+            <a:lvl8pPr>
+              <a:defRPr sz="1600"/>
+            </a:lvl8pPr>
+            <a:lvl9pPr>
+              <a:defRPr sz="1600"/>
+            </a:lvl9pPr>
+          </a:lstStyle>
           <a:p>
             <a:pPr lvl="0"/>
             <a:r>
@@ -1809,19 +2163,13 @@
               <a:rPr lang="es-ES"/>
               <a:t>Quinto nivel</a:t>
             </a:r>
-            <a:endParaRPr lang="es-CO"/>
-          </a:p>
-        </p:txBody>
-      </p:sp>
-      <p:sp>
-        <p:nvSpPr>
-          <p:cNvPr id="7" name="Marcador de fecha 6">
-            <a:extLst>
-              <a:ext uri="{FF2B5EF4-FFF2-40B4-BE49-F238E27FC236}">
-                <a16:creationId xmlns:a16="http://schemas.microsoft.com/office/drawing/2014/main" id="{2C87ADCF-5990-FD2C-99C5-A0B8AF6A82BD}"/>
-              </a:ext>
-            </a:extLst>
-          </p:cNvPr>
+            <a:endParaRPr lang="en-US" dirty="0"/>
+          </a:p>
+        </p:txBody>
+      </p:sp>
+      <p:sp>
+        <p:nvSpPr>
+          <p:cNvPr id="7" name="Date Placeholder 6"/>
           <p:cNvSpPr>
             <a:spLocks noGrp="1"/>
           </p:cNvSpPr>
@@ -1844,13 +2192,7 @@
       </p:sp>
       <p:sp>
         <p:nvSpPr>
-          <p:cNvPr id="8" name="Marcador de pie de página 7">
-            <a:extLst>
-              <a:ext uri="{FF2B5EF4-FFF2-40B4-BE49-F238E27FC236}">
-                <a16:creationId xmlns:a16="http://schemas.microsoft.com/office/drawing/2014/main" id="{9F3CC74A-B9A8-6AC6-FA64-6F6471731F21}"/>
-              </a:ext>
-            </a:extLst>
-          </p:cNvPr>
+          <p:cNvPr id="8" name="Footer Placeholder 7"/>
           <p:cNvSpPr>
             <a:spLocks noGrp="1"/>
           </p:cNvSpPr>
@@ -1869,13 +2211,7 @@
       </p:sp>
       <p:sp>
         <p:nvSpPr>
-          <p:cNvPr id="9" name="Marcador de número de diapositiva 8">
-            <a:extLst>
-              <a:ext uri="{FF2B5EF4-FFF2-40B4-BE49-F238E27FC236}">
-                <a16:creationId xmlns:a16="http://schemas.microsoft.com/office/drawing/2014/main" id="{720DD866-A348-5AF7-779C-F6C8BC3E7207}"/>
-              </a:ext>
-            </a:extLst>
-          </p:cNvPr>
+          <p:cNvPr id="9" name="Slide Number Placeholder 8"/>
           <p:cNvSpPr>
             <a:spLocks noGrp="1"/>
           </p:cNvSpPr>
@@ -1899,7 +2235,7 @@
     </p:spTree>
     <p:extLst>
       <p:ext uri="{BB962C8B-B14F-4D97-AF65-F5344CB8AC3E}">
-        <p14:creationId xmlns:p14="http://schemas.microsoft.com/office/powerpoint/2010/main" val="3689943673"/>
+        <p14:creationId xmlns:p14="http://schemas.microsoft.com/office/powerpoint/2010/main" val="3081785328"/>
       </p:ext>
     </p:extLst>
   </p:cSld>
@@ -1928,13 +2264,7 @@
       </p:grpSpPr>
       <p:sp>
         <p:nvSpPr>
-          <p:cNvPr id="2" name="Título 1">
-            <a:extLst>
-              <a:ext uri="{FF2B5EF4-FFF2-40B4-BE49-F238E27FC236}">
-                <a16:creationId xmlns:a16="http://schemas.microsoft.com/office/drawing/2014/main" id="{7A264E75-8E6D-058E-66EB-8DBCB63B426F}"/>
-              </a:ext>
-            </a:extLst>
-          </p:cNvPr>
+          <p:cNvPr id="6" name="Title 5"/>
           <p:cNvSpPr>
             <a:spLocks noGrp="1"/>
           </p:cNvSpPr>
@@ -1951,19 +2281,13 @@
               <a:rPr lang="es-ES"/>
               <a:t>Haga clic para modificar el estilo de título del patrón</a:t>
             </a:r>
-            <a:endParaRPr lang="es-CO"/>
-          </a:p>
-        </p:txBody>
-      </p:sp>
-      <p:sp>
-        <p:nvSpPr>
-          <p:cNvPr id="3" name="Marcador de fecha 2">
-            <a:extLst>
-              <a:ext uri="{FF2B5EF4-FFF2-40B4-BE49-F238E27FC236}">
-                <a16:creationId xmlns:a16="http://schemas.microsoft.com/office/drawing/2014/main" id="{ABB03347-7D5C-7600-B80C-E9FF058E10D4}"/>
-              </a:ext>
-            </a:extLst>
-          </p:cNvPr>
+            <a:endParaRPr lang="en-US" dirty="0"/>
+          </a:p>
+        </p:txBody>
+      </p:sp>
+      <p:sp>
+        <p:nvSpPr>
+          <p:cNvPr id="3" name="Date Placeholder 2"/>
           <p:cNvSpPr>
             <a:spLocks noGrp="1"/>
           </p:cNvSpPr>
@@ -1986,13 +2310,7 @@
       </p:sp>
       <p:sp>
         <p:nvSpPr>
-          <p:cNvPr id="4" name="Marcador de pie de página 3">
-            <a:extLst>
-              <a:ext uri="{FF2B5EF4-FFF2-40B4-BE49-F238E27FC236}">
-                <a16:creationId xmlns:a16="http://schemas.microsoft.com/office/drawing/2014/main" id="{8681126E-2DAB-3CC4-00EC-70EDE216B55B}"/>
-              </a:ext>
-            </a:extLst>
-          </p:cNvPr>
+          <p:cNvPr id="4" name="Footer Placeholder 3"/>
           <p:cNvSpPr>
             <a:spLocks noGrp="1"/>
           </p:cNvSpPr>
@@ -2011,13 +2329,7 @@
       </p:sp>
       <p:sp>
         <p:nvSpPr>
-          <p:cNvPr id="5" name="Marcador de número de diapositiva 4">
-            <a:extLst>
-              <a:ext uri="{FF2B5EF4-FFF2-40B4-BE49-F238E27FC236}">
-                <a16:creationId xmlns:a16="http://schemas.microsoft.com/office/drawing/2014/main" id="{9886E367-3E25-E29E-6416-C8EB18552AEC}"/>
-              </a:ext>
-            </a:extLst>
-          </p:cNvPr>
+          <p:cNvPr id="5" name="Slide Number Placeholder 4"/>
           <p:cNvSpPr>
             <a:spLocks noGrp="1"/>
           </p:cNvSpPr>
@@ -2041,7 +2353,7 @@
     </p:spTree>
     <p:extLst>
       <p:ext uri="{BB962C8B-B14F-4D97-AF65-F5344CB8AC3E}">
-        <p14:creationId xmlns:p14="http://schemas.microsoft.com/office/powerpoint/2010/main" val="1749533092"/>
+        <p14:creationId xmlns:p14="http://schemas.microsoft.com/office/powerpoint/2010/main" val="2157772055"/>
       </p:ext>
     </p:extLst>
   </p:cSld>
@@ -2070,13 +2382,7 @@
       </p:grpSpPr>
       <p:sp>
         <p:nvSpPr>
-          <p:cNvPr id="2" name="Marcador de fecha 1">
-            <a:extLst>
-              <a:ext uri="{FF2B5EF4-FFF2-40B4-BE49-F238E27FC236}">
-                <a16:creationId xmlns:a16="http://schemas.microsoft.com/office/drawing/2014/main" id="{736A7C01-7602-EB1E-792C-B17CD5B512A3}"/>
-              </a:ext>
-            </a:extLst>
-          </p:cNvPr>
+          <p:cNvPr id="2" name="Date Placeholder 1"/>
           <p:cNvSpPr>
             <a:spLocks noGrp="1"/>
           </p:cNvSpPr>
@@ -2099,13 +2405,7 @@
       </p:sp>
       <p:sp>
         <p:nvSpPr>
-          <p:cNvPr id="3" name="Marcador de pie de página 2">
-            <a:extLst>
-              <a:ext uri="{FF2B5EF4-FFF2-40B4-BE49-F238E27FC236}">
-                <a16:creationId xmlns:a16="http://schemas.microsoft.com/office/drawing/2014/main" id="{2C223C2B-E78C-4CF7-6956-A23BCC84686C}"/>
-              </a:ext>
-            </a:extLst>
-          </p:cNvPr>
+          <p:cNvPr id="3" name="Footer Placeholder 2"/>
           <p:cNvSpPr>
             <a:spLocks noGrp="1"/>
           </p:cNvSpPr>
@@ -2124,13 +2424,7 @@
       </p:sp>
       <p:sp>
         <p:nvSpPr>
-          <p:cNvPr id="4" name="Marcador de número de diapositiva 3">
-            <a:extLst>
-              <a:ext uri="{FF2B5EF4-FFF2-40B4-BE49-F238E27FC236}">
-                <a16:creationId xmlns:a16="http://schemas.microsoft.com/office/drawing/2014/main" id="{B64C115A-6804-FB81-6367-E8BE6F2BA8B9}"/>
-              </a:ext>
-            </a:extLst>
-          </p:cNvPr>
+          <p:cNvPr id="4" name="Slide Number Placeholder 3"/>
           <p:cNvSpPr>
             <a:spLocks noGrp="1"/>
           </p:cNvSpPr>
@@ -2154,7 +2448,7 @@
     </p:spTree>
     <p:extLst>
       <p:ext uri="{BB962C8B-B14F-4D97-AF65-F5344CB8AC3E}">
-        <p14:creationId xmlns:p14="http://schemas.microsoft.com/office/powerpoint/2010/main" val="2156100989"/>
+        <p14:creationId xmlns:p14="http://schemas.microsoft.com/office/powerpoint/2010/main" val="532347445"/>
       </p:ext>
     </p:extLst>
   </p:cSld>
@@ -2165,7 +2459,7 @@
 </file>
 
 <file path=ppt/slideLayouts/slideLayout8.xml><?xml version="1.0" encoding="utf-8"?>
-<p:sldLayout xmlns:a="http://schemas.openxmlformats.org/drawingml/2006/main" xmlns:r="http://schemas.openxmlformats.org/officeDocument/2006/relationships" xmlns:p="http://schemas.openxmlformats.org/presentationml/2006/main" type="objTx" preserve="1">
+<p:sldLayout xmlns:a="http://schemas.openxmlformats.org/drawingml/2006/main" xmlns:r="http://schemas.openxmlformats.org/officeDocument/2006/relationships" xmlns:p="http://schemas.openxmlformats.org/presentationml/2006/main" showMasterSp="0" type="objTx" preserve="1">
   <p:cSld name="Contenido con título">
     <p:spTree>
       <p:nvGrpSpPr>
@@ -2183,13 +2477,64 @@
       </p:grpSpPr>
       <p:sp>
         <p:nvSpPr>
-          <p:cNvPr id="2" name="Título 1">
-            <a:extLst>
-              <a:ext uri="{FF2B5EF4-FFF2-40B4-BE49-F238E27FC236}">
-                <a16:creationId xmlns:a16="http://schemas.microsoft.com/office/drawing/2014/main" id="{D3BAB9DE-85C7-4873-7FA7-F3626FB13E91}"/>
-              </a:ext>
-            </a:extLst>
-          </p:cNvPr>
+          <p:cNvPr id="8" name="Rectangle 7"/>
+          <p:cNvSpPr/>
+          <p:nvPr/>
+        </p:nvSpPr>
+        <p:spPr>
+          <a:xfrm>
+            <a:off x="8303740" y="0"/>
+            <a:ext cx="3888259" cy="6857999"/>
+          </a:xfrm>
+          <a:prstGeom prst="rect">
+            <a:avLst/>
+          </a:prstGeom>
+          <a:blipFill dpi="0" rotWithShape="1">
+            <a:blip r:embed="rId2">
+              <a:alphaModFix amt="60000"/>
+              <a:lum bright="70000" contrast="-70000"/>
+              <a:extLst>
+                <a:ext uri="{BEBA8EAE-BF5A-486C-A8C5-ECC9F3942E4B}">
+                  <a14:imgProps xmlns:a14="http://schemas.microsoft.com/office/drawing/2010/main">
+                    <a14:imgLayer r:embed="rId3">
+                      <a14:imgEffect>
+                        <a14:sharpenSoften amount="61000"/>
+                      </a14:imgEffect>
+                    </a14:imgLayer>
+                  </a14:imgProps>
+                </a:ext>
+                <a:ext uri="{28A0092B-C50C-407E-A947-70E740481C1C}">
+                  <a14:useLocalDpi xmlns:a14="http://schemas.microsoft.com/office/drawing/2010/main" val="0"/>
+                </a:ext>
+              </a:extLst>
+            </a:blip>
+            <a:srcRect/>
+            <a:tile tx="0" ty="-704850" sx="92000" sy="89000" flip="xy" algn="ctr"/>
+          </a:blipFill>
+          <a:ln>
+            <a:noFill/>
+          </a:ln>
+        </p:spPr>
+        <p:style>
+          <a:lnRef idx="2">
+            <a:schemeClr val="accent1">
+              <a:shade val="50000"/>
+            </a:schemeClr>
+          </a:lnRef>
+          <a:fillRef idx="1">
+            <a:schemeClr val="accent1"/>
+          </a:fillRef>
+          <a:effectRef idx="0">
+            <a:schemeClr val="accent1"/>
+          </a:effectRef>
+          <a:fontRef idx="minor">
+            <a:schemeClr val="lt1"/>
+          </a:fontRef>
+        </p:style>
+      </p:sp>
+      <p:sp>
+        <p:nvSpPr>
+          <p:cNvPr id="2" name="Title 1"/>
           <p:cNvSpPr>
             <a:spLocks noGrp="1"/>
           </p:cNvSpPr>
@@ -2199,15 +2544,17 @@
         </p:nvSpPr>
         <p:spPr>
           <a:xfrm>
-            <a:off x="839788" y="457200"/>
-            <a:ext cx="3932237" cy="1600200"/>
+            <a:off x="8549640" y="685800"/>
+            <a:ext cx="3200400" cy="1737360"/>
           </a:xfrm>
         </p:spPr>
         <p:txBody>
-          <a:bodyPr anchor="b"/>
+          <a:bodyPr anchor="b">
+            <a:normAutofit/>
+          </a:bodyPr>
           <a:lstStyle>
             <a:lvl1pPr>
-              <a:defRPr sz="3200"/>
+              <a:defRPr sz="3200" b="1"/>
             </a:lvl1pPr>
           </a:lstStyle>
           <a:p>
@@ -2215,19 +2562,13 @@
               <a:rPr lang="es-ES"/>
               <a:t>Haga clic para modificar el estilo de título del patrón</a:t>
             </a:r>
-            <a:endParaRPr lang="es-CO"/>
-          </a:p>
-        </p:txBody>
-      </p:sp>
-      <p:sp>
-        <p:nvSpPr>
-          <p:cNvPr id="3" name="Marcador de contenido 2">
-            <a:extLst>
-              <a:ext uri="{FF2B5EF4-FFF2-40B4-BE49-F238E27FC236}">
-                <a16:creationId xmlns:a16="http://schemas.microsoft.com/office/drawing/2014/main" id="{B1B24DAF-9A65-8F50-6385-9A345A5064F7}"/>
-              </a:ext>
-            </a:extLst>
-          </p:cNvPr>
+            <a:endParaRPr lang="en-US" dirty="0"/>
+          </a:p>
+        </p:txBody>
+      </p:sp>
+      <p:sp>
+        <p:nvSpPr>
+          <p:cNvPr id="3" name="Content Placeholder 2"/>
           <p:cNvSpPr>
             <a:spLocks noGrp="1"/>
           </p:cNvSpPr>
@@ -2237,39 +2578,39 @@
         </p:nvSpPr>
         <p:spPr>
           <a:xfrm>
-            <a:off x="5183188" y="987425"/>
-            <a:ext cx="6172200" cy="4873625"/>
+            <a:off x="838200" y="685800"/>
+            <a:ext cx="6711696" cy="5020056"/>
           </a:xfrm>
         </p:spPr>
         <p:txBody>
           <a:bodyPr/>
           <a:lstStyle>
             <a:lvl1pPr>
-              <a:defRPr sz="3200"/>
+              <a:defRPr sz="2000"/>
             </a:lvl1pPr>
             <a:lvl2pPr>
-              <a:defRPr sz="2800"/>
+              <a:defRPr sz="1800"/>
             </a:lvl2pPr>
             <a:lvl3pPr>
-              <a:defRPr sz="2400"/>
+              <a:defRPr sz="1600"/>
             </a:lvl3pPr>
             <a:lvl4pPr>
-              <a:defRPr sz="2000"/>
+              <a:defRPr sz="1600"/>
             </a:lvl4pPr>
             <a:lvl5pPr>
-              <a:defRPr sz="2000"/>
+              <a:defRPr sz="1600"/>
             </a:lvl5pPr>
             <a:lvl6pPr>
-              <a:defRPr sz="2000"/>
+              <a:defRPr sz="1600"/>
             </a:lvl6pPr>
             <a:lvl7pPr>
-              <a:defRPr sz="2000"/>
+              <a:defRPr sz="1600"/>
             </a:lvl7pPr>
             <a:lvl8pPr>
-              <a:defRPr sz="2000"/>
+              <a:defRPr sz="1600"/>
             </a:lvl8pPr>
             <a:lvl9pPr>
-              <a:defRPr sz="2000"/>
+              <a:defRPr sz="1600"/>
             </a:lvl9pPr>
           </a:lstStyle>
           <a:p>
@@ -2306,19 +2647,13 @@
               <a:rPr lang="es-ES"/>
               <a:t>Quinto nivel</a:t>
             </a:r>
-            <a:endParaRPr lang="es-CO"/>
-          </a:p>
-        </p:txBody>
-      </p:sp>
-      <p:sp>
-        <p:nvSpPr>
-          <p:cNvPr id="4" name="Marcador de texto 3">
-            <a:extLst>
-              <a:ext uri="{FF2B5EF4-FFF2-40B4-BE49-F238E27FC236}">
-                <a16:creationId xmlns:a16="http://schemas.microsoft.com/office/drawing/2014/main" id="{6377E614-FD43-46C0-B7F5-E5C73A0907E4}"/>
-              </a:ext>
-            </a:extLst>
-          </p:cNvPr>
+            <a:endParaRPr lang="en-US" dirty="0"/>
+          </a:p>
+        </p:txBody>
+      </p:sp>
+      <p:sp>
+        <p:nvSpPr>
+          <p:cNvPr id="4" name="Text Placeholder 3"/>
           <p:cNvSpPr>
             <a:spLocks noGrp="1"/>
           </p:cNvSpPr>
@@ -2328,48 +2663,62 @@
         </p:nvSpPr>
         <p:spPr>
           <a:xfrm>
-            <a:off x="839788" y="2057400"/>
-            <a:ext cx="3932237" cy="3811588"/>
+            <a:off x="8549640" y="2423160"/>
+            <a:ext cx="3200400" cy="3291840"/>
           </a:xfrm>
         </p:spPr>
         <p:txBody>
-          <a:bodyPr/>
+          <a:bodyPr>
+            <a:normAutofit/>
+          </a:bodyPr>
           <a:lstStyle>
             <a:lvl1pPr marL="0" indent="0">
+              <a:lnSpc>
+                <a:spcPct val="100000"/>
+              </a:lnSpc>
+              <a:spcBef>
+                <a:spcPts val="1000"/>
+              </a:spcBef>
               <a:buNone/>
-              <a:defRPr sz="1600"/>
+              <a:defRPr sz="1400">
+                <a:solidFill>
+                  <a:schemeClr val="accent1">
+                    <a:lumMod val="75000"/>
+                  </a:schemeClr>
+                </a:solidFill>
+              </a:defRPr>
             </a:lvl1pPr>
             <a:lvl2pPr marL="457200" indent="0">
               <a:buNone/>
-              <a:defRPr sz="1400"/>
+              <a:defRPr sz="1200"/>
             </a:lvl2pPr>
             <a:lvl3pPr marL="914400" indent="0">
               <a:buNone/>
-              <a:defRPr sz="1200"/>
+              <a:defRPr sz="1000"/>
             </a:lvl3pPr>
             <a:lvl4pPr marL="1371600" indent="0">
               <a:buNone/>
-              <a:defRPr sz="1000"/>
+              <a:defRPr sz="900"/>
             </a:lvl4pPr>
             <a:lvl5pPr marL="1828800" indent="0">
               <a:buNone/>
-              <a:defRPr sz="1000"/>
+              <a:defRPr sz="900"/>
             </a:lvl5pPr>
             <a:lvl6pPr marL="2286000" indent="0">
               <a:buNone/>
-              <a:defRPr sz="1000"/>
+              <a:defRPr sz="900"/>
             </a:lvl6pPr>
             <a:lvl7pPr marL="2743200" indent="0">
               <a:buNone/>
-              <a:defRPr sz="1000"/>
+              <a:defRPr sz="900"/>
             </a:lvl7pPr>
             <a:lvl8pPr marL="3200400" indent="0">
               <a:buNone/>
-              <a:defRPr sz="1000"/>
+              <a:defRPr sz="900"/>
             </a:lvl8pPr>
             <a:lvl9pPr marL="3657600" indent="0">
               <a:buNone/>
-              <a:defRPr sz="1000"/>
+              <a:defRPr sz="900"/>
             </a:lvl9pPr>
           </a:lstStyle>
           <a:p>
@@ -2383,13 +2732,7 @@
       </p:sp>
       <p:sp>
         <p:nvSpPr>
-          <p:cNvPr id="5" name="Marcador de fecha 4">
-            <a:extLst>
-              <a:ext uri="{FF2B5EF4-FFF2-40B4-BE49-F238E27FC236}">
-                <a16:creationId xmlns:a16="http://schemas.microsoft.com/office/drawing/2014/main" id="{DFCEBC58-F1CE-350D-1181-F9DFD9BDB7CE}"/>
-              </a:ext>
-            </a:extLst>
-          </p:cNvPr>
+          <p:cNvPr id="5" name="Date Placeholder 4"/>
           <p:cNvSpPr>
             <a:spLocks noGrp="1"/>
           </p:cNvSpPr>
@@ -2412,13 +2755,7 @@
       </p:sp>
       <p:sp>
         <p:nvSpPr>
-          <p:cNvPr id="6" name="Marcador de pie de página 5">
-            <a:extLst>
-              <a:ext uri="{FF2B5EF4-FFF2-40B4-BE49-F238E27FC236}">
-                <a16:creationId xmlns:a16="http://schemas.microsoft.com/office/drawing/2014/main" id="{6168B629-F922-2658-936F-A8E8799E9F02}"/>
-              </a:ext>
-            </a:extLst>
-          </p:cNvPr>
+          <p:cNvPr id="6" name="Footer Placeholder 5"/>
           <p:cNvSpPr>
             <a:spLocks noGrp="1"/>
           </p:cNvSpPr>
@@ -2435,15 +2772,98 @@
           </a:p>
         </p:txBody>
       </p:sp>
-      <p:sp>
-        <p:nvSpPr>
-          <p:cNvPr id="7" name="Marcador de número de diapositiva 6">
-            <a:extLst>
-              <a:ext uri="{FF2B5EF4-FFF2-40B4-BE49-F238E27FC236}">
-                <a16:creationId xmlns:a16="http://schemas.microsoft.com/office/drawing/2014/main" id="{90647D3A-D7B0-FDA5-CCA5-F72540F559A9}"/>
-              </a:ext>
-            </a:extLst>
-          </p:cNvPr>
+      <p:grpSp>
+        <p:nvGrpSpPr>
+          <p:cNvPr id="9" name="Group 8"/>
+          <p:cNvGrpSpPr>
+            <a:grpSpLocks noChangeAspect="1"/>
+          </p:cNvGrpSpPr>
+          <p:nvPr/>
+        </p:nvGrpSpPr>
+        <p:grpSpPr>
+          <a:xfrm>
+            <a:off x="11401725" y="6229681"/>
+            <a:ext cx="457200" cy="457200"/>
+            <a:chOff x="11361456" y="6195813"/>
+            <a:chExt cx="548640" cy="548640"/>
+          </a:xfrm>
+        </p:grpSpPr>
+        <p:sp>
+          <p:nvSpPr>
+            <p:cNvPr id="10" name="Oval 9"/>
+            <p:cNvSpPr/>
+            <p:nvPr/>
+          </p:nvSpPr>
+          <p:spPr>
+            <a:xfrm>
+              <a:off x="11361456" y="6195813"/>
+              <a:ext cx="548640" cy="548640"/>
+            </a:xfrm>
+            <a:prstGeom prst="ellipse">
+              <a:avLst/>
+            </a:prstGeom>
+            <a:blipFill dpi="0" rotWithShape="1">
+              <a:blip r:embed="rId4">
+                <a:duotone>
+                  <a:schemeClr val="accent1">
+                    <a:shade val="45000"/>
+                    <a:satMod val="135000"/>
+                  </a:schemeClr>
+                  <a:prstClr val="white"/>
+                </a:duotone>
+                <a:extLst>
+                  <a:ext uri="{BEBA8EAE-BF5A-486C-A8C5-ECC9F3942E4B}">
+                    <a14:imgProps xmlns:a14="http://schemas.microsoft.com/office/drawing/2010/main">
+                      <a14:imgLayer r:embed="rId5">
+                        <a14:imgEffect>
+                          <a14:saturation sat="95000"/>
+                        </a14:imgEffect>
+                        <a14:imgEffect>
+                          <a14:brightnessContrast bright="-40000" contrast="20000"/>
+                        </a14:imgEffect>
+                      </a14:imgLayer>
+                    </a14:imgProps>
+                  </a:ext>
+                </a:extLst>
+              </a:blip>
+              <a:srcRect/>
+              <a:tile tx="50800" ty="0" sx="85000" sy="85000" flip="none" algn="tl"/>
+            </a:blipFill>
+            <a:ln w="25400" cap="flat" cmpd="sng" algn="ctr">
+              <a:noFill/>
+              <a:prstDash val="solid"/>
+            </a:ln>
+            <a:effectLst/>
+          </p:spPr>
+        </p:sp>
+        <p:sp>
+          <p:nvSpPr>
+            <p:cNvPr id="11" name="Oval 10"/>
+            <p:cNvSpPr/>
+            <p:nvPr/>
+          </p:nvSpPr>
+          <p:spPr>
+            <a:xfrm>
+              <a:off x="11396488" y="6230844"/>
+              <a:ext cx="478576" cy="478578"/>
+            </a:xfrm>
+            <a:prstGeom prst="ellipse">
+              <a:avLst/>
+            </a:prstGeom>
+            <a:noFill/>
+            <a:ln w="12700" cap="flat" cmpd="sng" algn="ctr">
+              <a:solidFill>
+                <a:sysClr val="window" lastClr="FFFFFF"/>
+              </a:solidFill>
+              <a:prstDash val="solid"/>
+            </a:ln>
+            <a:effectLst/>
+          </p:spPr>
+        </p:sp>
+      </p:grpSp>
+      <p:sp>
+        <p:nvSpPr>
+          <p:cNvPr id="7" name="Slide Number Placeholder 6"/>
           <p:cNvSpPr>
             <a:spLocks noGrp="1"/>
           </p:cNvSpPr>
@@ -2467,7 +2887,7 @@
     </p:spTree>
     <p:extLst>
       <p:ext uri="{BB962C8B-B14F-4D97-AF65-F5344CB8AC3E}">
-        <p14:creationId xmlns:p14="http://schemas.microsoft.com/office/powerpoint/2010/main" val="4223587333"/>
+        <p14:creationId xmlns:p14="http://schemas.microsoft.com/office/powerpoint/2010/main" val="4255495574"/>
       </p:ext>
     </p:extLst>
   </p:cSld>
@@ -2478,7 +2898,7 @@
 </file>
 
 <file path=ppt/slideLayouts/slideLayout9.xml><?xml version="1.0" encoding="utf-8"?>
-<p:sldLayout xmlns:a="http://schemas.openxmlformats.org/drawingml/2006/main" xmlns:r="http://schemas.openxmlformats.org/officeDocument/2006/relationships" xmlns:p="http://schemas.openxmlformats.org/presentationml/2006/main" type="picTx" preserve="1">
+<p:sldLayout xmlns:a="http://schemas.openxmlformats.org/drawingml/2006/main" xmlns:r="http://schemas.openxmlformats.org/officeDocument/2006/relationships" xmlns:p="http://schemas.openxmlformats.org/presentationml/2006/main" showMasterSp="0" type="picTx" preserve="1">
   <p:cSld name="Imagen con título">
     <p:spTree>
       <p:nvGrpSpPr>
@@ -2496,13 +2916,64 @@
       </p:grpSpPr>
       <p:sp>
         <p:nvSpPr>
-          <p:cNvPr id="2" name="Título 1">
-            <a:extLst>
-              <a:ext uri="{FF2B5EF4-FFF2-40B4-BE49-F238E27FC236}">
-                <a16:creationId xmlns:a16="http://schemas.microsoft.com/office/drawing/2014/main" id="{A2BEA5C9-6386-02F1-4DA6-71C805618991}"/>
-              </a:ext>
-            </a:extLst>
-          </p:cNvPr>
+          <p:cNvPr id="11" name="Rectangle 10"/>
+          <p:cNvSpPr/>
+          <p:nvPr/>
+        </p:nvSpPr>
+        <p:spPr>
+          <a:xfrm>
+            <a:off x="8303740" y="0"/>
+            <a:ext cx="3888259" cy="6857999"/>
+          </a:xfrm>
+          <a:prstGeom prst="rect">
+            <a:avLst/>
+          </a:prstGeom>
+          <a:blipFill dpi="0" rotWithShape="1">
+            <a:blip r:embed="rId2">
+              <a:alphaModFix amt="60000"/>
+              <a:lum bright="70000" contrast="-70000"/>
+              <a:extLst>
+                <a:ext uri="{BEBA8EAE-BF5A-486C-A8C5-ECC9F3942E4B}">
+                  <a14:imgProps xmlns:a14="http://schemas.microsoft.com/office/drawing/2010/main">
+                    <a14:imgLayer r:embed="rId3">
+                      <a14:imgEffect>
+                        <a14:sharpenSoften amount="61000"/>
+                      </a14:imgEffect>
+                    </a14:imgLayer>
+                  </a14:imgProps>
+                </a:ext>
+                <a:ext uri="{28A0092B-C50C-407E-A947-70E740481C1C}">
+                  <a14:useLocalDpi xmlns:a14="http://schemas.microsoft.com/office/drawing/2010/main" val="0"/>
+                </a:ext>
+              </a:extLst>
+            </a:blip>
+            <a:srcRect/>
+            <a:tile tx="0" ty="-704850" sx="92000" sy="89000" flip="xy" algn="ctr"/>
+          </a:blipFill>
+          <a:ln>
+            <a:noFill/>
+          </a:ln>
+        </p:spPr>
+        <p:style>
+          <a:lnRef idx="2">
+            <a:schemeClr val="accent1">
+              <a:shade val="50000"/>
+            </a:schemeClr>
+          </a:lnRef>
+          <a:fillRef idx="1">
+            <a:schemeClr val="accent1"/>
+          </a:fillRef>
+          <a:effectRef idx="0">
+            <a:schemeClr val="accent1"/>
+          </a:effectRef>
+          <a:fontRef idx="minor">
+            <a:schemeClr val="lt1"/>
+          </a:fontRef>
+        </p:style>
+      </p:sp>
+      <p:sp>
+        <p:nvSpPr>
+          <p:cNvPr id="2" name="Title 1"/>
           <p:cNvSpPr>
             <a:spLocks noGrp="1"/>
           </p:cNvSpPr>
@@ -2512,15 +2983,17 @@
         </p:nvSpPr>
         <p:spPr>
           <a:xfrm>
-            <a:off x="839788" y="457200"/>
-            <a:ext cx="3932237" cy="1600200"/>
+            <a:off x="8549640" y="685800"/>
+            <a:ext cx="3200400" cy="1737360"/>
           </a:xfrm>
         </p:spPr>
         <p:txBody>
-          <a:bodyPr anchor="b"/>
+          <a:bodyPr anchor="b">
+            <a:normAutofit/>
+          </a:bodyPr>
           <a:lstStyle>
             <a:lvl1pPr>
-              <a:defRPr sz="3200"/>
+              <a:defRPr sz="3200" b="1"/>
             </a:lvl1pPr>
           </a:lstStyle>
           <a:p>
@@ -2528,21 +3001,15 @@
               <a:rPr lang="es-ES"/>
               <a:t>Haga clic para modificar el estilo de título del patrón</a:t>
             </a:r>
-            <a:endParaRPr lang="es-CO"/>
-          </a:p>
-        </p:txBody>
-      </p:sp>
-      <p:sp>
-        <p:nvSpPr>
-          <p:cNvPr id="3" name="Marcador de posición de imagen 2">
-            <a:extLst>
-              <a:ext uri="{FF2B5EF4-FFF2-40B4-BE49-F238E27FC236}">
-                <a16:creationId xmlns:a16="http://schemas.microsoft.com/office/drawing/2014/main" id="{F9E714AD-8E72-8C82-57AD-E4478D491104}"/>
-              </a:ext>
-            </a:extLst>
-          </p:cNvPr>
+            <a:endParaRPr lang="en-US" dirty="0"/>
+          </a:p>
+        </p:txBody>
+      </p:sp>
+      <p:sp>
+        <p:nvSpPr>
+          <p:cNvPr id="3" name="Picture Placeholder 2"/>
           <p:cNvSpPr>
-            <a:spLocks noGrp="1"/>
+            <a:spLocks noGrp="1" noChangeAspect="1"/>
           </p:cNvSpPr>
           <p:nvPr>
             <p:ph type="pic" idx="1"/>
@@ -2550,12 +3017,18 @@
         </p:nvSpPr>
         <p:spPr>
           <a:xfrm>
-            <a:off x="5183188" y="987425"/>
-            <a:ext cx="6172200" cy="4873625"/>
+            <a:off x="0" y="0"/>
+            <a:ext cx="8303740" cy="6858000"/>
           </a:xfrm>
+          <a:solidFill>
+            <a:schemeClr val="tx2">
+              <a:lumMod val="20000"/>
+              <a:lumOff val="80000"/>
+            </a:schemeClr>
+          </a:solidFill>
         </p:spPr>
         <p:txBody>
-          <a:bodyPr/>
+          <a:bodyPr anchor="t"/>
           <a:lstStyle>
             <a:lvl1pPr marL="0" indent="0">
               <a:buNone/>
@@ -2595,19 +3068,17 @@
             </a:lvl9pPr>
           </a:lstStyle>
           <a:p>
-            <a:endParaRPr lang="es-CO"/>
-          </a:p>
-        </p:txBody>
-      </p:sp>
-      <p:sp>
-        <p:nvSpPr>
-          <p:cNvPr id="4" name="Marcador de texto 3">
-            <a:extLst>
-              <a:ext uri="{FF2B5EF4-FFF2-40B4-BE49-F238E27FC236}">
-                <a16:creationId xmlns:a16="http://schemas.microsoft.com/office/drawing/2014/main" id="{3BDCC592-C8C7-C1CD-7F4B-5FCC65D03A22}"/>
-              </a:ext>
-            </a:extLst>
-          </p:cNvPr>
+            <a:r>
+              <a:rPr lang="es-ES"/>
+              <a:t>Haga clic en el icono para agregar una imagen</a:t>
+            </a:r>
+            <a:endParaRPr lang="en-US" dirty="0"/>
+          </a:p>
+        </p:txBody>
+      </p:sp>
+      <p:sp>
+        <p:nvSpPr>
+          <p:cNvPr id="4" name="Text Placeholder 3"/>
           <p:cNvSpPr>
             <a:spLocks noGrp="1"/>
           </p:cNvSpPr>
@@ -2617,48 +3088,62 @@
         </p:nvSpPr>
         <p:spPr>
           <a:xfrm>
-            <a:off x="839788" y="2057400"/>
-            <a:ext cx="3932237" cy="3811588"/>
+            <a:off x="8549640" y="2423160"/>
+            <a:ext cx="3200400" cy="3291840"/>
           </a:xfrm>
         </p:spPr>
         <p:txBody>
-          <a:bodyPr/>
+          <a:bodyPr>
+            <a:normAutofit/>
+          </a:bodyPr>
           <a:lstStyle>
             <a:lvl1pPr marL="0" indent="0">
+              <a:lnSpc>
+                <a:spcPct val="100000"/>
+              </a:lnSpc>
+              <a:spcBef>
+                <a:spcPts val="1000"/>
+              </a:spcBef>
               <a:buNone/>
-              <a:defRPr sz="1600"/>
+              <a:defRPr sz="1400">
+                <a:solidFill>
+                  <a:schemeClr val="accent1">
+                    <a:lumMod val="75000"/>
+                  </a:schemeClr>
+                </a:solidFill>
+              </a:defRPr>
             </a:lvl1pPr>
             <a:lvl2pPr marL="457200" indent="0">
               <a:buNone/>
-              <a:defRPr sz="1400"/>
+              <a:defRPr sz="1200"/>
             </a:lvl2pPr>
             <a:lvl3pPr marL="914400" indent="0">
               <a:buNone/>
-              <a:defRPr sz="1200"/>
+              <a:defRPr sz="1000"/>
             </a:lvl3pPr>
             <a:lvl4pPr marL="1371600" indent="0">
               <a:buNone/>
-              <a:defRPr sz="1000"/>
+              <a:defRPr sz="900"/>
             </a:lvl4pPr>
             <a:lvl5pPr marL="1828800" indent="0">
               <a:buNone/>
-              <a:defRPr sz="1000"/>
+              <a:defRPr sz="900"/>
             </a:lvl5pPr>
             <a:lvl6pPr marL="2286000" indent="0">
               <a:buNone/>
-              <a:defRPr sz="1000"/>
+              <a:defRPr sz="900"/>
             </a:lvl6pPr>
             <a:lvl7pPr marL="2743200" indent="0">
               <a:buNone/>
-              <a:defRPr sz="1000"/>
+              <a:defRPr sz="900"/>
             </a:lvl7pPr>
             <a:lvl8pPr marL="3200400" indent="0">
               <a:buNone/>
-              <a:defRPr sz="1000"/>
+              <a:defRPr sz="900"/>
             </a:lvl8pPr>
             <a:lvl9pPr marL="3657600" indent="0">
               <a:buNone/>
-              <a:defRPr sz="1000"/>
+              <a:defRPr sz="900"/>
             </a:lvl9pPr>
           </a:lstStyle>
           <a:p>
@@ -2672,13 +3157,7 @@
       </p:sp>
       <p:sp>
         <p:nvSpPr>
-          <p:cNvPr id="5" name="Marcador de fecha 4">
-            <a:extLst>
-              <a:ext uri="{FF2B5EF4-FFF2-40B4-BE49-F238E27FC236}">
-                <a16:creationId xmlns:a16="http://schemas.microsoft.com/office/drawing/2014/main" id="{9FE45D2C-0FC4-6BA1-0882-19D3DC9DAC34}"/>
-              </a:ext>
-            </a:extLst>
-          </p:cNvPr>
+          <p:cNvPr id="5" name="Date Placeholder 4"/>
           <p:cNvSpPr>
             <a:spLocks noGrp="1"/>
           </p:cNvSpPr>
@@ -2699,40 +3178,98 @@
           </a:p>
         </p:txBody>
       </p:sp>
-      <p:sp>
-        <p:nvSpPr>
-          <p:cNvPr id="6" name="Marcador de pie de página 5">
-            <a:extLst>
-              <a:ext uri="{FF2B5EF4-FFF2-40B4-BE49-F238E27FC236}">
-                <a16:creationId xmlns:a16="http://schemas.microsoft.com/office/drawing/2014/main" id="{A2AF5C59-423D-D39C-6428-4C429604EE20}"/>
-              </a:ext>
-            </a:extLst>
-          </p:cNvPr>
-          <p:cNvSpPr>
-            <a:spLocks noGrp="1"/>
-          </p:cNvSpPr>
-          <p:nvPr>
-            <p:ph type="ftr" sz="quarter" idx="11"/>
-          </p:nvPr>
-        </p:nvSpPr>
-        <p:spPr/>
-        <p:txBody>
-          <a:bodyPr/>
-          <a:lstStyle/>
-          <a:p>
-            <a:endParaRPr lang="es-CO"/>
-          </a:p>
-        </p:txBody>
-      </p:sp>
-      <p:sp>
-        <p:nvSpPr>
-          <p:cNvPr id="7" name="Marcador de número de diapositiva 6">
-            <a:extLst>
-              <a:ext uri="{FF2B5EF4-FFF2-40B4-BE49-F238E27FC236}">
-                <a16:creationId xmlns:a16="http://schemas.microsoft.com/office/drawing/2014/main" id="{4A2270CA-008E-DC9F-5DF1-E6988337F4CB}"/>
-              </a:ext>
-            </a:extLst>
-          </p:cNvPr>
+      <p:grpSp>
+        <p:nvGrpSpPr>
+          <p:cNvPr id="8" name="Group 7"/>
+          <p:cNvGrpSpPr>
+            <a:grpSpLocks noChangeAspect="1"/>
+          </p:cNvGrpSpPr>
+          <p:nvPr/>
+        </p:nvGrpSpPr>
+        <p:grpSpPr>
+          <a:xfrm>
+            <a:off x="11401725" y="6229681"/>
+            <a:ext cx="457200" cy="457200"/>
+            <a:chOff x="11361456" y="6195813"/>
+            <a:chExt cx="548640" cy="548640"/>
+          </a:xfrm>
+        </p:grpSpPr>
+        <p:sp>
+          <p:nvSpPr>
+            <p:cNvPr id="9" name="Oval 8"/>
+            <p:cNvSpPr/>
+            <p:nvPr/>
+          </p:nvSpPr>
+          <p:spPr>
+            <a:xfrm>
+              <a:off x="11361456" y="6195813"/>
+              <a:ext cx="548640" cy="548640"/>
+            </a:xfrm>
+            <a:prstGeom prst="ellipse">
+              <a:avLst/>
+            </a:prstGeom>
+            <a:blipFill dpi="0" rotWithShape="1">
+              <a:blip r:embed="rId4">
+                <a:duotone>
+                  <a:schemeClr val="accent1">
+                    <a:shade val="45000"/>
+                    <a:satMod val="135000"/>
+                  </a:schemeClr>
+                  <a:prstClr val="white"/>
+                </a:duotone>
+                <a:extLst>
+                  <a:ext uri="{BEBA8EAE-BF5A-486C-A8C5-ECC9F3942E4B}">
+                    <a14:imgProps xmlns:a14="http://schemas.microsoft.com/office/drawing/2010/main">
+                      <a14:imgLayer r:embed="rId5">
+                        <a14:imgEffect>
+                          <a14:saturation sat="95000"/>
+                        </a14:imgEffect>
+                        <a14:imgEffect>
+                          <a14:brightnessContrast bright="-40000" contrast="20000"/>
+                        </a14:imgEffect>
+                      </a14:imgLayer>
+                    </a14:imgProps>
+                  </a:ext>
+                </a:extLst>
+              </a:blip>
+              <a:srcRect/>
+              <a:tile tx="50800" ty="0" sx="85000" sy="85000" flip="none" algn="tl"/>
+            </a:blipFill>
+            <a:ln w="25400" cap="flat" cmpd="sng" algn="ctr">
+              <a:noFill/>
+              <a:prstDash val="solid"/>
+            </a:ln>
+            <a:effectLst/>
+          </p:spPr>
+        </p:sp>
+        <p:sp>
+          <p:nvSpPr>
+            <p:cNvPr id="10" name="Oval 9"/>
+            <p:cNvSpPr/>
+            <p:nvPr/>
+          </p:nvSpPr>
+          <p:spPr>
+            <a:xfrm>
+              <a:off x="11396488" y="6230844"/>
+              <a:ext cx="478576" cy="478578"/>
+            </a:xfrm>
+            <a:prstGeom prst="ellipse">
+              <a:avLst/>
+            </a:prstGeom>
+            <a:noFill/>
+            <a:ln w="12700" cap="flat" cmpd="sng" algn="ctr">
+              <a:solidFill>
+                <a:sysClr val="window" lastClr="FFFFFF"/>
+              </a:solidFill>
+              <a:prstDash val="solid"/>
+            </a:ln>
+            <a:effectLst/>
+          </p:spPr>
+        </p:sp>
+      </p:grpSp>
+      <p:sp>
+        <p:nvSpPr>
+          <p:cNvPr id="7" name="Slide Number Placeholder 6"/>
           <p:cNvSpPr>
             <a:spLocks noGrp="1"/>
           </p:cNvSpPr>
@@ -2756,7 +3293,7 @@
     </p:spTree>
     <p:extLst>
       <p:ext uri="{BB962C8B-B14F-4D97-AF65-F5344CB8AC3E}">
-        <p14:creationId xmlns:p14="http://schemas.microsoft.com/office/powerpoint/2010/main" val="135813954"/>
+        <p14:creationId xmlns:p14="http://schemas.microsoft.com/office/powerpoint/2010/main" val="3078971340"/>
       </p:ext>
     </p:extLst>
   </p:cSld>
@@ -2790,13 +3327,7 @@
       </p:grpSpPr>
       <p:sp>
         <p:nvSpPr>
-          <p:cNvPr id="2" name="Marcador de título 1">
-            <a:extLst>
-              <a:ext uri="{FF2B5EF4-FFF2-40B4-BE49-F238E27FC236}">
-                <a16:creationId xmlns:a16="http://schemas.microsoft.com/office/drawing/2014/main" id="{4391583F-CDEB-5DB9-5CCF-3C60F328EBC7}"/>
-              </a:ext>
-            </a:extLst>
-          </p:cNvPr>
+          <p:cNvPr id="2" name="Title Placeholder 1"/>
           <p:cNvSpPr>
             <a:spLocks noGrp="1"/>
           </p:cNvSpPr>
@@ -2806,8 +3337,8 @@
         </p:nvSpPr>
         <p:spPr>
           <a:xfrm>
-            <a:off x="838200" y="365125"/>
-            <a:ext cx="10515600" cy="1325563"/>
+            <a:off x="1069848" y="484632"/>
+            <a:ext cx="10058400" cy="1609344"/>
           </a:xfrm>
           <a:prstGeom prst="rect">
             <a:avLst/>
@@ -2823,19 +3354,13 @@
               <a:rPr lang="es-ES"/>
               <a:t>Haga clic para modificar el estilo de título del patrón</a:t>
             </a:r>
-            <a:endParaRPr lang="es-CO"/>
-          </a:p>
-        </p:txBody>
-      </p:sp>
-      <p:sp>
-        <p:nvSpPr>
-          <p:cNvPr id="3" name="Marcador de texto 2">
-            <a:extLst>
-              <a:ext uri="{FF2B5EF4-FFF2-40B4-BE49-F238E27FC236}">
-                <a16:creationId xmlns:a16="http://schemas.microsoft.com/office/drawing/2014/main" id="{A693498B-0F99-202D-07E4-2161D5097901}"/>
-              </a:ext>
-            </a:extLst>
-          </p:cNvPr>
+            <a:endParaRPr lang="en-US" dirty="0"/>
+          </a:p>
+        </p:txBody>
+      </p:sp>
+      <p:sp>
+        <p:nvSpPr>
+          <p:cNvPr id="3" name="Text Placeholder 2"/>
           <p:cNvSpPr>
             <a:spLocks noGrp="1"/>
           </p:cNvSpPr>
@@ -2845,8 +3370,8 @@
         </p:nvSpPr>
         <p:spPr>
           <a:xfrm>
-            <a:off x="838200" y="1825625"/>
-            <a:ext cx="10515600" cy="4351338"/>
+            <a:off x="1069848" y="2121408"/>
+            <a:ext cx="10058400" cy="4050792"/>
           </a:xfrm>
           <a:prstGeom prst="rect">
             <a:avLst/>
@@ -2891,19 +3416,13 @@
               <a:rPr lang="es-ES"/>
               <a:t>Quinto nivel</a:t>
             </a:r>
-            <a:endParaRPr lang="es-CO"/>
-          </a:p>
-        </p:txBody>
-      </p:sp>
-      <p:sp>
-        <p:nvSpPr>
-          <p:cNvPr id="4" name="Marcador de fecha 3">
-            <a:extLst>
-              <a:ext uri="{FF2B5EF4-FFF2-40B4-BE49-F238E27FC236}">
-                <a16:creationId xmlns:a16="http://schemas.microsoft.com/office/drawing/2014/main" id="{087C9175-FDA7-FF7D-40AC-C5357EDB618C}"/>
-              </a:ext>
-            </a:extLst>
-          </p:cNvPr>
+            <a:endParaRPr lang="en-US" dirty="0"/>
+          </a:p>
+        </p:txBody>
+      </p:sp>
+      <p:sp>
+        <p:nvSpPr>
+          <p:cNvPr id="4" name="Date Placeholder 3"/>
           <p:cNvSpPr>
             <a:spLocks noGrp="1"/>
           </p:cNvSpPr>
@@ -2913,8 +3432,8 @@
         </p:nvSpPr>
         <p:spPr>
           <a:xfrm>
-            <a:off x="838200" y="6356350"/>
-            <a:ext cx="2743200" cy="365125"/>
+            <a:off x="7964424" y="6272784"/>
+            <a:ext cx="3273552" cy="365125"/>
           </a:xfrm>
           <a:prstGeom prst="rect">
             <a:avLst/>
@@ -2923,12 +3442,10 @@
         <p:txBody>
           <a:bodyPr vert="horz" lIns="91440" tIns="45720" rIns="91440" bIns="45720" rtlCol="0" anchor="ctr"/>
           <a:lstStyle>
-            <a:lvl1pPr algn="l">
-              <a:defRPr sz="1200">
+            <a:lvl1pPr algn="r">
+              <a:defRPr sz="1100">
                 <a:solidFill>
-                  <a:schemeClr val="tx1">
-                    <a:tint val="82000"/>
-                  </a:schemeClr>
+                  <a:schemeClr val="tx2"/>
                 </a:solidFill>
               </a:defRPr>
             </a:lvl1pPr>
@@ -2944,13 +3461,7 @@
       </p:sp>
       <p:sp>
         <p:nvSpPr>
-          <p:cNvPr id="5" name="Marcador de pie de página 4">
-            <a:extLst>
-              <a:ext uri="{FF2B5EF4-FFF2-40B4-BE49-F238E27FC236}">
-                <a16:creationId xmlns:a16="http://schemas.microsoft.com/office/drawing/2014/main" id="{490036F2-747A-7947-71D6-D9AD116DFCAC}"/>
-              </a:ext>
-            </a:extLst>
-          </p:cNvPr>
+          <p:cNvPr id="5" name="Footer Placeholder 4"/>
           <p:cNvSpPr>
             <a:spLocks noGrp="1"/>
           </p:cNvSpPr>
@@ -2960,8 +3471,8 @@
         </p:nvSpPr>
         <p:spPr>
           <a:xfrm>
-            <a:off x="4038600" y="6356350"/>
-            <a:ext cx="4114800" cy="365125"/>
+            <a:off x="1088136" y="6272784"/>
+            <a:ext cx="6327648" cy="365125"/>
           </a:xfrm>
           <a:prstGeom prst="rect">
             <a:avLst/>
@@ -2970,12 +3481,10 @@
         <p:txBody>
           <a:bodyPr vert="horz" lIns="91440" tIns="45720" rIns="91440" bIns="45720" rtlCol="0" anchor="ctr"/>
           <a:lstStyle>
-            <a:lvl1pPr algn="ctr">
-              <a:defRPr sz="1200">
+            <a:lvl1pPr algn="l">
+              <a:defRPr sz="1100">
                 <a:solidFill>
-                  <a:schemeClr val="tx1">
-                    <a:tint val="82000"/>
-                  </a:schemeClr>
+                  <a:schemeClr val="tx2"/>
                 </a:solidFill>
               </a:defRPr>
             </a:lvl1pPr>
@@ -2985,15 +3494,98 @@
           </a:p>
         </p:txBody>
       </p:sp>
-      <p:sp>
-        <p:nvSpPr>
-          <p:cNvPr id="6" name="Marcador de número de diapositiva 5">
-            <a:extLst>
-              <a:ext uri="{FF2B5EF4-FFF2-40B4-BE49-F238E27FC236}">
-                <a16:creationId xmlns:a16="http://schemas.microsoft.com/office/drawing/2014/main" id="{53B986F3-503B-25C5-2EC4-874AC784F12A}"/>
-              </a:ext>
-            </a:extLst>
-          </p:cNvPr>
+      <p:grpSp>
+        <p:nvGrpSpPr>
+          <p:cNvPr id="7" name="Group 6"/>
+          <p:cNvGrpSpPr>
+            <a:grpSpLocks noChangeAspect="1"/>
+          </p:cNvGrpSpPr>
+          <p:nvPr/>
+        </p:nvGrpSpPr>
+        <p:grpSpPr>
+          <a:xfrm>
+            <a:off x="11401725" y="6229681"/>
+            <a:ext cx="457200" cy="457200"/>
+            <a:chOff x="11361456" y="6195813"/>
+            <a:chExt cx="548640" cy="548640"/>
+          </a:xfrm>
+        </p:grpSpPr>
+        <p:sp>
+          <p:nvSpPr>
+            <p:cNvPr id="8" name="Oval 7"/>
+            <p:cNvSpPr/>
+            <p:nvPr/>
+          </p:nvSpPr>
+          <p:spPr>
+            <a:xfrm>
+              <a:off x="11361456" y="6195813"/>
+              <a:ext cx="548640" cy="548640"/>
+            </a:xfrm>
+            <a:prstGeom prst="ellipse">
+              <a:avLst/>
+            </a:prstGeom>
+            <a:blipFill dpi="0" rotWithShape="1">
+              <a:blip r:embed="rId13">
+                <a:duotone>
+                  <a:schemeClr val="accent1">
+                    <a:shade val="45000"/>
+                    <a:satMod val="135000"/>
+                  </a:schemeClr>
+                  <a:prstClr val="white"/>
+                </a:duotone>
+                <a:extLst>
+                  <a:ext uri="{BEBA8EAE-BF5A-486C-A8C5-ECC9F3942E4B}">
+                    <a14:imgProps xmlns:a14="http://schemas.microsoft.com/office/drawing/2010/main">
+                      <a14:imgLayer r:embed="rId14">
+                        <a14:imgEffect>
+                          <a14:saturation sat="95000"/>
+                        </a14:imgEffect>
+                        <a14:imgEffect>
+                          <a14:brightnessContrast bright="-40000" contrast="20000"/>
+                        </a14:imgEffect>
+                      </a14:imgLayer>
+                    </a14:imgProps>
+                  </a:ext>
+                </a:extLst>
+              </a:blip>
+              <a:srcRect/>
+              <a:tile tx="50800" ty="0" sx="85000" sy="85000" flip="none" algn="tl"/>
+            </a:blipFill>
+            <a:ln w="25400" cap="flat" cmpd="sng" algn="ctr">
+              <a:noFill/>
+              <a:prstDash val="solid"/>
+            </a:ln>
+            <a:effectLst/>
+          </p:spPr>
+        </p:sp>
+        <p:sp>
+          <p:nvSpPr>
+            <p:cNvPr id="9" name="Oval 8"/>
+            <p:cNvSpPr/>
+            <p:nvPr/>
+          </p:nvSpPr>
+          <p:spPr>
+            <a:xfrm>
+              <a:off x="11396488" y="6230844"/>
+              <a:ext cx="478576" cy="478578"/>
+            </a:xfrm>
+            <a:prstGeom prst="ellipse">
+              <a:avLst/>
+            </a:prstGeom>
+            <a:noFill/>
+            <a:ln w="12700" cap="flat" cmpd="sng" algn="ctr">
+              <a:solidFill>
+                <a:srgbClr val="FFFFFF"/>
+              </a:solidFill>
+              <a:prstDash val="solid"/>
+            </a:ln>
+            <a:effectLst/>
+          </p:spPr>
+        </p:sp>
+      </p:grpSp>
+      <p:sp>
+        <p:nvSpPr>
+          <p:cNvPr id="6" name="Slide Number Placeholder 5"/>
           <p:cNvSpPr>
             <a:spLocks noGrp="1"/>
           </p:cNvSpPr>
@@ -3003,8 +3595,8 @@
         </p:nvSpPr>
         <p:spPr>
           <a:xfrm>
-            <a:off x="8610600" y="6356350"/>
-            <a:ext cx="2743200" cy="365125"/>
+            <a:off x="11311128" y="6272784"/>
+            <a:ext cx="640080" cy="365125"/>
           </a:xfrm>
           <a:prstGeom prst="rect">
             <a:avLst/>
@@ -3013,13 +3605,12 @@
         <p:txBody>
           <a:bodyPr vert="horz" lIns="91440" tIns="45720" rIns="91440" bIns="45720" rtlCol="0" anchor="ctr"/>
           <a:lstStyle>
-            <a:lvl1pPr algn="r">
-              <a:defRPr sz="1200">
+            <a:lvl1pPr algn="ctr">
+              <a:defRPr sz="1400" b="1">
                 <a:solidFill>
-                  <a:schemeClr val="tx1">
-                    <a:tint val="82000"/>
-                  </a:schemeClr>
+                  <a:srgbClr val="FFFFFF"/>
                 </a:solidFill>
+                <a:latin typeface="+mj-lt"/>
               </a:defRPr>
             </a:lvl1pPr>
           </a:lstStyle>
@@ -3035,23 +3626,23 @@
     </p:spTree>
     <p:extLst>
       <p:ext uri="{BB962C8B-B14F-4D97-AF65-F5344CB8AC3E}">
-        <p14:creationId xmlns:p14="http://schemas.microsoft.com/office/powerpoint/2010/main" val="762254120"/>
+        <p14:creationId xmlns:p14="http://schemas.microsoft.com/office/powerpoint/2010/main" val="3043757799"/>
       </p:ext>
     </p:extLst>
   </p:cSld>
   <p:clrMap bg1="lt1" tx1="dk1" bg2="lt2" tx2="dk2" accent1="accent1" accent2="accent2" accent3="accent3" accent4="accent4" accent5="accent5" accent6="accent6" hlink="hlink" folHlink="folHlink"/>
   <p:sldLayoutIdLst>
-    <p:sldLayoutId id="2147483649" r:id="rId1"/>
-    <p:sldLayoutId id="2147483650" r:id="rId2"/>
-    <p:sldLayoutId id="2147483651" r:id="rId3"/>
-    <p:sldLayoutId id="2147483652" r:id="rId4"/>
-    <p:sldLayoutId id="2147483653" r:id="rId5"/>
-    <p:sldLayoutId id="2147483654" r:id="rId6"/>
-    <p:sldLayoutId id="2147483655" r:id="rId7"/>
-    <p:sldLayoutId id="2147483656" r:id="rId8"/>
-    <p:sldLayoutId id="2147483657" r:id="rId9"/>
-    <p:sldLayoutId id="2147483658" r:id="rId10"/>
-    <p:sldLayoutId id="2147483659" r:id="rId11"/>
+    <p:sldLayoutId id="2147483661" r:id="rId1"/>
+    <p:sldLayoutId id="2147483662" r:id="rId2"/>
+    <p:sldLayoutId id="2147483663" r:id="rId3"/>
+    <p:sldLayoutId id="2147483664" r:id="rId4"/>
+    <p:sldLayoutId id="2147483665" r:id="rId5"/>
+    <p:sldLayoutId id="2147483666" r:id="rId6"/>
+    <p:sldLayoutId id="2147483667" r:id="rId7"/>
+    <p:sldLayoutId id="2147483668" r:id="rId8"/>
+    <p:sldLayoutId id="2147483669" r:id="rId9"/>
+    <p:sldLayoutId id="2147483670" r:id="rId10"/>
+    <p:sldLayoutId id="2147483671" r:id="rId11"/>
   </p:sldLayoutIdLst>
   <p:txStyles>
     <p:titleStyle>
@@ -3063,10 +3654,17 @@
           <a:spcPct val="0"/>
         </a:spcBef>
         <a:buNone/>
-        <a:defRPr sz="4400" kern="1200">
-          <a:solidFill>
-            <a:schemeClr val="tx1"/>
-          </a:solidFill>
+        <a:defRPr sz="5400" kern="1200" cap="all" baseline="0">
+          <a:blipFill>
+            <a:blip r:embed="rId15">
+              <a:extLst>
+                <a:ext uri="{28A0092B-C50C-407E-A947-70E740481C1C}">
+                  <a14:useLocalDpi xmlns:a14="http://schemas.microsoft.com/office/drawing/2010/main" val="0"/>
+                </a:ext>
+              </a:extLst>
+            </a:blip>
+            <a:tile tx="6350" ty="-127000" sx="65000" sy="64000" flip="none" algn="tl"/>
+          </a:blipFill>
           <a:latin typeface="+mj-lt"/>
           <a:ea typeface="+mj-ea"/>
           <a:cs typeface="+mj-cs"/>
@@ -3074,16 +3672,22 @@
       </a:lvl1pPr>
     </p:titleStyle>
     <p:bodyStyle>
-      <a:lvl1pPr marL="228600" indent="-228600" algn="l" defTabSz="914400" rtl="0" eaLnBrk="1" latinLnBrk="0" hangingPunct="1">
+      <a:lvl1pPr marL="182880" indent="-182880" algn="l" defTabSz="914400" rtl="0" eaLnBrk="1" latinLnBrk="0" hangingPunct="1">
         <a:lnSpc>
           <a:spcPct val="90000"/>
         </a:lnSpc>
         <a:spcBef>
-          <a:spcPts val="1000"/>
+          <a:spcPts val="1200"/>
         </a:spcBef>
-        <a:buFont typeface="Arial" panose="020B0604020202020204" pitchFamily="34" charset="0"/>
-        <a:buChar char="•"/>
-        <a:defRPr sz="2800" kern="1200">
+        <a:buClr>
+          <a:schemeClr val="accent1">
+            <a:lumMod val="75000"/>
+          </a:schemeClr>
+        </a:buClr>
+        <a:buSzPct val="85000"/>
+        <a:buFont typeface="Wingdings" pitchFamily="2" charset="2"/>
+        <a:buChar char="§"/>
+        <a:defRPr sz="2000" kern="1200">
           <a:solidFill>
             <a:schemeClr val="tx1"/>
           </a:solidFill>
@@ -3092,16 +3696,25 @@
           <a:cs typeface="+mn-cs"/>
         </a:defRPr>
       </a:lvl1pPr>
-      <a:lvl2pPr marL="685800" indent="-228600" algn="l" defTabSz="914400" rtl="0" eaLnBrk="1" latinLnBrk="0" hangingPunct="1">
+      <a:lvl2pPr marL="457200" indent="-182880" algn="l" defTabSz="914400" rtl="0" eaLnBrk="1" latinLnBrk="0" hangingPunct="1">
         <a:lnSpc>
           <a:spcPct val="90000"/>
         </a:lnSpc>
         <a:spcBef>
-          <a:spcPts val="500"/>
+          <a:spcPts val="400"/>
         </a:spcBef>
-        <a:buFont typeface="Arial" panose="020B0604020202020204" pitchFamily="34" charset="0"/>
-        <a:buChar char="•"/>
-        <a:defRPr sz="2400" kern="1200">
+        <a:spcAft>
+          <a:spcPts val="200"/>
+        </a:spcAft>
+        <a:buClr>
+          <a:schemeClr val="accent1">
+            <a:lumMod val="75000"/>
+          </a:schemeClr>
+        </a:buClr>
+        <a:buSzPct val="85000"/>
+        <a:buFont typeface="Wingdings" pitchFamily="2" charset="2"/>
+        <a:buChar char="§"/>
+        <a:defRPr sz="1800" kern="1200">
           <a:solidFill>
             <a:schemeClr val="tx1"/>
           </a:solidFill>
@@ -3110,16 +3723,25 @@
           <a:cs typeface="+mn-cs"/>
         </a:defRPr>
       </a:lvl2pPr>
-      <a:lvl3pPr marL="1143000" indent="-228600" algn="l" defTabSz="914400" rtl="0" eaLnBrk="1" latinLnBrk="0" hangingPunct="1">
+      <a:lvl3pPr marL="731520" indent="-182880" algn="l" defTabSz="914400" rtl="0" eaLnBrk="1" latinLnBrk="0" hangingPunct="1">
         <a:lnSpc>
           <a:spcPct val="90000"/>
         </a:lnSpc>
         <a:spcBef>
-          <a:spcPts val="500"/>
+          <a:spcPts val="400"/>
         </a:spcBef>
-        <a:buFont typeface="Arial" panose="020B0604020202020204" pitchFamily="34" charset="0"/>
-        <a:buChar char="•"/>
-        <a:defRPr sz="2000" kern="1200">
+        <a:spcAft>
+          <a:spcPts val="200"/>
+        </a:spcAft>
+        <a:buClr>
+          <a:schemeClr val="accent1">
+            <a:lumMod val="75000"/>
+          </a:schemeClr>
+        </a:buClr>
+        <a:buSzPct val="85000"/>
+        <a:buFont typeface="Wingdings" pitchFamily="2" charset="2"/>
+        <a:buChar char="§"/>
+        <a:defRPr sz="1600" kern="1200">
           <a:solidFill>
             <a:schemeClr val="tx1"/>
           </a:solidFill>
@@ -3128,16 +3750,25 @@
           <a:cs typeface="+mn-cs"/>
         </a:defRPr>
       </a:lvl3pPr>
-      <a:lvl4pPr marL="1600200" indent="-228600" algn="l" defTabSz="914400" rtl="0" eaLnBrk="1" latinLnBrk="0" hangingPunct="1">
+      <a:lvl4pPr marL="1005840" indent="-182880" algn="l" defTabSz="914400" rtl="0" eaLnBrk="1" latinLnBrk="0" hangingPunct="1">
         <a:lnSpc>
           <a:spcPct val="90000"/>
         </a:lnSpc>
         <a:spcBef>
-          <a:spcPts val="500"/>
+          <a:spcPts val="400"/>
         </a:spcBef>
-        <a:buFont typeface="Arial" panose="020B0604020202020204" pitchFamily="34" charset="0"/>
-        <a:buChar char="•"/>
-        <a:defRPr sz="1800" kern="1200">
+        <a:spcAft>
+          <a:spcPts val="200"/>
+        </a:spcAft>
+        <a:buClr>
+          <a:schemeClr val="accent1">
+            <a:lumMod val="75000"/>
+          </a:schemeClr>
+        </a:buClr>
+        <a:buSzPct val="85000"/>
+        <a:buFont typeface="Wingdings" pitchFamily="2" charset="2"/>
+        <a:buChar char="§"/>
+        <a:defRPr sz="1600" kern="1200">
           <a:solidFill>
             <a:schemeClr val="tx1"/>
           </a:solidFill>
@@ -3146,16 +3777,25 @@
           <a:cs typeface="+mn-cs"/>
         </a:defRPr>
       </a:lvl4pPr>
-      <a:lvl5pPr marL="2057400" indent="-228600" algn="l" defTabSz="914400" rtl="0" eaLnBrk="1" latinLnBrk="0" hangingPunct="1">
+      <a:lvl5pPr marL="1280160" indent="-182880" algn="l" defTabSz="914400" rtl="0" eaLnBrk="1" latinLnBrk="0" hangingPunct="1">
         <a:lnSpc>
           <a:spcPct val="90000"/>
         </a:lnSpc>
         <a:spcBef>
-          <a:spcPts val="500"/>
+          <a:spcPts val="400"/>
         </a:spcBef>
-        <a:buFont typeface="Arial" panose="020B0604020202020204" pitchFamily="34" charset="0"/>
-        <a:buChar char="•"/>
-        <a:defRPr sz="1800" kern="1200">
+        <a:spcAft>
+          <a:spcPts val="200"/>
+        </a:spcAft>
+        <a:buClr>
+          <a:schemeClr val="accent1">
+            <a:lumMod val="75000"/>
+          </a:schemeClr>
+        </a:buClr>
+        <a:buSzPct val="85000"/>
+        <a:buFont typeface="Wingdings" pitchFamily="2" charset="2"/>
+        <a:buChar char="§"/>
+        <a:defRPr sz="1600" kern="1200">
           <a:solidFill>
             <a:schemeClr val="tx1"/>
           </a:solidFill>
@@ -3164,16 +3804,25 @@
           <a:cs typeface="+mn-cs"/>
         </a:defRPr>
       </a:lvl5pPr>
-      <a:lvl6pPr marL="2514600" indent="-228600" algn="l" defTabSz="914400" rtl="0" eaLnBrk="1" latinLnBrk="0" hangingPunct="1">
+      <a:lvl6pPr marL="1600000" indent="-228600" algn="l" defTabSz="914400" rtl="0" eaLnBrk="1" latinLnBrk="0" hangingPunct="1">
         <a:lnSpc>
           <a:spcPct val="90000"/>
         </a:lnSpc>
         <a:spcBef>
-          <a:spcPts val="500"/>
+          <a:spcPts val="400"/>
         </a:spcBef>
-        <a:buFont typeface="Arial" panose="020B0604020202020204" pitchFamily="34" charset="0"/>
-        <a:buChar char="•"/>
-        <a:defRPr sz="1800" kern="1200">
+        <a:spcAft>
+          <a:spcPts val="200"/>
+        </a:spcAft>
+        <a:buClr>
+          <a:schemeClr val="accent1">
+            <a:lumMod val="75000"/>
+          </a:schemeClr>
+        </a:buClr>
+        <a:buSzPct val="85000"/>
+        <a:buFont typeface="Wingdings" pitchFamily="2" charset="2"/>
+        <a:buChar char="§"/>
+        <a:defRPr sz="1600" kern="1200">
           <a:solidFill>
             <a:schemeClr val="tx1"/>
           </a:solidFill>
@@ -3182,16 +3831,25 @@
           <a:cs typeface="+mn-cs"/>
         </a:defRPr>
       </a:lvl6pPr>
-      <a:lvl7pPr marL="2971800" indent="-228600" algn="l" defTabSz="914400" rtl="0" eaLnBrk="1" latinLnBrk="0" hangingPunct="1">
+      <a:lvl7pPr marL="1900000" indent="-228600" algn="l" defTabSz="914400" rtl="0" eaLnBrk="1" latinLnBrk="0" hangingPunct="1">
         <a:lnSpc>
           <a:spcPct val="90000"/>
         </a:lnSpc>
         <a:spcBef>
-          <a:spcPts val="500"/>
+          <a:spcPts val="400"/>
         </a:spcBef>
-        <a:buFont typeface="Arial" panose="020B0604020202020204" pitchFamily="34" charset="0"/>
-        <a:buChar char="•"/>
-        <a:defRPr sz="1800" kern="1200">
+        <a:spcAft>
+          <a:spcPts val="200"/>
+        </a:spcAft>
+        <a:buClr>
+          <a:schemeClr val="accent1">
+            <a:lumMod val="75000"/>
+          </a:schemeClr>
+        </a:buClr>
+        <a:buSzPct val="85000"/>
+        <a:buFont typeface="Wingdings" pitchFamily="2" charset="2"/>
+        <a:buChar char="§"/>
+        <a:defRPr sz="1600" kern="1200">
           <a:solidFill>
             <a:schemeClr val="tx1"/>
           </a:solidFill>
@@ -3200,16 +3858,25 @@
           <a:cs typeface="+mn-cs"/>
         </a:defRPr>
       </a:lvl7pPr>
-      <a:lvl8pPr marL="3429000" indent="-228600" algn="l" defTabSz="914400" rtl="0" eaLnBrk="1" latinLnBrk="0" hangingPunct="1">
+      <a:lvl8pPr marL="2200000" indent="-228600" algn="l" defTabSz="914400" rtl="0" eaLnBrk="1" latinLnBrk="0" hangingPunct="1">
         <a:lnSpc>
           <a:spcPct val="90000"/>
         </a:lnSpc>
         <a:spcBef>
-          <a:spcPts val="500"/>
+          <a:spcPts val="400"/>
         </a:spcBef>
-        <a:buFont typeface="Arial" panose="020B0604020202020204" pitchFamily="34" charset="0"/>
-        <a:buChar char="•"/>
-        <a:defRPr sz="1800" kern="1200">
+        <a:spcAft>
+          <a:spcPts val="200"/>
+        </a:spcAft>
+        <a:buClr>
+          <a:schemeClr val="accent1">
+            <a:lumMod val="75000"/>
+          </a:schemeClr>
+        </a:buClr>
+        <a:buSzPct val="85000"/>
+        <a:buFont typeface="Wingdings" pitchFamily="2" charset="2"/>
+        <a:buChar char="§"/>
+        <a:defRPr sz="1600" kern="1200">
           <a:solidFill>
             <a:schemeClr val="tx1"/>
           </a:solidFill>
@@ -3218,16 +3885,25 @@
           <a:cs typeface="+mn-cs"/>
         </a:defRPr>
       </a:lvl8pPr>
-      <a:lvl9pPr marL="3886200" indent="-228600" algn="l" defTabSz="914400" rtl="0" eaLnBrk="1" latinLnBrk="0" hangingPunct="1">
+      <a:lvl9pPr marL="2500000" indent="-228600" algn="l" defTabSz="914400" rtl="0" eaLnBrk="1" latinLnBrk="0" hangingPunct="1">
         <a:lnSpc>
           <a:spcPct val="90000"/>
         </a:lnSpc>
         <a:spcBef>
-          <a:spcPts val="500"/>
+          <a:spcPts val="400"/>
         </a:spcBef>
-        <a:buFont typeface="Arial" panose="020B0604020202020204" pitchFamily="34" charset="0"/>
-        <a:buChar char="•"/>
-        <a:defRPr sz="1800" kern="1200">
+        <a:spcAft>
+          <a:spcPts val="200"/>
+        </a:spcAft>
+        <a:buClr>
+          <a:schemeClr val="accent1">
+            <a:lumMod val="75000"/>
+          </a:schemeClr>
+        </a:buClr>
+        <a:buSzPct val="85000"/>
+        <a:buFont typeface="Wingdings" pitchFamily="2" charset="2"/>
+        <a:buChar char="§"/>
+        <a:defRPr sz="1600" kern="1200">
           <a:solidFill>
             <a:schemeClr val="tx1"/>
           </a:solidFill>
@@ -3239,7 +3915,7 @@
     </p:bodyStyle>
     <p:otherStyle>
       <a:defPPr>
-        <a:defRPr lang="es-CO"/>
+        <a:defRPr lang="en-US"/>
       </a:defPPr>
       <a:lvl1pPr marL="0" algn="l" defTabSz="914400" rtl="0" eaLnBrk="1" latinLnBrk="0" hangingPunct="1">
         <a:defRPr sz="1800" kern="1200">
@@ -3339,6 +4015,27 @@
 <file path=ppt/slides/slide1.xml><?xml version="1.0" encoding="utf-8"?>
 <p:sld xmlns:a="http://schemas.openxmlformats.org/drawingml/2006/main" xmlns:r="http://schemas.openxmlformats.org/officeDocument/2006/relationships" xmlns:p="http://schemas.openxmlformats.org/presentationml/2006/main">
   <p:cSld>
+    <p:bg>
+      <p:bgPr>
+        <a:blipFill rotWithShape="1">
+          <a:blip r:embed="rId2">
+            <a:duotone>
+              <a:schemeClr val="bg1">
+                <a:tint val="75000"/>
+                <a:shade val="58000"/>
+                <a:satMod val="120000"/>
+              </a:schemeClr>
+              <a:schemeClr val="bg1">
+                <a:tint val="50000"/>
+                <a:shade val="96000"/>
+              </a:schemeClr>
+            </a:duotone>
+          </a:blip>
+          <a:tile tx="0" ty="0" sx="100000" sy="100000" flip="none" algn="tl"/>
+        </a:blipFill>
+        <a:effectLst/>
+      </p:bgPr>
+    </p:bg>
     <p:spTree>
       <p:nvGrpSpPr>
         <p:cNvPr id="1" name=""/>
@@ -3353,6 +4050,66 @@
           <a:chExt cx="0" cy="0"/>
         </a:xfrm>
       </p:grpSpPr>
+      <p:sp useBgFill="1">
+        <p:nvSpPr>
+          <p:cNvPr id="10" name="Rectangle 9">
+            <a:extLst>
+              <a:ext uri="{FF2B5EF4-FFF2-40B4-BE49-F238E27FC236}">
+                <a16:creationId xmlns:a16="http://schemas.microsoft.com/office/drawing/2014/main" id="{2A0E4E09-FC02-4ADC-951A-3FFA90B6FE39}"/>
+              </a:ext>
+              <a:ext uri="{C183D7F6-B498-43B3-948B-1728B52AA6E4}">
+                <adec:decorative xmlns:adec="http://schemas.microsoft.com/office/drawing/2017/decorative" val="1"/>
+              </a:ext>
+            </a:extLst>
+          </p:cNvPr>
+          <p:cNvSpPr>
+            <a:spLocks noGrp="1" noRot="1" noChangeAspect="1" noMove="1" noResize="1" noEditPoints="1" noAdjustHandles="1" noChangeArrowheads="1" noChangeShapeType="1" noTextEdit="1"/>
+          </p:cNvSpPr>
+          <p:nvPr>
+            <p:extLst>
+              <p:ext uri="{386F3935-93C4-4BCD-93E2-E3B085C9AB24}">
+                <p16:designElem xmlns:p16="http://schemas.microsoft.com/office/powerpoint/2015/main" val="1"/>
+              </p:ext>
+            </p:extLst>
+          </p:nvPr>
+        </p:nvSpPr>
+        <p:spPr>
+          <a:xfrm>
+            <a:off x="0" y="0"/>
+            <a:ext cx="12191695" cy="6858000"/>
+          </a:xfrm>
+          <a:prstGeom prst="rect">
+            <a:avLst/>
+          </a:prstGeom>
+          <a:ln>
+            <a:noFill/>
+          </a:ln>
+        </p:spPr>
+        <p:style>
+          <a:lnRef idx="2">
+            <a:schemeClr val="accent1">
+              <a:shade val="50000"/>
+            </a:schemeClr>
+          </a:lnRef>
+          <a:fillRef idx="1">
+            <a:schemeClr val="accent1"/>
+          </a:fillRef>
+          <a:effectRef idx="0">
+            <a:schemeClr val="accent1"/>
+          </a:effectRef>
+          <a:fontRef idx="minor">
+            <a:schemeClr val="lt1"/>
+          </a:fontRef>
+        </p:style>
+        <p:txBody>
+          <a:bodyPr rtlCol="0" anchor="ctr"/>
+          <a:lstStyle/>
+          <a:p>
+            <a:pPr algn="ctr"/>
+            <a:endParaRPr lang="en-US"/>
+          </a:p>
+        </p:txBody>
+      </p:sp>
       <p:sp>
         <p:nvSpPr>
           <p:cNvPr id="2" name="Título 1">
@@ -3369,15 +4126,24 @@
             <p:ph type="ctrTitle"/>
           </p:nvPr>
         </p:nvSpPr>
-        <p:spPr/>
-        <p:txBody>
-          <a:bodyPr>
+        <p:spPr>
+          <a:xfrm>
+            <a:off x="6556100" y="1360493"/>
+            <a:ext cx="4972511" cy="3106732"/>
+          </a:xfrm>
+        </p:spPr>
+        <p:txBody>
+          <a:bodyPr anchor="b">
             <a:normAutofit/>
           </a:bodyPr>
           <a:lstStyle/>
           <a:p>
             <a:r>
-              <a:rPr lang="es-CO" dirty="0"/>
+              <a:rPr lang="es-CO" sz="7200">
+                <a:solidFill>
+                  <a:schemeClr val="tx1"/>
+                </a:solidFill>
+              </a:rPr>
               <a:t>Todo lo que siempre quiso saber de Git</a:t>
             </a:r>
           </a:p>
@@ -3399,15 +4165,251 @@
             <p:ph type="subTitle" idx="1"/>
           </p:nvPr>
         </p:nvSpPr>
-        <p:spPr/>
-        <p:txBody>
-          <a:bodyPr/>
+        <p:spPr>
+          <a:xfrm>
+            <a:off x="6556100" y="4687316"/>
+            <a:ext cx="4972512" cy="1517088"/>
+          </a:xfrm>
+        </p:spPr>
+        <p:txBody>
+          <a:bodyPr>
+            <a:normAutofit/>
+          </a:bodyPr>
           <a:lstStyle/>
           <a:p>
             <a:r>
-              <a:rPr lang="es-CO" dirty="0"/>
+              <a:rPr lang="es-CO">
+                <a:solidFill>
+                  <a:srgbClr val="FFFFFF"/>
+                </a:solidFill>
+              </a:rPr>
               <a:t>*y nunca se atrevió a preguntar</a:t>
             </a:r>
+          </a:p>
+        </p:txBody>
+      </p:sp>
+      <p:sp>
+        <p:nvSpPr>
+          <p:cNvPr id="12" name="Freeform: Shape 11">
+            <a:extLst>
+              <a:ext uri="{FF2B5EF4-FFF2-40B4-BE49-F238E27FC236}">
+                <a16:creationId xmlns:a16="http://schemas.microsoft.com/office/drawing/2014/main" id="{14A1598B-1957-47CF-AAF4-F7A36DA0E7CB}"/>
+              </a:ext>
+              <a:ext uri="{C183D7F6-B498-43B3-948B-1728B52AA6E4}">
+                <adec:decorative xmlns:adec="http://schemas.microsoft.com/office/drawing/2017/decorative" val="1"/>
+              </a:ext>
+            </a:extLst>
+          </p:cNvPr>
+          <p:cNvSpPr>
+            <a:spLocks noGrp="1" noRot="1" noChangeAspect="1" noMove="1" noResize="1" noEditPoints="1" noAdjustHandles="1" noChangeArrowheads="1" noChangeShapeType="1" noTextEdit="1"/>
+          </p:cNvSpPr>
+          <p:nvPr>
+            <p:extLst>
+              <p:ext uri="{386F3935-93C4-4BCD-93E2-E3B085C9AB24}">
+                <p16:designElem xmlns:p16="http://schemas.microsoft.com/office/powerpoint/2015/main" val="1"/>
+              </p:ext>
+            </p:extLst>
+          </p:nvPr>
+        </p:nvSpPr>
+        <p:spPr>
+          <a:xfrm>
+            <a:off x="2" y="3"/>
+            <a:ext cx="6095695" cy="6857997"/>
+          </a:xfrm>
+          <a:custGeom>
+            <a:avLst/>
+            <a:gdLst>
+              <a:gd name="connsiteX0" fmla="*/ 3435036 w 6095695"/>
+              <a:gd name="connsiteY0" fmla="*/ 0 h 6857997"/>
+              <a:gd name="connsiteX1" fmla="*/ 4198562 w 6095695"/>
+              <a:gd name="connsiteY1" fmla="*/ 0 h 6857997"/>
+              <a:gd name="connsiteX2" fmla="*/ 4365987 w 6095695"/>
+              <a:gd name="connsiteY2" fmla="*/ 128761 h 6857997"/>
+              <a:gd name="connsiteX3" fmla="*/ 6095695 w 6095695"/>
+              <a:gd name="connsiteY3" fmla="*/ 3718209 h 6857997"/>
+              <a:gd name="connsiteX4" fmla="*/ 4860911 w 6095695"/>
+              <a:gd name="connsiteY4" fmla="*/ 6845880 h 6857997"/>
+              <a:gd name="connsiteX5" fmla="*/ 4849107 w 6095695"/>
+              <a:gd name="connsiteY5" fmla="*/ 6857997 h 6857997"/>
+              <a:gd name="connsiteX6" fmla="*/ 4253869 w 6095695"/>
+              <a:gd name="connsiteY6" fmla="*/ 6857997 h 6857997"/>
+              <a:gd name="connsiteX7" fmla="*/ 4409441 w 6095695"/>
+              <a:gd name="connsiteY7" fmla="*/ 6719623 h 6857997"/>
+              <a:gd name="connsiteX8" fmla="*/ 5679794 w 6095695"/>
+              <a:gd name="connsiteY8" fmla="*/ 3718209 h 6857997"/>
+              <a:gd name="connsiteX9" fmla="*/ 3591563 w 6095695"/>
+              <a:gd name="connsiteY9" fmla="*/ 88079 h 6857997"/>
+              <a:gd name="connsiteX10" fmla="*/ 0 w 6095695"/>
+              <a:gd name="connsiteY10" fmla="*/ 0 h 6857997"/>
+              <a:gd name="connsiteX11" fmla="*/ 3177466 w 6095695"/>
+              <a:gd name="connsiteY11" fmla="*/ 0 h 6857997"/>
+              <a:gd name="connsiteX12" fmla="*/ 3353291 w 6095695"/>
+              <a:gd name="connsiteY12" fmla="*/ 88129 h 6857997"/>
+              <a:gd name="connsiteX13" fmla="*/ 5560965 w 6095695"/>
+              <a:gd name="connsiteY13" fmla="*/ 3718209 h 6857997"/>
+              <a:gd name="connsiteX14" fmla="*/ 4325417 w 6095695"/>
+              <a:gd name="connsiteY14" fmla="*/ 6637392 h 6857997"/>
+              <a:gd name="connsiteX15" fmla="*/ 4077394 w 6095695"/>
+              <a:gd name="connsiteY15" fmla="*/ 6857997 h 6857997"/>
+              <a:gd name="connsiteX16" fmla="*/ 0 w 6095695"/>
+              <a:gd name="connsiteY16" fmla="*/ 6857997 h 6857997"/>
+            </a:gdLst>
+            <a:ahLst/>
+            <a:cxnLst>
+              <a:cxn ang="0">
+                <a:pos x="connsiteX0" y="connsiteY0"/>
+              </a:cxn>
+              <a:cxn ang="0">
+                <a:pos x="connsiteX1" y="connsiteY1"/>
+              </a:cxn>
+              <a:cxn ang="0">
+                <a:pos x="connsiteX2" y="connsiteY2"/>
+              </a:cxn>
+              <a:cxn ang="0">
+                <a:pos x="connsiteX3" y="connsiteY3"/>
+              </a:cxn>
+              <a:cxn ang="0">
+                <a:pos x="connsiteX4" y="connsiteY4"/>
+              </a:cxn>
+              <a:cxn ang="0">
+                <a:pos x="connsiteX5" y="connsiteY5"/>
+              </a:cxn>
+              <a:cxn ang="0">
+                <a:pos x="connsiteX6" y="connsiteY6"/>
+              </a:cxn>
+              <a:cxn ang="0">
+                <a:pos x="connsiteX7" y="connsiteY7"/>
+              </a:cxn>
+              <a:cxn ang="0">
+                <a:pos x="connsiteX8" y="connsiteY8"/>
+              </a:cxn>
+              <a:cxn ang="0">
+                <a:pos x="connsiteX9" y="connsiteY9"/>
+              </a:cxn>
+              <a:cxn ang="0">
+                <a:pos x="connsiteX10" y="connsiteY10"/>
+              </a:cxn>
+              <a:cxn ang="0">
+                <a:pos x="connsiteX11" y="connsiteY11"/>
+              </a:cxn>
+              <a:cxn ang="0">
+                <a:pos x="connsiteX12" y="connsiteY12"/>
+              </a:cxn>
+              <a:cxn ang="0">
+                <a:pos x="connsiteX13" y="connsiteY13"/>
+              </a:cxn>
+              <a:cxn ang="0">
+                <a:pos x="connsiteX14" y="connsiteY14"/>
+              </a:cxn>
+              <a:cxn ang="0">
+                <a:pos x="connsiteX15" y="connsiteY15"/>
+              </a:cxn>
+              <a:cxn ang="0">
+                <a:pos x="connsiteX16" y="connsiteY16"/>
+              </a:cxn>
+            </a:cxnLst>
+            <a:rect l="l" t="t" r="r" b="b"/>
+            <a:pathLst>
+              <a:path w="6095695" h="6857997">
+                <a:moveTo>
+                  <a:pt x="3435036" y="0"/>
+                </a:moveTo>
+                <a:lnTo>
+                  <a:pt x="4198562" y="0"/>
+                </a:lnTo>
+                <a:lnTo>
+                  <a:pt x="4365987" y="128761"/>
+                </a:lnTo>
+                <a:cubicBezTo>
+                  <a:pt x="5422363" y="981944"/>
+                  <a:pt x="6095695" y="2273123"/>
+                  <a:pt x="6095695" y="3718209"/>
+                </a:cubicBezTo>
+                <a:cubicBezTo>
+                  <a:pt x="6095695" y="4922447"/>
+                  <a:pt x="5628104" y="6019805"/>
+                  <a:pt x="4860911" y="6845880"/>
+                </a:cubicBezTo>
+                <a:lnTo>
+                  <a:pt x="4849107" y="6857997"/>
+                </a:lnTo>
+                <a:lnTo>
+                  <a:pt x="4253869" y="6857997"/>
+                </a:lnTo>
+                <a:lnTo>
+                  <a:pt x="4409441" y="6719623"/>
+                </a:lnTo>
+                <a:cubicBezTo>
+                  <a:pt x="5194330" y="5951494"/>
+                  <a:pt x="5679794" y="4890334"/>
+                  <a:pt x="5679794" y="3718209"/>
+                </a:cubicBezTo>
+                <a:cubicBezTo>
+                  <a:pt x="5679794" y="2179795"/>
+                  <a:pt x="4843506" y="832535"/>
+                  <a:pt x="3591563" y="88079"/>
+                </a:cubicBezTo>
+                <a:close/>
+                <a:moveTo>
+                  <a:pt x="0" y="0"/>
+                </a:moveTo>
+                <a:lnTo>
+                  <a:pt x="3177466" y="0"/>
+                </a:lnTo>
+                <a:lnTo>
+                  <a:pt x="3353291" y="88129"/>
+                </a:lnTo>
+                <a:cubicBezTo>
+                  <a:pt x="4668281" y="787221"/>
+                  <a:pt x="5560965" y="2150692"/>
+                  <a:pt x="5560965" y="3718209"/>
+                </a:cubicBezTo>
+                <a:cubicBezTo>
+                  <a:pt x="5560965" y="4858221"/>
+                  <a:pt x="5088802" y="5890308"/>
+                  <a:pt x="4325417" y="6637392"/>
+                </a:cubicBezTo>
+                <a:lnTo>
+                  <a:pt x="4077394" y="6857997"/>
+                </a:lnTo>
+                <a:lnTo>
+                  <a:pt x="0" y="6857997"/>
+                </a:lnTo>
+                <a:close/>
+              </a:path>
+            </a:pathLst>
+          </a:custGeom>
+          <a:solidFill>
+            <a:schemeClr val="tx1"/>
+          </a:solidFill>
+          <a:ln>
+            <a:noFill/>
+          </a:ln>
+        </p:spPr>
+        <p:style>
+          <a:lnRef idx="2">
+            <a:schemeClr val="accent1">
+              <a:shade val="50000"/>
+            </a:schemeClr>
+          </a:lnRef>
+          <a:fillRef idx="1">
+            <a:schemeClr val="accent1"/>
+          </a:fillRef>
+          <a:effectRef idx="0">
+            <a:schemeClr val="accent1"/>
+          </a:effectRef>
+          <a:fontRef idx="minor">
+            <a:schemeClr val="lt1"/>
+          </a:fontRef>
+        </p:style>
+        <p:txBody>
+          <a:bodyPr wrap="square" rtlCol="0" anchor="ctr">
+            <a:noAutofit/>
+          </a:bodyPr>
+          <a:lstStyle/>
+          <a:p>
+            <a:pPr algn="ctr"/>
+            <a:endParaRPr lang="en-US"/>
           </a:p>
         </p:txBody>
       </p:sp>
@@ -3426,7 +4428,7 @@
           <p:nvPr/>
         </p:nvPicPr>
         <p:blipFill>
-          <a:blip r:embed="rId2">
+          <a:blip r:embed="rId3">
             <a:extLst>
               <a:ext uri="{28A0092B-C50C-407E-A947-70E740481C1C}">
                 <a14:useLocalDpi xmlns:a14="http://schemas.microsoft.com/office/drawing/2010/main" val="0"/>
@@ -3439,8 +4441,8 @@
         </p:blipFill>
         <p:spPr>
           <a:xfrm>
-            <a:off x="2567254" y="2889225"/>
-            <a:ext cx="1215415" cy="1215415"/>
+            <a:off x="747150" y="1526651"/>
+            <a:ext cx="3804698" cy="3804698"/>
           </a:xfrm>
           <a:prstGeom prst="rect">
             <a:avLst/>
@@ -3455,7 +4457,7 @@
     </p:extLst>
   </p:cSld>
   <p:clrMapOvr>
-    <a:masterClrMapping/>
+    <a:overrideClrMapping bg1="dk1" tx1="lt1" bg2="dk2" tx2="lt2" accent1="accent1" accent2="accent2" accent3="accent3" accent4="accent4" accent5="accent5" accent6="accent6" hlink="hlink" folHlink="folHlink"/>
   </p:clrMapOvr>
 </p:sld>
 </file>
@@ -3482,7 +4484,7 @@
           <p:cNvPr id="2" name="Título 1">
             <a:extLst>
               <a:ext uri="{FF2B5EF4-FFF2-40B4-BE49-F238E27FC236}">
-                <a16:creationId xmlns:a16="http://schemas.microsoft.com/office/drawing/2014/main" id="{5AB52688-B340-D8FD-0EFF-6ED77C000801}"/>
+                <a16:creationId xmlns:a16="http://schemas.microsoft.com/office/drawing/2014/main" id="{8860EE9C-C2CD-CE6C-9FA8-6F5ACF7DB4A1}"/>
               </a:ext>
             </a:extLst>
           </p:cNvPr>
@@ -3508,40 +4510,585 @@
             </a:r>
             <a:r>
               <a:rPr lang="es-CO" dirty="0"/>
-              <a:t>&gt;Ejercicio</a:t>
-            </a:r>
-          </a:p>
-        </p:txBody>
-      </p:sp>
-      <p:sp>
-        <p:nvSpPr>
-          <p:cNvPr id="3" name="Marcador de contenido 2">
+              <a:t>&gt;Nombres sugeridos</a:t>
+            </a:r>
+          </a:p>
+        </p:txBody>
+      </p:sp>
+      <p:graphicFrame>
+        <p:nvGraphicFramePr>
+          <p:cNvPr id="4" name="Marcador de contenido 3">
             <a:extLst>
               <a:ext uri="{FF2B5EF4-FFF2-40B4-BE49-F238E27FC236}">
-                <a16:creationId xmlns:a16="http://schemas.microsoft.com/office/drawing/2014/main" id="{C5A29F5F-233E-BC3C-99C5-2314F0A0FBC1}"/>
+                <a16:creationId xmlns:a16="http://schemas.microsoft.com/office/drawing/2014/main" id="{BEDD294B-CF29-75C8-BD41-8B95F0442403}"/>
               </a:ext>
             </a:extLst>
           </p:cNvPr>
-          <p:cNvSpPr>
-            <a:spLocks noGrp="1"/>
-          </p:cNvSpPr>
+          <p:cNvGraphicFramePr>
+            <a:graphicFrameLocks noGrp="1"/>
+          </p:cNvGraphicFramePr>
           <p:nvPr>
             <p:ph idx="1"/>
+            <p:extLst>
+              <p:ext uri="{D42A27DB-BD31-4B8C-83A1-F6EECF244321}">
+                <p14:modId xmlns:p14="http://schemas.microsoft.com/office/powerpoint/2010/main" val="609982273"/>
+              </p:ext>
+            </p:extLst>
           </p:nvPr>
-        </p:nvSpPr>
-        <p:spPr/>
-        <p:txBody>
-          <a:bodyPr/>
+        </p:nvGraphicFramePr>
+        <p:xfrm>
+          <a:off x="1069975" y="2120900"/>
+          <a:ext cx="10058399" cy="3754120"/>
+        </p:xfrm>
+        <a:graphic>
+          <a:graphicData uri="http://schemas.openxmlformats.org/drawingml/2006/table">
+            <a:tbl>
+              <a:tblPr firstRow="1" bandRow="1">
+                <a:tableStyleId>{5C22544A-7EE6-4342-B048-85BDC9FD1C3A}</a:tableStyleId>
+              </a:tblPr>
+              <a:tblGrid>
+                <a:gridCol w="2514600">
+                  <a:extLst>
+                    <a:ext uri="{9D8B030D-6E8A-4147-A177-3AD203B41FA5}">
+                      <a16:colId xmlns:a16="http://schemas.microsoft.com/office/drawing/2014/main" val="1730618614"/>
+                    </a:ext>
+                  </a:extLst>
+                </a:gridCol>
+                <a:gridCol w="1037424">
+                  <a:extLst>
+                    <a:ext uri="{9D8B030D-6E8A-4147-A177-3AD203B41FA5}">
+                      <a16:colId xmlns:a16="http://schemas.microsoft.com/office/drawing/2014/main" val="2970207448"/>
+                    </a:ext>
+                  </a:extLst>
+                </a:gridCol>
+                <a:gridCol w="3070970">
+                  <a:extLst>
+                    <a:ext uri="{9D8B030D-6E8A-4147-A177-3AD203B41FA5}">
+                      <a16:colId xmlns:a16="http://schemas.microsoft.com/office/drawing/2014/main" val="3394549187"/>
+                    </a:ext>
+                  </a:extLst>
+                </a:gridCol>
+                <a:gridCol w="3435405">
+                  <a:extLst>
+                    <a:ext uri="{9D8B030D-6E8A-4147-A177-3AD203B41FA5}">
+                      <a16:colId xmlns:a16="http://schemas.microsoft.com/office/drawing/2014/main" val="936640203"/>
+                    </a:ext>
+                  </a:extLst>
+                </a:gridCol>
+              </a:tblGrid>
+              <a:tr h="370840">
+                <a:tc>
+                  <a:txBody>
+                    <a:bodyPr/>
+                    <a:lstStyle/>
+                    <a:p>
+                      <a:r>
+                        <a:rPr lang="es-CO" dirty="0"/>
+                        <a:t>Tipo de cambio</a:t>
+                      </a:r>
+                    </a:p>
+                  </a:txBody>
+                  <a:tcPr marL="87464" marR="87464"/>
+                </a:tc>
+                <a:tc>
+                  <a:txBody>
+                    <a:bodyPr/>
+                    <a:lstStyle/>
+                    <a:p>
+                      <a:r>
+                        <a:rPr lang="es-CO" dirty="0"/>
+                        <a:t>Prefijo</a:t>
+                      </a:r>
+                    </a:p>
+                  </a:txBody>
+                  <a:tcPr marL="87464" marR="87464"/>
+                </a:tc>
+                <a:tc gridSpan="2">
+                  <a:txBody>
+                    <a:bodyPr/>
+                    <a:lstStyle/>
+                    <a:p>
+                      <a:r>
+                        <a:rPr lang="es-CO" dirty="0"/>
+                        <a:t>Ejemplos</a:t>
+                      </a:r>
+                    </a:p>
+                  </a:txBody>
+                  <a:tcPr marL="87464" marR="87464"/>
+                </a:tc>
+                <a:tc hMerge="1">
+                  <a:txBody>
+                    <a:bodyPr/>
+                    <a:lstStyle/>
+                    <a:p>
+                      <a:endParaRPr lang="es-CO" dirty="0"/>
+                    </a:p>
+                  </a:txBody>
+                  <a:tcPr/>
+                </a:tc>
+                <a:extLst>
+                  <a:ext uri="{0D108BD9-81ED-4DB2-BD59-A6C34878D82A}">
+                    <a16:rowId xmlns:a16="http://schemas.microsoft.com/office/drawing/2014/main" val="3255754326"/>
+                  </a:ext>
+                </a:extLst>
+              </a:tr>
+              <a:tr h="370840">
+                <a:tc>
+                  <a:txBody>
+                    <a:bodyPr/>
+                    <a:lstStyle/>
+                    <a:p>
+                      <a:r>
+                        <a:rPr lang="es-CO" dirty="0"/>
+                        <a:t>Característica nueva</a:t>
+                      </a:r>
+                    </a:p>
+                  </a:txBody>
+                  <a:tcPr marL="87464" marR="87464"/>
+                </a:tc>
+                <a:tc>
+                  <a:txBody>
+                    <a:bodyPr/>
+                    <a:lstStyle/>
+                    <a:p>
+                      <a:r>
+                        <a:rPr lang="es-CO" dirty="0" err="1"/>
+                        <a:t>feat</a:t>
+                      </a:r>
+                      <a:endParaRPr lang="es-CO" dirty="0"/>
+                    </a:p>
+                  </a:txBody>
+                  <a:tcPr marL="87464" marR="87464"/>
+                </a:tc>
+                <a:tc>
+                  <a:txBody>
+                    <a:bodyPr/>
+                    <a:lstStyle/>
+                    <a:p>
+                      <a:pPr marL="0" marR="0" lvl="0" indent="0" algn="l" defTabSz="914400" rtl="0" eaLnBrk="1" fontAlgn="auto" latinLnBrk="0" hangingPunct="1">
+                        <a:lnSpc>
+                          <a:spcPct val="100000"/>
+                        </a:lnSpc>
+                        <a:spcBef>
+                          <a:spcPts val="0"/>
+                        </a:spcBef>
+                        <a:spcAft>
+                          <a:spcPts val="0"/>
+                        </a:spcAft>
+                        <a:buClrTx/>
+                        <a:buSzTx/>
+                        <a:buFontTx/>
+                        <a:buNone/>
+                        <a:tabLst/>
+                        <a:defRPr/>
+                      </a:pPr>
+                      <a:r>
+                        <a:rPr lang="es-CO" sz="1800" b="0" kern="1200" dirty="0" err="1">
+                          <a:solidFill>
+                            <a:schemeClr val="dk1"/>
+                          </a:solidFill>
+                          <a:effectLst/>
+                          <a:latin typeface="+mn-lt"/>
+                          <a:ea typeface="+mn-ea"/>
+                          <a:cs typeface="+mn-cs"/>
+                        </a:rPr>
+                        <a:t>feat</a:t>
+                      </a:r>
+                      <a:r>
+                        <a:rPr lang="es-CO" sz="1800" b="0" kern="1200" dirty="0">
+                          <a:solidFill>
+                            <a:schemeClr val="dk1"/>
+                          </a:solidFill>
+                          <a:effectLst/>
+                          <a:latin typeface="+mn-lt"/>
+                          <a:ea typeface="+mn-ea"/>
+                          <a:cs typeface="+mn-cs"/>
+                        </a:rPr>
+                        <a:t>: Repositorio inicial</a:t>
+                      </a:r>
+                    </a:p>
+                  </a:txBody>
+                  <a:tcPr marL="87464" marR="87464"/>
+                </a:tc>
+                <a:tc>
+                  <a:txBody>
+                    <a:bodyPr/>
+                    <a:lstStyle/>
+                    <a:p>
+                      <a:r>
+                        <a:rPr lang="es-CO" dirty="0" err="1"/>
+                        <a:t>feat</a:t>
+                      </a:r>
+                      <a:r>
+                        <a:rPr lang="es-CO" dirty="0"/>
+                        <a:t>: RF06 implementado/compila, pero faltan ajustes</a:t>
+                      </a:r>
+                    </a:p>
+                  </a:txBody>
+                  <a:tcPr marL="87464" marR="87464"/>
+                </a:tc>
+                <a:extLst>
+                  <a:ext uri="{0D108BD9-81ED-4DB2-BD59-A6C34878D82A}">
+                    <a16:rowId xmlns:a16="http://schemas.microsoft.com/office/drawing/2014/main" val="3251121197"/>
+                  </a:ext>
+                </a:extLst>
+              </a:tr>
+              <a:tr h="370840">
+                <a:tc>
+                  <a:txBody>
+                    <a:bodyPr/>
+                    <a:lstStyle/>
+                    <a:p>
+                      <a:r>
+                        <a:rPr lang="es-CO" dirty="0"/>
+                        <a:t>Corrección de Errores</a:t>
+                      </a:r>
+                    </a:p>
+                  </a:txBody>
+                  <a:tcPr marL="87464" marR="87464"/>
+                </a:tc>
+                <a:tc>
+                  <a:txBody>
+                    <a:bodyPr/>
+                    <a:lstStyle/>
+                    <a:p>
+                      <a:r>
+                        <a:rPr lang="es-CO" dirty="0" err="1"/>
+                        <a:t>bugfix</a:t>
+                      </a:r>
+                      <a:endParaRPr lang="es-CO" dirty="0"/>
+                    </a:p>
+                  </a:txBody>
+                  <a:tcPr marL="87464" marR="87464"/>
+                </a:tc>
+                <a:tc>
+                  <a:txBody>
+                    <a:bodyPr/>
+                    <a:lstStyle/>
+                    <a:p>
+                      <a:r>
+                        <a:rPr lang="es-CO" dirty="0" err="1"/>
+                        <a:t>bugfix</a:t>
+                      </a:r>
+                      <a:r>
+                        <a:rPr lang="es-CO" dirty="0"/>
+                        <a:t>: Error al borrar las cookies</a:t>
+                      </a:r>
+                    </a:p>
+                  </a:txBody>
+                  <a:tcPr marL="87464" marR="87464"/>
+                </a:tc>
+                <a:tc>
+                  <a:txBody>
+                    <a:bodyPr/>
+                    <a:lstStyle/>
+                    <a:p>
+                      <a:r>
+                        <a:rPr lang="es-CO" dirty="0" err="1"/>
+                        <a:t>bugfix</a:t>
+                      </a:r>
+                      <a:r>
+                        <a:rPr lang="es-CO" dirty="0"/>
+                        <a:t>: RF07 se estaba mostrando una columna id en muebles.</a:t>
+                      </a:r>
+                    </a:p>
+                  </a:txBody>
+                  <a:tcPr marL="87464" marR="87464"/>
+                </a:tc>
+                <a:extLst>
+                  <a:ext uri="{0D108BD9-81ED-4DB2-BD59-A6C34878D82A}">
+                    <a16:rowId xmlns:a16="http://schemas.microsoft.com/office/drawing/2014/main" val="3955919551"/>
+                  </a:ext>
+                </a:extLst>
+              </a:tr>
+              <a:tr h="370840">
+                <a:tc>
+                  <a:txBody>
+                    <a:bodyPr/>
+                    <a:lstStyle/>
+                    <a:p>
+                      <a:r>
+                        <a:rPr lang="es-CO" dirty="0"/>
+                        <a:t>Cambios para liberación</a:t>
+                      </a:r>
+                    </a:p>
+                  </a:txBody>
+                  <a:tcPr marL="87464" marR="87464"/>
+                </a:tc>
+                <a:tc>
+                  <a:txBody>
+                    <a:bodyPr/>
+                    <a:lstStyle/>
+                    <a:p>
+                      <a:r>
+                        <a:rPr lang="es-CO" dirty="0" err="1"/>
+                        <a:t>release</a:t>
+                      </a:r>
+                      <a:endParaRPr lang="es-CO" dirty="0"/>
+                    </a:p>
+                  </a:txBody>
+                  <a:tcPr marL="87464" marR="87464"/>
+                </a:tc>
+                <a:tc>
+                  <a:txBody>
+                    <a:bodyPr/>
+                    <a:lstStyle/>
+                    <a:p>
+                      <a:r>
+                        <a:rPr lang="es-CO" dirty="0" err="1"/>
+                        <a:t>release</a:t>
+                      </a:r>
+                      <a:r>
+                        <a:rPr lang="es-CO" dirty="0"/>
+                        <a:t>: Segundo pago</a:t>
+                      </a:r>
+                    </a:p>
+                  </a:txBody>
+                  <a:tcPr marL="87464" marR="87464"/>
+                </a:tc>
+                <a:tc>
+                  <a:txBody>
+                    <a:bodyPr/>
+                    <a:lstStyle/>
+                    <a:p>
+                      <a:r>
+                        <a:rPr lang="es-CO" dirty="0" err="1"/>
+                        <a:t>Release</a:t>
+                      </a:r>
+                      <a:r>
+                        <a:rPr lang="es-CO" dirty="0"/>
+                        <a:t>: RF08 Probado y listo para enviar a </a:t>
+                      </a:r>
+                      <a:r>
+                        <a:rPr lang="es-CO" dirty="0" err="1"/>
+                        <a:t>main</a:t>
+                      </a:r>
+                      <a:r>
+                        <a:rPr lang="es-CO" dirty="0"/>
+                        <a:t>.</a:t>
+                      </a:r>
+                    </a:p>
+                  </a:txBody>
+                  <a:tcPr marL="87464" marR="87464"/>
+                </a:tc>
+                <a:extLst>
+                  <a:ext uri="{0D108BD9-81ED-4DB2-BD59-A6C34878D82A}">
+                    <a16:rowId xmlns:a16="http://schemas.microsoft.com/office/drawing/2014/main" val="3203977087"/>
+                  </a:ext>
+                </a:extLst>
+              </a:tr>
+              <a:tr h="370840">
+                <a:tc>
+                  <a:txBody>
+                    <a:bodyPr/>
+                    <a:lstStyle/>
+                    <a:p>
+                      <a:r>
+                        <a:rPr lang="es-CO" dirty="0"/>
+                        <a:t>Arreglos en caliente (fuera del horario o periodicidad normal)</a:t>
+                      </a:r>
+                    </a:p>
+                  </a:txBody>
+                  <a:tcPr marL="87464" marR="87464"/>
+                </a:tc>
+                <a:tc>
+                  <a:txBody>
+                    <a:bodyPr/>
+                    <a:lstStyle/>
+                    <a:p>
+                      <a:r>
+                        <a:rPr lang="es-CO" dirty="0" err="1"/>
+                        <a:t>hotfix</a:t>
+                      </a:r>
+                      <a:endParaRPr lang="es-CO" dirty="0"/>
+                    </a:p>
+                  </a:txBody>
+                  <a:tcPr marL="87464" marR="87464"/>
+                </a:tc>
+                <a:tc>
+                  <a:txBody>
+                    <a:bodyPr/>
+                    <a:lstStyle/>
+                    <a:p>
+                      <a:r>
+                        <a:rPr lang="es-CO" dirty="0" err="1"/>
+                        <a:t>hotfix</a:t>
+                      </a:r>
+                      <a:r>
+                        <a:rPr lang="es-CO" dirty="0"/>
+                        <a:t>: Se garantiza compatibilidad con </a:t>
+                      </a:r>
+                      <a:r>
+                        <a:rPr lang="es-CO" dirty="0" err="1"/>
+                        <a:t>Jquery</a:t>
+                      </a:r>
+                      <a:endParaRPr lang="es-CO" dirty="0"/>
+                    </a:p>
+                  </a:txBody>
+                  <a:tcPr marL="87464" marR="87464"/>
+                </a:tc>
+                <a:tc>
+                  <a:txBody>
+                    <a:bodyPr/>
+                    <a:lstStyle/>
+                    <a:p>
+                      <a:r>
+                        <a:rPr lang="es-CO" dirty="0" err="1"/>
+                        <a:t>hotfix</a:t>
+                      </a:r>
+                      <a:r>
+                        <a:rPr lang="es-CO" dirty="0"/>
+                        <a:t>: RF09 fallaba con el mensaje “</a:t>
+                      </a:r>
+                      <a:r>
+                        <a:rPr lang="es-CO" dirty="0" err="1"/>
+                        <a:t>Index</a:t>
+                      </a:r>
+                      <a:r>
+                        <a:rPr lang="es-CO" dirty="0"/>
+                        <a:t> </a:t>
+                      </a:r>
+                      <a:r>
+                        <a:rPr lang="es-CO" dirty="0" err="1"/>
+                        <a:t>not</a:t>
+                      </a:r>
+                      <a:r>
+                        <a:rPr lang="es-CO" dirty="0"/>
+                        <a:t> </a:t>
+                      </a:r>
+                      <a:r>
+                        <a:rPr lang="es-CO" dirty="0" err="1"/>
+                        <a:t>found</a:t>
+                      </a:r>
+                      <a:r>
+                        <a:rPr lang="es-CO" dirty="0"/>
+                        <a:t>”</a:t>
+                      </a:r>
+                    </a:p>
+                  </a:txBody>
+                  <a:tcPr marL="87464" marR="87464"/>
+                </a:tc>
+                <a:extLst>
+                  <a:ext uri="{0D108BD9-81ED-4DB2-BD59-A6C34878D82A}">
+                    <a16:rowId xmlns:a16="http://schemas.microsoft.com/office/drawing/2014/main" val="1579185881"/>
+                  </a:ext>
+                </a:extLst>
+              </a:tr>
+            </a:tbl>
+          </a:graphicData>
+        </a:graphic>
+      </p:graphicFrame>
+      <p:sp>
+        <p:nvSpPr>
+          <p:cNvPr id="6" name="CuadroTexto 5">
+            <a:extLst>
+              <a:ext uri="{FF2B5EF4-FFF2-40B4-BE49-F238E27FC236}">
+                <a16:creationId xmlns:a16="http://schemas.microsoft.com/office/drawing/2014/main" id="{4D09E09A-B2B6-7F14-C818-49ADBA4B6C66}"/>
+              </a:ext>
+            </a:extLst>
+          </p:cNvPr>
+          <p:cNvSpPr txBox="1"/>
+          <p:nvPr/>
+        </p:nvSpPr>
+        <p:spPr>
+          <a:xfrm>
+            <a:off x="838200" y="5846544"/>
+            <a:ext cx="10033000" cy="369332"/>
+          </a:xfrm>
+          <a:prstGeom prst="rect">
+            <a:avLst/>
+          </a:prstGeom>
+          <a:noFill/>
+        </p:spPr>
+        <p:txBody>
+          <a:bodyPr wrap="square" rtlCol="0">
+            <a:spAutoFit/>
+          </a:bodyPr>
           <a:lstStyle/>
           <a:p>
-            <a:endParaRPr lang="es-CO" dirty="0"/>
+            <a:r>
+              <a:rPr lang="es-CO" dirty="0"/>
+              <a:t>Cada cambio debe indicar qué RF, RNF, HU, ET, Error implementa o soluciona</a:t>
+            </a:r>
+          </a:p>
+        </p:txBody>
+      </p:sp>
+      <p:pic>
+        <p:nvPicPr>
+          <p:cNvPr id="8" name="Imagen 7" descr="My Sena: Logotipo del sena">
+            <a:extLst>
+              <a:ext uri="{FF2B5EF4-FFF2-40B4-BE49-F238E27FC236}">
+                <a16:creationId xmlns:a16="http://schemas.microsoft.com/office/drawing/2014/main" id="{BE67420B-A8BC-7A5F-559D-A29D50E6DAE3}"/>
+              </a:ext>
+            </a:extLst>
+          </p:cNvPr>
+          <p:cNvPicPr>
+            <a:picLocks noChangeAspect="1"/>
+          </p:cNvPicPr>
+          <p:nvPr/>
+        </p:nvPicPr>
+        <p:blipFill>
+          <a:blip r:embed="rId2"/>
+          <a:stretch>
+            <a:fillRect/>
+          </a:stretch>
+        </p:blipFill>
+        <p:spPr>
+          <a:xfrm>
+            <a:off x="11054449" y="185270"/>
+            <a:ext cx="779930" cy="779930"/>
+          </a:xfrm>
+          <a:prstGeom prst="rect">
+            <a:avLst/>
+          </a:prstGeom>
+        </p:spPr>
+      </p:pic>
+      <p:sp>
+        <p:nvSpPr>
+          <p:cNvPr id="10" name="CuadroTexto 9">
+            <a:extLst>
+              <a:ext uri="{FF2B5EF4-FFF2-40B4-BE49-F238E27FC236}">
+                <a16:creationId xmlns:a16="http://schemas.microsoft.com/office/drawing/2014/main" id="{7FDF9CDB-460B-8249-1611-CA982121B49B}"/>
+              </a:ext>
+            </a:extLst>
+          </p:cNvPr>
+          <p:cNvSpPr txBox="1"/>
+          <p:nvPr/>
+        </p:nvSpPr>
+        <p:spPr>
+          <a:xfrm>
+            <a:off x="1009650" y="6488064"/>
+            <a:ext cx="10058400" cy="369332"/>
+          </a:xfrm>
+          <a:prstGeom prst="rect">
+            <a:avLst/>
+          </a:prstGeom>
+          <a:solidFill>
+            <a:srgbClr val="92D050"/>
+          </a:solidFill>
+          <a:ln>
+            <a:solidFill>
+              <a:srgbClr val="C00000"/>
+            </a:solidFill>
+          </a:ln>
+        </p:spPr>
+        <p:txBody>
+          <a:bodyPr wrap="square" rtlCol="0">
+            <a:spAutoFit/>
+          </a:bodyPr>
+          <a:lstStyle/>
+          <a:p>
+            <a:r>
+              <a:rPr lang="es-CO" dirty="0"/>
+              <a:t>Nestor Arias - Instructor</a:t>
+            </a:r>
           </a:p>
         </p:txBody>
       </p:sp>
     </p:spTree>
     <p:extLst>
       <p:ext uri="{BB962C8B-B14F-4D97-AF65-F5344CB8AC3E}">
-        <p14:creationId xmlns:p14="http://schemas.microsoft.com/office/powerpoint/2010/main" val="3674764571"/>
+        <p14:creationId xmlns:p14="http://schemas.microsoft.com/office/powerpoint/2010/main" val="287048700"/>
       </p:ext>
     </p:extLst>
   </p:cSld>
@@ -3573,6 +5120,404 @@
           <p:cNvPr id="2" name="Título 1">
             <a:extLst>
               <a:ext uri="{FF2B5EF4-FFF2-40B4-BE49-F238E27FC236}">
+                <a16:creationId xmlns:a16="http://schemas.microsoft.com/office/drawing/2014/main" id="{5AB52688-B340-D8FD-0EFF-6ED77C000801}"/>
+              </a:ext>
+            </a:extLst>
+          </p:cNvPr>
+          <p:cNvSpPr>
+            <a:spLocks noGrp="1"/>
+          </p:cNvSpPr>
+          <p:nvPr>
+            <p:ph type="title"/>
+          </p:nvPr>
+        </p:nvSpPr>
+        <p:spPr/>
+        <p:txBody>
+          <a:bodyPr/>
+          <a:lstStyle/>
+          <a:p>
+            <a:r>
+              <a:rPr lang="es-CO" dirty="0"/>
+              <a:t>Nombres de </a:t>
+            </a:r>
+            <a:r>
+              <a:rPr lang="es-CO" dirty="0" err="1"/>
+              <a:t>Commits</a:t>
+            </a:r>
+            <a:r>
+              <a:rPr lang="es-CO" dirty="0"/>
+              <a:t>&gt;Ejercicio</a:t>
+            </a:r>
+          </a:p>
+        </p:txBody>
+      </p:sp>
+      <p:sp>
+        <p:nvSpPr>
+          <p:cNvPr id="4" name="CuadroTexto 3">
+            <a:extLst>
+              <a:ext uri="{FF2B5EF4-FFF2-40B4-BE49-F238E27FC236}">
+                <a16:creationId xmlns:a16="http://schemas.microsoft.com/office/drawing/2014/main" id="{77CB607C-9D68-884D-518B-618272B732B6}"/>
+              </a:ext>
+            </a:extLst>
+          </p:cNvPr>
+          <p:cNvSpPr txBox="1"/>
+          <p:nvPr/>
+        </p:nvSpPr>
+        <p:spPr>
+          <a:xfrm>
+            <a:off x="965200" y="1879600"/>
+            <a:ext cx="10901680" cy="923330"/>
+          </a:xfrm>
+          <a:prstGeom prst="rect">
+            <a:avLst/>
+          </a:prstGeom>
+          <a:noFill/>
+        </p:spPr>
+        <p:txBody>
+          <a:bodyPr wrap="square" rtlCol="0">
+            <a:spAutoFit/>
+          </a:bodyPr>
+          <a:lstStyle/>
+          <a:p>
+            <a:r>
+              <a:rPr lang="es-CO" dirty="0"/>
+              <a:t>Coloque el siguiente código en el archivo </a:t>
+            </a:r>
+          </a:p>
+          <a:p>
+            <a:r>
+              <a:rPr lang="es-CO" dirty="0" err="1"/>
+              <a:t>src</a:t>
+            </a:r>
+            <a:r>
+              <a:rPr lang="es-CO" dirty="0"/>
+              <a:t>/</a:t>
+            </a:r>
+            <a:r>
+              <a:rPr lang="es-CO" dirty="0" err="1"/>
+              <a:t>docs</a:t>
+            </a:r>
+            <a:r>
+              <a:rPr lang="es-CO" dirty="0"/>
+              <a:t>/</a:t>
+            </a:r>
+            <a:r>
+              <a:rPr lang="es-CO" dirty="0" err="1"/>
+              <a:t>layout</a:t>
+            </a:r>
+            <a:r>
+              <a:rPr lang="es-CO" dirty="0"/>
+              <a:t>/</a:t>
+            </a:r>
+            <a:r>
+              <a:rPr lang="es-CO" dirty="0" err="1"/>
+              <a:t>header.php</a:t>
+            </a:r>
+            <a:r>
+              <a:rPr lang="es-CO" dirty="0"/>
+              <a:t> (líneas 74-78)</a:t>
+            </a:r>
+            <a:br>
+              <a:rPr lang="es-CO" dirty="0"/>
+            </a:br>
+            <a:r>
+              <a:rPr lang="es-CO" dirty="0"/>
+              <a:t>Agregue el archivo en ejercicios/comit1/</a:t>
+            </a:r>
+            <a:r>
+              <a:rPr lang="es-CO" dirty="0" err="1"/>
+              <a:t>acerca.php</a:t>
+            </a:r>
+            <a:r>
+              <a:rPr lang="es-CO" dirty="0"/>
+              <a:t> al directorio </a:t>
+            </a:r>
+            <a:r>
+              <a:rPr lang="es-CO" dirty="0" err="1"/>
+              <a:t>src</a:t>
+            </a:r>
+            <a:r>
+              <a:rPr lang="es-CO" dirty="0"/>
+              <a:t>/</a:t>
+            </a:r>
+            <a:r>
+              <a:rPr lang="es-CO" dirty="0" err="1"/>
+              <a:t>httdocs</a:t>
+            </a:r>
+            <a:endParaRPr lang="es-CO" dirty="0"/>
+          </a:p>
+        </p:txBody>
+      </p:sp>
+      <p:sp>
+        <p:nvSpPr>
+          <p:cNvPr id="5" name="CuadroTexto 4">
+            <a:extLst>
+              <a:ext uri="{FF2B5EF4-FFF2-40B4-BE49-F238E27FC236}">
+                <a16:creationId xmlns:a16="http://schemas.microsoft.com/office/drawing/2014/main" id="{D7417A23-3851-8029-49AE-1103E6A0ABEA}"/>
+              </a:ext>
+            </a:extLst>
+          </p:cNvPr>
+          <p:cNvSpPr txBox="1"/>
+          <p:nvPr/>
+        </p:nvSpPr>
+        <p:spPr>
+          <a:xfrm>
+            <a:off x="838200" y="2926080"/>
+            <a:ext cx="10901680" cy="1477328"/>
+          </a:xfrm>
+          <a:prstGeom prst="rect">
+            <a:avLst/>
+          </a:prstGeom>
+          <a:noFill/>
+        </p:spPr>
+        <p:txBody>
+          <a:bodyPr wrap="square" rtlCol="0">
+            <a:spAutoFit/>
+          </a:bodyPr>
+          <a:lstStyle/>
+          <a:p>
+            <a:r>
+              <a:rPr lang="es-CO" dirty="0"/>
+              <a:t>                &lt;</a:t>
+            </a:r>
+            <a:r>
+              <a:rPr lang="es-CO" dirty="0" err="1"/>
+              <a:t>li</a:t>
+            </a:r>
+            <a:r>
+              <a:rPr lang="es-CO" dirty="0"/>
+              <a:t> </a:t>
+            </a:r>
+            <a:r>
+              <a:rPr lang="es-CO" dirty="0" err="1"/>
+              <a:t>class</a:t>
+            </a:r>
+            <a:r>
+              <a:rPr lang="es-CO" dirty="0"/>
+              <a:t>="</a:t>
+            </a:r>
+            <a:r>
+              <a:rPr lang="es-CO" dirty="0" err="1"/>
+              <a:t>nav-item</a:t>
+            </a:r>
+            <a:r>
+              <a:rPr lang="es-CO" dirty="0"/>
+              <a:t>"&gt;</a:t>
+            </a:r>
+          </a:p>
+          <a:p>
+            <a:r>
+              <a:rPr lang="es-CO" dirty="0"/>
+              <a:t>                    &lt;a </a:t>
+            </a:r>
+            <a:r>
+              <a:rPr lang="es-CO" dirty="0" err="1"/>
+              <a:t>class</a:t>
+            </a:r>
+            <a:r>
+              <a:rPr lang="es-CO" dirty="0"/>
+              <a:t>="</a:t>
+            </a:r>
+            <a:r>
+              <a:rPr lang="es-CO" dirty="0" err="1"/>
+              <a:t>nav</a:t>
+            </a:r>
+            <a:r>
+              <a:rPr lang="es-CO" dirty="0"/>
+              <a:t>-link &lt;?</a:t>
+            </a:r>
+            <a:r>
+              <a:rPr lang="es-CO" dirty="0" err="1"/>
+              <a:t>php</a:t>
+            </a:r>
+            <a:r>
+              <a:rPr lang="es-CO" dirty="0"/>
+              <a:t> echo $</a:t>
+            </a:r>
+            <a:r>
+              <a:rPr lang="es-CO" dirty="0" err="1"/>
+              <a:t>current</a:t>
+            </a:r>
+            <a:r>
+              <a:rPr lang="es-CO" dirty="0"/>
+              <a:t> === 'acerca' ? 'active' : ''; ?&gt;" </a:t>
+            </a:r>
+            <a:r>
+              <a:rPr lang="es-CO" dirty="0" err="1"/>
+              <a:t>href</a:t>
+            </a:r>
+            <a:r>
+              <a:rPr lang="es-CO" dirty="0"/>
+              <a:t>="</a:t>
+            </a:r>
+            <a:r>
+              <a:rPr lang="es-CO" dirty="0" err="1"/>
+              <a:t>acerca.php</a:t>
+            </a:r>
+            <a:r>
+              <a:rPr lang="es-CO" dirty="0"/>
+              <a:t>"&gt;</a:t>
+            </a:r>
+          </a:p>
+          <a:p>
+            <a:r>
+              <a:rPr lang="es-CO" dirty="0"/>
+              <a:t>                        &lt;i </a:t>
+            </a:r>
+            <a:r>
+              <a:rPr lang="es-CO" dirty="0" err="1"/>
+              <a:t>class</a:t>
+            </a:r>
+            <a:r>
+              <a:rPr lang="es-CO" dirty="0"/>
+              <a:t>="</a:t>
+            </a:r>
+            <a:r>
+              <a:rPr lang="es-CO" dirty="0" err="1"/>
+              <a:t>bi</a:t>
+            </a:r>
+            <a:r>
+              <a:rPr lang="es-CO" dirty="0"/>
+              <a:t> </a:t>
+            </a:r>
+            <a:r>
+              <a:rPr lang="es-CO" dirty="0" err="1"/>
+              <a:t>bi-info-circle</a:t>
+            </a:r>
+            <a:r>
+              <a:rPr lang="es-CO" dirty="0"/>
+              <a:t> me-1"&gt;&lt;/i&gt;Acerca de</a:t>
+            </a:r>
+          </a:p>
+          <a:p>
+            <a:r>
+              <a:rPr lang="es-CO" dirty="0"/>
+              <a:t>                    &lt;/a&gt;</a:t>
+            </a:r>
+          </a:p>
+          <a:p>
+            <a:r>
+              <a:rPr lang="es-CO" dirty="0"/>
+              <a:t>                &lt;/</a:t>
+            </a:r>
+            <a:r>
+              <a:rPr lang="es-CO" dirty="0" err="1"/>
+              <a:t>li</a:t>
+            </a:r>
+            <a:r>
+              <a:rPr lang="es-CO" dirty="0"/>
+              <a:t>&gt;</a:t>
+            </a:r>
+          </a:p>
+        </p:txBody>
+      </p:sp>
+      <p:pic>
+        <p:nvPicPr>
+          <p:cNvPr id="7" name="Imagen 6" descr="My Sena: Logotipo del sena">
+            <a:extLst>
+              <a:ext uri="{FF2B5EF4-FFF2-40B4-BE49-F238E27FC236}">
+                <a16:creationId xmlns:a16="http://schemas.microsoft.com/office/drawing/2014/main" id="{E4F582D5-8DE8-E69E-2655-A13A73AE489E}"/>
+              </a:ext>
+            </a:extLst>
+          </p:cNvPr>
+          <p:cNvPicPr>
+            <a:picLocks noChangeAspect="1"/>
+          </p:cNvPicPr>
+          <p:nvPr/>
+        </p:nvPicPr>
+        <p:blipFill>
+          <a:blip r:embed="rId2"/>
+          <a:stretch>
+            <a:fillRect/>
+          </a:stretch>
+        </p:blipFill>
+        <p:spPr>
+          <a:xfrm>
+            <a:off x="11054449" y="185270"/>
+            <a:ext cx="779930" cy="779930"/>
+          </a:xfrm>
+          <a:prstGeom prst="rect">
+            <a:avLst/>
+          </a:prstGeom>
+        </p:spPr>
+      </p:pic>
+      <p:sp>
+        <p:nvSpPr>
+          <p:cNvPr id="9" name="CuadroTexto 8">
+            <a:extLst>
+              <a:ext uri="{FF2B5EF4-FFF2-40B4-BE49-F238E27FC236}">
+                <a16:creationId xmlns:a16="http://schemas.microsoft.com/office/drawing/2014/main" id="{A0161D16-DF47-3E4F-C0FB-E7886E894E95}"/>
+              </a:ext>
+            </a:extLst>
+          </p:cNvPr>
+          <p:cNvSpPr txBox="1"/>
+          <p:nvPr/>
+        </p:nvSpPr>
+        <p:spPr>
+          <a:xfrm>
+            <a:off x="1009650" y="6488064"/>
+            <a:ext cx="10058400" cy="369332"/>
+          </a:xfrm>
+          <a:prstGeom prst="rect">
+            <a:avLst/>
+          </a:prstGeom>
+          <a:solidFill>
+            <a:srgbClr val="92D050"/>
+          </a:solidFill>
+          <a:ln>
+            <a:solidFill>
+              <a:srgbClr val="C00000"/>
+            </a:solidFill>
+          </a:ln>
+        </p:spPr>
+        <p:txBody>
+          <a:bodyPr wrap="square" rtlCol="0">
+            <a:spAutoFit/>
+          </a:bodyPr>
+          <a:lstStyle/>
+          <a:p>
+            <a:r>
+              <a:rPr lang="es-CO" dirty="0"/>
+              <a:t>Nestor Arias - Instructor</a:t>
+            </a:r>
+          </a:p>
+        </p:txBody>
+      </p:sp>
+    </p:spTree>
+    <p:extLst>
+      <p:ext uri="{BB962C8B-B14F-4D97-AF65-F5344CB8AC3E}">
+        <p14:creationId xmlns:p14="http://schemas.microsoft.com/office/powerpoint/2010/main" val="3674764571"/>
+      </p:ext>
+    </p:extLst>
+  </p:cSld>
+  <p:clrMapOvr>
+    <a:masterClrMapping/>
+  </p:clrMapOvr>
+</p:sld>
+</file>
+
+<file path=ppt/slides/slide12.xml><?xml version="1.0" encoding="utf-8"?>
+<p:sld xmlns:a="http://schemas.openxmlformats.org/drawingml/2006/main" xmlns:r="http://schemas.openxmlformats.org/officeDocument/2006/relationships" xmlns:p="http://schemas.openxmlformats.org/presentationml/2006/main">
+  <p:cSld>
+    <p:spTree>
+      <p:nvGrpSpPr>
+        <p:cNvPr id="1" name=""/>
+        <p:cNvGrpSpPr/>
+        <p:nvPr/>
+      </p:nvGrpSpPr>
+      <p:grpSpPr>
+        <a:xfrm>
+          <a:off x="0" y="0"/>
+          <a:ext cx="0" cy="0"/>
+          <a:chOff x="0" y="0"/>
+          <a:chExt cx="0" cy="0"/>
+        </a:xfrm>
+      </p:grpSpPr>
+      <p:sp>
+        <p:nvSpPr>
+          <p:cNvPr id="2" name="Título 1">
+            <a:extLst>
+              <a:ext uri="{FF2B5EF4-FFF2-40B4-BE49-F238E27FC236}">
                 <a16:creationId xmlns:a16="http://schemas.microsoft.com/office/drawing/2014/main" id="{1C811F3B-B19B-275A-5139-915AE8CBA48A}"/>
               </a:ext>
             </a:extLst>
@@ -3619,7 +5564,7 @@
         </p:blipFill>
         <p:spPr>
           <a:xfrm>
-            <a:off x="1828799" y="1208359"/>
+            <a:off x="1432559" y="1517516"/>
             <a:ext cx="9081655" cy="5340484"/>
           </a:xfrm>
           <a:prstGeom prst="rect">
@@ -3627,6 +5572,78 @@
           </a:prstGeom>
         </p:spPr>
       </p:pic>
+      <p:pic>
+        <p:nvPicPr>
+          <p:cNvPr id="11" name="Imagen 10" descr="My Sena: Logotipo del sena">
+            <a:extLst>
+              <a:ext uri="{FF2B5EF4-FFF2-40B4-BE49-F238E27FC236}">
+                <a16:creationId xmlns:a16="http://schemas.microsoft.com/office/drawing/2014/main" id="{60353EF6-B548-85BC-E6D3-92C2EF44DF09}"/>
+              </a:ext>
+            </a:extLst>
+          </p:cNvPr>
+          <p:cNvPicPr>
+            <a:picLocks noChangeAspect="1"/>
+          </p:cNvPicPr>
+          <p:nvPr/>
+        </p:nvPicPr>
+        <p:blipFill>
+          <a:blip r:embed="rId3"/>
+          <a:stretch>
+            <a:fillRect/>
+          </a:stretch>
+        </p:blipFill>
+        <p:spPr>
+          <a:xfrm>
+            <a:off x="11054449" y="185270"/>
+            <a:ext cx="779930" cy="779930"/>
+          </a:xfrm>
+          <a:prstGeom prst="rect">
+            <a:avLst/>
+          </a:prstGeom>
+        </p:spPr>
+      </p:pic>
+      <p:sp>
+        <p:nvSpPr>
+          <p:cNvPr id="13" name="CuadroTexto 12">
+            <a:extLst>
+              <a:ext uri="{FF2B5EF4-FFF2-40B4-BE49-F238E27FC236}">
+                <a16:creationId xmlns:a16="http://schemas.microsoft.com/office/drawing/2014/main" id="{EE6A0C11-4F5A-63ED-03CF-F26D0F507BED}"/>
+              </a:ext>
+            </a:extLst>
+          </p:cNvPr>
+          <p:cNvSpPr txBox="1"/>
+          <p:nvPr/>
+        </p:nvSpPr>
+        <p:spPr>
+          <a:xfrm>
+            <a:off x="1009650" y="6488064"/>
+            <a:ext cx="10058400" cy="369332"/>
+          </a:xfrm>
+          <a:prstGeom prst="rect">
+            <a:avLst/>
+          </a:prstGeom>
+          <a:solidFill>
+            <a:srgbClr val="92D050"/>
+          </a:solidFill>
+          <a:ln>
+            <a:solidFill>
+              <a:srgbClr val="C00000"/>
+            </a:solidFill>
+          </a:ln>
+        </p:spPr>
+        <p:txBody>
+          <a:bodyPr wrap="square" rtlCol="0">
+            <a:spAutoFit/>
+          </a:bodyPr>
+          <a:lstStyle/>
+          <a:p>
+            <a:r>
+              <a:rPr lang="es-CO" dirty="0"/>
+              <a:t>Nestor Arias - Instructor</a:t>
+            </a:r>
+          </a:p>
+        </p:txBody>
+      </p:sp>
     </p:spTree>
     <p:extLst>
       <p:ext uri="{BB962C8B-B14F-4D97-AF65-F5344CB8AC3E}">
@@ -3640,7 +5657,7 @@
 </p:sld>
 </file>
 
-<file path=ppt/slides/slide12.xml><?xml version="1.0" encoding="utf-8"?>
+<file path=ppt/slides/slide13.xml><?xml version="1.0" encoding="utf-8"?>
 <p:sld xmlns:a="http://schemas.openxmlformats.org/drawingml/2006/main" xmlns:r="http://schemas.openxmlformats.org/officeDocument/2006/relationships" xmlns:p="http://schemas.openxmlformats.org/presentationml/2006/main">
   <p:cSld>
     <p:spTree>
@@ -3769,6 +5786,215 @@
           <a:p>
             <a:r>
               <a:rPr lang="es-CO" dirty="0"/>
+              <a:t>Ejercicio</a:t>
+            </a:r>
+          </a:p>
+        </p:txBody>
+      </p:sp>
+      <p:sp>
+        <p:nvSpPr>
+          <p:cNvPr id="9" name="CuadroTexto 8">
+            <a:extLst>
+              <a:ext uri="{FF2B5EF4-FFF2-40B4-BE49-F238E27FC236}">
+                <a16:creationId xmlns:a16="http://schemas.microsoft.com/office/drawing/2014/main" id="{967D363B-5CBE-3AAD-CEBD-71464EAB3844}"/>
+              </a:ext>
+            </a:extLst>
+          </p:cNvPr>
+          <p:cNvSpPr txBox="1"/>
+          <p:nvPr/>
+        </p:nvSpPr>
+        <p:spPr>
+          <a:xfrm>
+            <a:off x="1300480" y="2367280"/>
+            <a:ext cx="8026400" cy="1200329"/>
+          </a:xfrm>
+          <a:prstGeom prst="rect">
+            <a:avLst/>
+          </a:prstGeom>
+          <a:noFill/>
+        </p:spPr>
+        <p:txBody>
+          <a:bodyPr wrap="square" rtlCol="0">
+            <a:spAutoFit/>
+          </a:bodyPr>
+          <a:lstStyle/>
+          <a:p>
+            <a:r>
+              <a:rPr lang="es-CO" dirty="0"/>
+              <a:t>Con su herramienta favorita descargue el repositorio de </a:t>
+            </a:r>
+            <a:r>
+              <a:rPr lang="es-CO" dirty="0" err="1"/>
+              <a:t>github</a:t>
+            </a:r>
+            <a:br>
+              <a:rPr lang="es-CO" dirty="0"/>
+            </a:br>
+            <a:r>
+              <a:rPr lang="es-CO" dirty="0">
+                <a:hlinkClick r:id="rId2"/>
+              </a:rPr>
+              <a:t>https://github.com/omarazrat/SENAGitCommands.git</a:t>
+            </a:r>
+            <a:br>
+              <a:rPr lang="es-CO" dirty="0"/>
+            </a:br>
+            <a:r>
+              <a:rPr lang="es-CO" dirty="0"/>
+              <a:t>opciones:</a:t>
+            </a:r>
+            <a:br>
+              <a:rPr lang="es-CO" dirty="0"/>
+            </a:br>
+            <a:r>
+              <a:rPr lang="es-CO" dirty="0" err="1"/>
+              <a:t>gh</a:t>
+            </a:r>
+            <a:r>
+              <a:rPr lang="es-CO" dirty="0"/>
+              <a:t> repo clone </a:t>
+            </a:r>
+            <a:r>
+              <a:rPr lang="es-CO" dirty="0" err="1"/>
+              <a:t>omarazrat</a:t>
+            </a:r>
+            <a:r>
+              <a:rPr lang="es-CO" dirty="0"/>
+              <a:t>/</a:t>
+            </a:r>
+            <a:r>
+              <a:rPr lang="es-CO" dirty="0" err="1"/>
+              <a:t>SENAGitCommands</a:t>
+            </a:r>
+            <a:endParaRPr lang="es-CO" dirty="0"/>
+          </a:p>
+        </p:txBody>
+      </p:sp>
+      <p:pic>
+        <p:nvPicPr>
+          <p:cNvPr id="12" name="Imagen 11" descr="My Sena: Logotipo del sena">
+            <a:extLst>
+              <a:ext uri="{FF2B5EF4-FFF2-40B4-BE49-F238E27FC236}">
+                <a16:creationId xmlns:a16="http://schemas.microsoft.com/office/drawing/2014/main" id="{351A4402-8A9A-8CAC-6DF6-1C59B6F96D80}"/>
+              </a:ext>
+            </a:extLst>
+          </p:cNvPr>
+          <p:cNvPicPr>
+            <a:picLocks noChangeAspect="1"/>
+          </p:cNvPicPr>
+          <p:nvPr/>
+        </p:nvPicPr>
+        <p:blipFill>
+          <a:blip r:embed="rId3"/>
+          <a:stretch>
+            <a:fillRect/>
+          </a:stretch>
+        </p:blipFill>
+        <p:spPr>
+          <a:xfrm>
+            <a:off x="11054449" y="185270"/>
+            <a:ext cx="779930" cy="779930"/>
+          </a:xfrm>
+          <a:prstGeom prst="rect">
+            <a:avLst/>
+          </a:prstGeom>
+        </p:spPr>
+      </p:pic>
+      <p:sp>
+        <p:nvSpPr>
+          <p:cNvPr id="13" name="CuadroTexto 12">
+            <a:extLst>
+              <a:ext uri="{FF2B5EF4-FFF2-40B4-BE49-F238E27FC236}">
+                <a16:creationId xmlns:a16="http://schemas.microsoft.com/office/drawing/2014/main" id="{1C4C715D-8BC3-A451-1811-908DA22E97FC}"/>
+              </a:ext>
+            </a:extLst>
+          </p:cNvPr>
+          <p:cNvSpPr txBox="1"/>
+          <p:nvPr/>
+        </p:nvSpPr>
+        <p:spPr>
+          <a:xfrm>
+            <a:off x="1300480" y="6188702"/>
+            <a:ext cx="10058400" cy="369332"/>
+          </a:xfrm>
+          <a:prstGeom prst="rect">
+            <a:avLst/>
+          </a:prstGeom>
+          <a:solidFill>
+            <a:srgbClr val="92D050"/>
+          </a:solidFill>
+          <a:ln>
+            <a:solidFill>
+              <a:srgbClr val="C00000"/>
+            </a:solidFill>
+          </a:ln>
+        </p:spPr>
+        <p:txBody>
+          <a:bodyPr wrap="square" rtlCol="0">
+            <a:spAutoFit/>
+          </a:bodyPr>
+          <a:lstStyle/>
+          <a:p>
+            <a:r>
+              <a:rPr lang="es-CO" dirty="0"/>
+              <a:t>Nestor Arias - Instructor</a:t>
+            </a:r>
+          </a:p>
+        </p:txBody>
+      </p:sp>
+    </p:spTree>
+    <p:extLst>
+      <p:ext uri="{BB962C8B-B14F-4D97-AF65-F5344CB8AC3E}">
+        <p14:creationId xmlns:p14="http://schemas.microsoft.com/office/powerpoint/2010/main" val="1928132666"/>
+      </p:ext>
+    </p:extLst>
+  </p:cSld>
+  <p:clrMapOvr>
+    <a:masterClrMapping/>
+  </p:clrMapOvr>
+</p:sld>
+</file>
+
+<file path=ppt/slides/slide3.xml><?xml version="1.0" encoding="utf-8"?>
+<p:sld xmlns:a="http://schemas.openxmlformats.org/drawingml/2006/main" xmlns:r="http://schemas.openxmlformats.org/officeDocument/2006/relationships" xmlns:p="http://schemas.openxmlformats.org/presentationml/2006/main">
+  <p:cSld>
+    <p:spTree>
+      <p:nvGrpSpPr>
+        <p:cNvPr id="1" name=""/>
+        <p:cNvGrpSpPr/>
+        <p:nvPr/>
+      </p:nvGrpSpPr>
+      <p:grpSpPr>
+        <a:xfrm>
+          <a:off x="0" y="0"/>
+          <a:ext cx="0" cy="0"/>
+          <a:chOff x="0" y="0"/>
+          <a:chExt cx="0" cy="0"/>
+        </a:xfrm>
+      </p:grpSpPr>
+      <p:sp>
+        <p:nvSpPr>
+          <p:cNvPr id="2" name="Título 1">
+            <a:extLst>
+              <a:ext uri="{FF2B5EF4-FFF2-40B4-BE49-F238E27FC236}">
+                <a16:creationId xmlns:a16="http://schemas.microsoft.com/office/drawing/2014/main" id="{451256FB-3F5C-F4DD-C1EF-3A353222C8BA}"/>
+              </a:ext>
+            </a:extLst>
+          </p:cNvPr>
+          <p:cNvSpPr>
+            <a:spLocks noGrp="1"/>
+          </p:cNvSpPr>
+          <p:nvPr>
+            <p:ph type="title"/>
+          </p:nvPr>
+        </p:nvSpPr>
+        <p:spPr/>
+        <p:txBody>
+          <a:bodyPr/>
+          <a:lstStyle/>
+          <a:p>
+            <a:r>
+              <a:rPr lang="es-CO" dirty="0"/>
               <a:t>Cambiando de Rama</a:t>
             </a:r>
           </a:p>
@@ -3901,10 +6127,82 @@
           </a:fontRef>
         </p:style>
       </p:cxnSp>
+      <p:pic>
+        <p:nvPicPr>
+          <p:cNvPr id="4" name="Imagen 3" descr="My Sena: Logotipo del sena">
+            <a:extLst>
+              <a:ext uri="{FF2B5EF4-FFF2-40B4-BE49-F238E27FC236}">
+                <a16:creationId xmlns:a16="http://schemas.microsoft.com/office/drawing/2014/main" id="{6BFFDF0A-42E8-EB39-E8A9-3D50CFB5A93D}"/>
+              </a:ext>
+            </a:extLst>
+          </p:cNvPr>
+          <p:cNvPicPr>
+            <a:picLocks noChangeAspect="1"/>
+          </p:cNvPicPr>
+          <p:nvPr/>
+        </p:nvPicPr>
+        <p:blipFill>
+          <a:blip r:embed="rId3"/>
+          <a:stretch>
+            <a:fillRect/>
+          </a:stretch>
+        </p:blipFill>
+        <p:spPr>
+          <a:xfrm>
+            <a:off x="11054449" y="185270"/>
+            <a:ext cx="779930" cy="779930"/>
+          </a:xfrm>
+          <a:prstGeom prst="rect">
+            <a:avLst/>
+          </a:prstGeom>
+        </p:spPr>
+      </p:pic>
+      <p:sp>
+        <p:nvSpPr>
+          <p:cNvPr id="9" name="CuadroTexto 8">
+            <a:extLst>
+              <a:ext uri="{FF2B5EF4-FFF2-40B4-BE49-F238E27FC236}">
+                <a16:creationId xmlns:a16="http://schemas.microsoft.com/office/drawing/2014/main" id="{91016234-A7FB-ACFB-B4AF-6208ADDFEBFC}"/>
+              </a:ext>
+            </a:extLst>
+          </p:cNvPr>
+          <p:cNvSpPr txBox="1"/>
+          <p:nvPr/>
+        </p:nvSpPr>
+        <p:spPr>
+          <a:xfrm>
+            <a:off x="1009650" y="6488064"/>
+            <a:ext cx="10058400" cy="369332"/>
+          </a:xfrm>
+          <a:prstGeom prst="rect">
+            <a:avLst/>
+          </a:prstGeom>
+          <a:solidFill>
+            <a:srgbClr val="92D050"/>
+          </a:solidFill>
+          <a:ln>
+            <a:solidFill>
+              <a:srgbClr val="C00000"/>
+            </a:solidFill>
+          </a:ln>
+        </p:spPr>
+        <p:txBody>
+          <a:bodyPr wrap="square" rtlCol="0">
+            <a:spAutoFit/>
+          </a:bodyPr>
+          <a:lstStyle/>
+          <a:p>
+            <a:r>
+              <a:rPr lang="es-CO" dirty="0"/>
+              <a:t>Nestor Arias - Instructor</a:t>
+            </a:r>
+          </a:p>
+        </p:txBody>
+      </p:sp>
     </p:spTree>
     <p:extLst>
       <p:ext uri="{BB962C8B-B14F-4D97-AF65-F5344CB8AC3E}">
-        <p14:creationId xmlns:p14="http://schemas.microsoft.com/office/powerpoint/2010/main" val="1928132666"/>
+        <p14:creationId xmlns:p14="http://schemas.microsoft.com/office/powerpoint/2010/main" val="3778122115"/>
       </p:ext>
     </p:extLst>
   </p:cSld>
@@ -3914,7 +6212,7 @@
 </p:sld>
 </file>
 
-<file path=ppt/slides/slide3.xml><?xml version="1.0" encoding="utf-8"?>
+<file path=ppt/slides/slide4.xml><?xml version="1.0" encoding="utf-8"?>
 <p:sld xmlns:a="http://schemas.openxmlformats.org/drawingml/2006/main" xmlns:r="http://schemas.openxmlformats.org/officeDocument/2006/relationships" xmlns:p="http://schemas.openxmlformats.org/presentationml/2006/main">
   <p:cSld>
     <p:spTree>
@@ -4946,6 +7244,78 @@
           </a:graphicData>
         </a:graphic>
       </p:graphicFrame>
+      <p:pic>
+        <p:nvPicPr>
+          <p:cNvPr id="9" name="Imagen 8" descr="My Sena: Logotipo del sena">
+            <a:extLst>
+              <a:ext uri="{FF2B5EF4-FFF2-40B4-BE49-F238E27FC236}">
+                <a16:creationId xmlns:a16="http://schemas.microsoft.com/office/drawing/2014/main" id="{C04A6BF0-2D75-F95F-DD8C-104941277D0E}"/>
+              </a:ext>
+            </a:extLst>
+          </p:cNvPr>
+          <p:cNvPicPr>
+            <a:picLocks noChangeAspect="1"/>
+          </p:cNvPicPr>
+          <p:nvPr/>
+        </p:nvPicPr>
+        <p:blipFill>
+          <a:blip r:embed="rId2"/>
+          <a:stretch>
+            <a:fillRect/>
+          </a:stretch>
+        </p:blipFill>
+        <p:spPr>
+          <a:xfrm>
+            <a:off x="11054449" y="185270"/>
+            <a:ext cx="779930" cy="779930"/>
+          </a:xfrm>
+          <a:prstGeom prst="rect">
+            <a:avLst/>
+          </a:prstGeom>
+        </p:spPr>
+      </p:pic>
+      <p:sp>
+        <p:nvSpPr>
+          <p:cNvPr id="11" name="CuadroTexto 10">
+            <a:extLst>
+              <a:ext uri="{FF2B5EF4-FFF2-40B4-BE49-F238E27FC236}">
+                <a16:creationId xmlns:a16="http://schemas.microsoft.com/office/drawing/2014/main" id="{7FE6CF1B-EA27-5C49-8C4B-99413B15F521}"/>
+              </a:ext>
+            </a:extLst>
+          </p:cNvPr>
+          <p:cNvSpPr txBox="1"/>
+          <p:nvPr/>
+        </p:nvSpPr>
+        <p:spPr>
+          <a:xfrm>
+            <a:off x="1009650" y="6488064"/>
+            <a:ext cx="10058400" cy="369332"/>
+          </a:xfrm>
+          <a:prstGeom prst="rect">
+            <a:avLst/>
+          </a:prstGeom>
+          <a:solidFill>
+            <a:srgbClr val="92D050"/>
+          </a:solidFill>
+          <a:ln>
+            <a:solidFill>
+              <a:srgbClr val="C00000"/>
+            </a:solidFill>
+          </a:ln>
+        </p:spPr>
+        <p:txBody>
+          <a:bodyPr wrap="square" rtlCol="0">
+            <a:spAutoFit/>
+          </a:bodyPr>
+          <a:lstStyle/>
+          <a:p>
+            <a:r>
+              <a:rPr lang="es-CO" dirty="0"/>
+              <a:t>Nestor Arias - Instructor</a:t>
+            </a:r>
+          </a:p>
+        </p:txBody>
+      </p:sp>
     </p:spTree>
     <p:extLst>
       <p:ext uri="{BB962C8B-B14F-4D97-AF65-F5344CB8AC3E}">
@@ -4959,7 +7329,7 @@
 </p:sld>
 </file>
 
-<file path=ppt/slides/slide4.xml><?xml version="1.0" encoding="utf-8"?>
+<file path=ppt/slides/slide5.xml><?xml version="1.0" encoding="utf-8"?>
 <p:sld xmlns:a="http://schemas.openxmlformats.org/drawingml/2006/main" xmlns:r="http://schemas.openxmlformats.org/officeDocument/2006/relationships" xmlns:p="http://schemas.openxmlformats.org/presentationml/2006/main">
   <p:cSld>
     <p:spTree>
@@ -5187,75 +7557,42 @@
           </a:p>
         </p:txBody>
       </p:sp>
-    </p:spTree>
-    <p:extLst>
-      <p:ext uri="{BB962C8B-B14F-4D97-AF65-F5344CB8AC3E}">
-        <p14:creationId xmlns:p14="http://schemas.microsoft.com/office/powerpoint/2010/main" val="2194299801"/>
-      </p:ext>
-    </p:extLst>
-  </p:cSld>
-  <p:clrMapOvr>
-    <a:masterClrMapping/>
-  </p:clrMapOvr>
-</p:sld>
-</file>
-
-<file path=ppt/slides/slide5.xml><?xml version="1.0" encoding="utf-8"?>
-<p:sld xmlns:a="http://schemas.openxmlformats.org/drawingml/2006/main" xmlns:r="http://schemas.openxmlformats.org/officeDocument/2006/relationships" xmlns:p="http://schemas.openxmlformats.org/presentationml/2006/main">
-  <p:cSld>
-    <p:spTree>
-      <p:nvGrpSpPr>
-        <p:cNvPr id="1" name=""/>
-        <p:cNvGrpSpPr/>
-        <p:nvPr/>
-      </p:nvGrpSpPr>
-      <p:grpSpPr>
-        <a:xfrm>
-          <a:off x="0" y="0"/>
-          <a:ext cx="0" cy="0"/>
-          <a:chOff x="0" y="0"/>
-          <a:chExt cx="0" cy="0"/>
-        </a:xfrm>
-      </p:grpSpPr>
-      <p:sp>
-        <p:nvSpPr>
-          <p:cNvPr id="2" name="Título 1">
+      <p:pic>
+        <p:nvPicPr>
+          <p:cNvPr id="13" name="Imagen 12" descr="My Sena: Logotipo del sena">
             <a:extLst>
               <a:ext uri="{FF2B5EF4-FFF2-40B4-BE49-F238E27FC236}">
-                <a16:creationId xmlns:a16="http://schemas.microsoft.com/office/drawing/2014/main" id="{DB035C69-AAB5-6439-D2AD-7217E6A88089}"/>
+                <a16:creationId xmlns:a16="http://schemas.microsoft.com/office/drawing/2014/main" id="{3B45B517-7A1A-4AA1-66E5-19E1518A3115}"/>
               </a:ext>
             </a:extLst>
           </p:cNvPr>
-          <p:cNvSpPr>
-            <a:spLocks noGrp="1"/>
-          </p:cNvSpPr>
-          <p:nvPr>
-            <p:ph type="title"/>
-          </p:nvPr>
-        </p:nvSpPr>
-        <p:spPr/>
-        <p:txBody>
-          <a:bodyPr/>
-          <a:lstStyle/>
-          <a:p>
-            <a:r>
-              <a:rPr lang="es-CO" dirty="0"/>
-              <a:t>Nombres de </a:t>
-            </a:r>
-            <a:r>
-              <a:rPr lang="es-CO" dirty="0" err="1"/>
-              <a:t>Commits</a:t>
-            </a:r>
-            <a:endParaRPr lang="es-CO" dirty="0"/>
-          </a:p>
-        </p:txBody>
-      </p:sp>
-      <p:sp>
-        <p:nvSpPr>
-          <p:cNvPr id="4" name="CuadroTexto 3">
+          <p:cNvPicPr>
+            <a:picLocks noChangeAspect="1"/>
+          </p:cNvPicPr>
+          <p:nvPr/>
+        </p:nvPicPr>
+        <p:blipFill>
+          <a:blip r:embed="rId4"/>
+          <a:stretch>
+            <a:fillRect/>
+          </a:stretch>
+        </p:blipFill>
+        <p:spPr>
+          <a:xfrm>
+            <a:off x="11054449" y="185270"/>
+            <a:ext cx="779930" cy="779930"/>
+          </a:xfrm>
+          <a:prstGeom prst="rect">
+            <a:avLst/>
+          </a:prstGeom>
+        </p:spPr>
+      </p:pic>
+      <p:sp>
+        <p:nvSpPr>
+          <p:cNvPr id="15" name="CuadroTexto 14">
             <a:extLst>
               <a:ext uri="{FF2B5EF4-FFF2-40B4-BE49-F238E27FC236}">
-                <a16:creationId xmlns:a16="http://schemas.microsoft.com/office/drawing/2014/main" id="{CD92AD0F-BB68-6DB3-C58F-33029FB8BE43}"/>
+                <a16:creationId xmlns:a16="http://schemas.microsoft.com/office/drawing/2014/main" id="{F3D1F6A6-BACE-5B7A-4D7D-528C0B848F35}"/>
               </a:ext>
             </a:extLst>
           </p:cNvPr>
@@ -5264,13 +7601,20 @@
         </p:nvSpPr>
         <p:spPr>
           <a:xfrm>
-            <a:off x="924560" y="2248257"/>
-            <a:ext cx="6324600" cy="3323987"/>
+            <a:off x="1009650" y="6488064"/>
+            <a:ext cx="10058400" cy="369332"/>
           </a:xfrm>
           <a:prstGeom prst="rect">
             <a:avLst/>
           </a:prstGeom>
-          <a:noFill/>
+          <a:solidFill>
+            <a:srgbClr val="92D050"/>
+          </a:solidFill>
+          <a:ln>
+            <a:solidFill>
+              <a:srgbClr val="C00000"/>
+            </a:solidFill>
+          </a:ln>
         </p:spPr>
         <p:txBody>
           <a:bodyPr wrap="square" rtlCol="0">
@@ -5279,370 +7623,8 @@
           <a:lstStyle/>
           <a:p>
             <a:r>
-              <a:rPr lang="es-CO" sz="1400" dirty="0"/>
-              <a:t>DELETE índice innecesario en serialb1e7c53 </a:t>
-            </a:r>
-            <a:br>
-              <a:rPr lang="es-CO" sz="1400" dirty="0"/>
-            </a:br>
-            <a:r>
-              <a:rPr lang="es-CO" sz="1400" dirty="0"/>
-              <a:t>DELETE bloque de </a:t>
-            </a:r>
-            <a:br>
-              <a:rPr lang="es-CO" sz="1400" dirty="0"/>
-            </a:br>
-            <a:r>
-              <a:rPr lang="es-CO" sz="1400" dirty="0"/>
-              <a:t>INSERT manual4a9f0e8 </a:t>
-            </a:r>
-            <a:br>
-              <a:rPr lang="es-CO" sz="1400" dirty="0"/>
-            </a:br>
-            <a:r>
-              <a:rPr lang="es-CO" sz="1400" dirty="0"/>
-              <a:t>DELETE campos redundantes en usuario_rolf0a2d96 </a:t>
-            </a:r>
-            <a:br>
-              <a:rPr lang="es-CO" sz="1400" dirty="0"/>
-            </a:br>
-            <a:r>
-              <a:rPr lang="es-CO" sz="1400" dirty="0"/>
-              <a:t>UPDATE seriales </a:t>
-            </a:r>
-            <a:br>
-              <a:rPr lang="es-CO" sz="1400" dirty="0"/>
-            </a:br>
-            <a:r>
-              <a:rPr lang="es-CO" sz="1400" dirty="0"/>
-              <a:t>RM a prefijo único9e0a6c8 </a:t>
-            </a:r>
-            <a:br>
-              <a:rPr lang="es-CO" sz="1400" dirty="0"/>
-            </a:br>
-            <a:r>
-              <a:rPr lang="es-CO" sz="1400" dirty="0"/>
-              <a:t>ADD </a:t>
-            </a:r>
-            <a:r>
-              <a:rPr lang="es-CO" sz="1400" dirty="0" err="1"/>
-              <a:t>InsertPaquetes.sql</a:t>
-            </a:r>
-            <a:r>
-              <a:rPr lang="es-CO" sz="1400" dirty="0"/>
-              <a:t> con cajas gaylorb3d7f1e </a:t>
-            </a:r>
-            <a:br>
-              <a:rPr lang="es-CO" sz="1400" dirty="0"/>
-            </a:br>
-            <a:r>
-              <a:rPr lang="es-CO" sz="1400" dirty="0"/>
-              <a:t>INSERT 800 clientes del mundoa5c9e2d </a:t>
-            </a:r>
-          </a:p>
-          <a:p>
-            <a:r>
-              <a:rPr lang="es-CO" sz="1400" dirty="0"/>
-              <a:t>UPDATE precio con IVA incluido6e5b1c8 </a:t>
-            </a:r>
-          </a:p>
-          <a:p>
-            <a:r>
-              <a:rPr lang="es-CO" sz="1400" dirty="0"/>
-              <a:t>ADD script CreateDB.sqld9f2e4b </a:t>
-            </a:r>
-          </a:p>
-          <a:p>
-            <a:r>
-              <a:rPr lang="es-CO" sz="1400" dirty="0"/>
-              <a:t>INSERT roles de la aplicación7a3c8d1</a:t>
-            </a:r>
-          </a:p>
-          <a:p>
-            <a:r>
-              <a:rPr lang="es-CO" sz="1400" dirty="0"/>
-              <a:t>CREATE tabla item_venta5d1e7c9 </a:t>
-            </a:r>
-          </a:p>
-          <a:p>
-            <a:r>
-              <a:rPr lang="es-CO" sz="1400" dirty="0"/>
-              <a:t>CREATE tabla productob6a8d4e </a:t>
-            </a:r>
-          </a:p>
-          <a:p>
-            <a:r>
-              <a:rPr lang="es-CO" sz="1400" dirty="0"/>
-              <a:t>CREATE tabla usuario_rol3f7c2b0 </a:t>
-            </a:r>
-          </a:p>
-          <a:p>
-            <a:r>
-              <a:rPr lang="es-CO" sz="1400" dirty="0"/>
-              <a:t>CREATE tabla paquete</a:t>
-            </a:r>
-          </a:p>
-        </p:txBody>
-      </p:sp>
-      <p:sp>
-        <p:nvSpPr>
-          <p:cNvPr id="5" name="CuadroTexto 4">
-            <a:extLst>
-              <a:ext uri="{FF2B5EF4-FFF2-40B4-BE49-F238E27FC236}">
-                <a16:creationId xmlns:a16="http://schemas.microsoft.com/office/drawing/2014/main" id="{CD45DA16-BDBB-3BEC-CEA5-D564C459CC40}"/>
-              </a:ext>
-            </a:extLst>
-          </p:cNvPr>
-          <p:cNvSpPr txBox="1"/>
-          <p:nvPr/>
-        </p:nvSpPr>
-        <p:spPr>
-          <a:xfrm>
-            <a:off x="8798560" y="2265680"/>
-            <a:ext cx="2377440" cy="646331"/>
-          </a:xfrm>
-          <a:prstGeom prst="rect">
-            <a:avLst/>
-          </a:prstGeom>
-          <a:noFill/>
-        </p:spPr>
-        <p:txBody>
-          <a:bodyPr wrap="square" rtlCol="0">
-            <a:spAutoFit/>
-          </a:bodyPr>
-          <a:lstStyle/>
-          <a:p>
-            <a:r>
               <a:rPr lang="es-CO" dirty="0"/>
-              <a:t>RF01 — Página principal (</a:t>
-            </a:r>
-            <a:r>
-              <a:rPr lang="es-CO" dirty="0" err="1"/>
-              <a:t>dashboard</a:t>
-            </a:r>
-            <a:r>
-              <a:rPr lang="es-CO" dirty="0"/>
-              <a:t>)</a:t>
-            </a:r>
-          </a:p>
-        </p:txBody>
-      </p:sp>
-      <p:sp>
-        <p:nvSpPr>
-          <p:cNvPr id="6" name="CuadroTexto 5">
-            <a:extLst>
-              <a:ext uri="{FF2B5EF4-FFF2-40B4-BE49-F238E27FC236}">
-                <a16:creationId xmlns:a16="http://schemas.microsoft.com/office/drawing/2014/main" id="{A3B17192-58C7-3C36-C6FC-72E9CDCC28C1}"/>
-              </a:ext>
-            </a:extLst>
-          </p:cNvPr>
-          <p:cNvSpPr txBox="1"/>
-          <p:nvPr/>
-        </p:nvSpPr>
-        <p:spPr>
-          <a:xfrm>
-            <a:off x="8798560" y="3163837"/>
-            <a:ext cx="2377440" cy="646331"/>
-          </a:xfrm>
-          <a:prstGeom prst="rect">
-            <a:avLst/>
-          </a:prstGeom>
-          <a:noFill/>
-        </p:spPr>
-        <p:txBody>
-          <a:bodyPr wrap="square" rtlCol="0">
-            <a:spAutoFit/>
-          </a:bodyPr>
-          <a:lstStyle/>
-          <a:p>
-            <a:r>
-              <a:rPr lang="es-CO" dirty="0"/>
-              <a:t>RF02 — Listado paginado por entidad</a:t>
-            </a:r>
-          </a:p>
-        </p:txBody>
-      </p:sp>
-      <p:sp>
-        <p:nvSpPr>
-          <p:cNvPr id="7" name="CuadroTexto 6">
-            <a:extLst>
-              <a:ext uri="{FF2B5EF4-FFF2-40B4-BE49-F238E27FC236}">
-                <a16:creationId xmlns:a16="http://schemas.microsoft.com/office/drawing/2014/main" id="{6F78845E-0585-9A29-2CE4-30FBFBA9CE93}"/>
-              </a:ext>
-            </a:extLst>
-          </p:cNvPr>
-          <p:cNvSpPr txBox="1"/>
-          <p:nvPr/>
-        </p:nvSpPr>
-        <p:spPr>
-          <a:xfrm>
-            <a:off x="8798560" y="4206458"/>
-            <a:ext cx="2377440" cy="646331"/>
-          </a:xfrm>
-          <a:prstGeom prst="rect">
-            <a:avLst/>
-          </a:prstGeom>
-          <a:noFill/>
-        </p:spPr>
-        <p:txBody>
-          <a:bodyPr wrap="square" rtlCol="0">
-            <a:spAutoFit/>
-          </a:bodyPr>
-          <a:lstStyle/>
-          <a:p>
-            <a:r>
-              <a:rPr lang="es-MX" dirty="0"/>
-              <a:t>RF04 — Creación de registros (Alta)</a:t>
-            </a:r>
-            <a:endParaRPr lang="es-CO" dirty="0"/>
-          </a:p>
-        </p:txBody>
-      </p:sp>
-      <p:sp>
-        <p:nvSpPr>
-          <p:cNvPr id="8" name="CuadroTexto 7">
-            <a:extLst>
-              <a:ext uri="{FF2B5EF4-FFF2-40B4-BE49-F238E27FC236}">
-                <a16:creationId xmlns:a16="http://schemas.microsoft.com/office/drawing/2014/main" id="{0183752F-D46D-FB6F-A5D9-1DA5F2A1875C}"/>
-              </a:ext>
-            </a:extLst>
-          </p:cNvPr>
-          <p:cNvSpPr txBox="1"/>
-          <p:nvPr/>
-        </p:nvSpPr>
-        <p:spPr>
-          <a:xfrm>
-            <a:off x="8798560" y="5249079"/>
-            <a:ext cx="2377440" cy="646331"/>
-          </a:xfrm>
-          <a:prstGeom prst="rect">
-            <a:avLst/>
-          </a:prstGeom>
-          <a:noFill/>
-        </p:spPr>
-        <p:txBody>
-          <a:bodyPr wrap="square" rtlCol="0">
-            <a:spAutoFit/>
-          </a:bodyPr>
-          <a:lstStyle/>
-          <a:p>
-            <a:r>
-              <a:rPr lang="es-MX" dirty="0"/>
-              <a:t>RF06 — Eliminación de registros (Baja)</a:t>
-            </a:r>
-            <a:endParaRPr lang="es-CO" dirty="0"/>
-          </a:p>
-        </p:txBody>
-      </p:sp>
-      <p:sp>
-        <p:nvSpPr>
-          <p:cNvPr id="9" name="CuadroTexto 8">
-            <a:extLst>
-              <a:ext uri="{FF2B5EF4-FFF2-40B4-BE49-F238E27FC236}">
-                <a16:creationId xmlns:a16="http://schemas.microsoft.com/office/drawing/2014/main" id="{DE8E4BD2-637F-1987-1991-6EF769F833A9}"/>
-              </a:ext>
-            </a:extLst>
-          </p:cNvPr>
-          <p:cNvSpPr txBox="1"/>
-          <p:nvPr/>
-        </p:nvSpPr>
-        <p:spPr>
-          <a:xfrm>
-            <a:off x="924560" y="1436469"/>
-            <a:ext cx="6847840" cy="369332"/>
-          </a:xfrm>
-          <a:prstGeom prst="rect">
-            <a:avLst/>
-          </a:prstGeom>
-          <a:noFill/>
-        </p:spPr>
-        <p:txBody>
-          <a:bodyPr wrap="square" rtlCol="0">
-            <a:spAutoFit/>
-          </a:bodyPr>
-          <a:lstStyle/>
-          <a:p>
-            <a:r>
-              <a:rPr lang="es-CO" dirty="0"/>
-              <a:t>El historial</a:t>
-            </a:r>
-          </a:p>
-        </p:txBody>
-      </p:sp>
-      <p:sp>
-        <p:nvSpPr>
-          <p:cNvPr id="10" name="CuadroTexto 9">
-            <a:extLst>
-              <a:ext uri="{FF2B5EF4-FFF2-40B4-BE49-F238E27FC236}">
-                <a16:creationId xmlns:a16="http://schemas.microsoft.com/office/drawing/2014/main" id="{1FD649FF-4C6A-5F0B-9813-8AABE1EE4B14}"/>
-              </a:ext>
-            </a:extLst>
-          </p:cNvPr>
-          <p:cNvSpPr txBox="1"/>
-          <p:nvPr/>
-        </p:nvSpPr>
-        <p:spPr>
-          <a:xfrm>
-            <a:off x="8625840" y="1367522"/>
-            <a:ext cx="2377440" cy="369332"/>
-          </a:xfrm>
-          <a:prstGeom prst="rect">
-            <a:avLst/>
-          </a:prstGeom>
-          <a:noFill/>
-        </p:spPr>
-        <p:txBody>
-          <a:bodyPr wrap="square" rtlCol="0">
-            <a:spAutoFit/>
-          </a:bodyPr>
-          <a:lstStyle/>
-          <a:p>
-            <a:r>
-              <a:rPr lang="es-CO" dirty="0"/>
-              <a:t>Requerimientos</a:t>
-            </a:r>
-          </a:p>
-        </p:txBody>
-      </p:sp>
-      <p:sp>
-        <p:nvSpPr>
-          <p:cNvPr id="11" name="CuadroTexto 10">
-            <a:extLst>
-              <a:ext uri="{FF2B5EF4-FFF2-40B4-BE49-F238E27FC236}">
-                <a16:creationId xmlns:a16="http://schemas.microsoft.com/office/drawing/2014/main" id="{2A1F26B5-5741-0C28-0295-BA44E8278CBB}"/>
-              </a:ext>
-            </a:extLst>
-          </p:cNvPr>
-          <p:cNvSpPr txBox="1"/>
-          <p:nvPr/>
-        </p:nvSpPr>
-        <p:spPr>
-          <a:xfrm>
-            <a:off x="3840480" y="6123543"/>
-            <a:ext cx="5100320" cy="369332"/>
-          </a:xfrm>
-          <a:prstGeom prst="rect">
-            <a:avLst/>
-          </a:prstGeom>
-          <a:noFill/>
-        </p:spPr>
-        <p:txBody>
-          <a:bodyPr wrap="square" rtlCol="0">
-            <a:spAutoFit/>
-          </a:bodyPr>
-          <a:lstStyle/>
-          <a:p>
-            <a:r>
-              <a:rPr lang="es-CO" dirty="0"/>
-              <a:t>¿Cómo se sabe qué </a:t>
-            </a:r>
-            <a:r>
-              <a:rPr lang="es-CO" dirty="0" err="1"/>
-              <a:t>commit</a:t>
-            </a:r>
-            <a:r>
-              <a:rPr lang="es-CO" dirty="0"/>
-              <a:t> arregla qué cosa?</a:t>
+              <a:t>Nestor Arias - Instructor</a:t>
             </a:r>
           </a:p>
         </p:txBody>
@@ -5650,7 +7632,7 @@
     </p:spTree>
     <p:extLst>
       <p:ext uri="{BB962C8B-B14F-4D97-AF65-F5344CB8AC3E}">
-        <p14:creationId xmlns:p14="http://schemas.microsoft.com/office/powerpoint/2010/main" val="2813860680"/>
+        <p14:creationId xmlns:p14="http://schemas.microsoft.com/office/powerpoint/2010/main" val="2194299801"/>
       </p:ext>
     </p:extLst>
   </p:cSld>
@@ -5682,6 +7664,939 @@
           <p:cNvPr id="2" name="Título 1">
             <a:extLst>
               <a:ext uri="{FF2B5EF4-FFF2-40B4-BE49-F238E27FC236}">
+                <a16:creationId xmlns:a16="http://schemas.microsoft.com/office/drawing/2014/main" id="{DB035C69-AAB5-6439-D2AD-7217E6A88089}"/>
+              </a:ext>
+            </a:extLst>
+          </p:cNvPr>
+          <p:cNvSpPr>
+            <a:spLocks noGrp="1"/>
+          </p:cNvSpPr>
+          <p:nvPr>
+            <p:ph type="title"/>
+          </p:nvPr>
+        </p:nvSpPr>
+        <p:spPr/>
+        <p:txBody>
+          <a:bodyPr/>
+          <a:lstStyle/>
+          <a:p>
+            <a:r>
+              <a:rPr lang="es-CO" dirty="0"/>
+              <a:t>Nombres de </a:t>
+            </a:r>
+            <a:r>
+              <a:rPr lang="es-CO" dirty="0" err="1"/>
+              <a:t>Commits</a:t>
+            </a:r>
+            <a:endParaRPr lang="es-CO" dirty="0"/>
+          </a:p>
+        </p:txBody>
+      </p:sp>
+      <p:sp>
+        <p:nvSpPr>
+          <p:cNvPr id="4" name="CuadroTexto 3">
+            <a:extLst>
+              <a:ext uri="{FF2B5EF4-FFF2-40B4-BE49-F238E27FC236}">
+                <a16:creationId xmlns:a16="http://schemas.microsoft.com/office/drawing/2014/main" id="{CD92AD0F-BB68-6DB3-C58F-33029FB8BE43}"/>
+              </a:ext>
+            </a:extLst>
+          </p:cNvPr>
+          <p:cNvSpPr txBox="1"/>
+          <p:nvPr/>
+        </p:nvSpPr>
+        <p:spPr>
+          <a:xfrm>
+            <a:off x="924560" y="2248257"/>
+            <a:ext cx="6324600" cy="3323987"/>
+          </a:xfrm>
+          <a:prstGeom prst="rect">
+            <a:avLst/>
+          </a:prstGeom>
+          <a:solidFill>
+            <a:schemeClr val="bg1">
+              <a:lumMod val="85000"/>
+            </a:schemeClr>
+          </a:solidFill>
+        </p:spPr>
+        <p:txBody>
+          <a:bodyPr wrap="square" rtlCol="0">
+            <a:spAutoFit/>
+          </a:bodyPr>
+          <a:lstStyle/>
+          <a:p>
+            <a:r>
+              <a:rPr lang="es-CO" sz="1400" dirty="0">
+                <a:solidFill>
+                  <a:srgbClr val="002060"/>
+                </a:solidFill>
+              </a:rPr>
+              <a:t>DELETE índice innecesario en serialb1e7c53 </a:t>
+            </a:r>
+            <a:br>
+              <a:rPr lang="es-CO" sz="1400" dirty="0">
+                <a:solidFill>
+                  <a:srgbClr val="002060"/>
+                </a:solidFill>
+              </a:rPr>
+            </a:br>
+            <a:r>
+              <a:rPr lang="es-CO" sz="1400" dirty="0">
+                <a:solidFill>
+                  <a:srgbClr val="002060"/>
+                </a:solidFill>
+              </a:rPr>
+              <a:t>DELETE bloque de </a:t>
+            </a:r>
+            <a:br>
+              <a:rPr lang="es-CO" sz="1400" dirty="0">
+                <a:solidFill>
+                  <a:srgbClr val="002060"/>
+                </a:solidFill>
+              </a:rPr>
+            </a:br>
+            <a:r>
+              <a:rPr lang="es-CO" sz="1400" dirty="0">
+                <a:solidFill>
+                  <a:srgbClr val="002060"/>
+                </a:solidFill>
+              </a:rPr>
+              <a:t>INSERT manual4a9f0e8 </a:t>
+            </a:r>
+            <a:br>
+              <a:rPr lang="es-CO" sz="1400" dirty="0">
+                <a:solidFill>
+                  <a:srgbClr val="002060"/>
+                </a:solidFill>
+              </a:rPr>
+            </a:br>
+            <a:r>
+              <a:rPr lang="es-CO" sz="1400" dirty="0">
+                <a:solidFill>
+                  <a:srgbClr val="002060"/>
+                </a:solidFill>
+              </a:rPr>
+              <a:t>DELETE campos redundantes en usuario_rolf0a2d96 </a:t>
+            </a:r>
+            <a:br>
+              <a:rPr lang="es-CO" sz="1400" dirty="0">
+                <a:solidFill>
+                  <a:srgbClr val="002060"/>
+                </a:solidFill>
+              </a:rPr>
+            </a:br>
+            <a:r>
+              <a:rPr lang="es-CO" sz="1400" dirty="0">
+                <a:solidFill>
+                  <a:srgbClr val="002060"/>
+                </a:solidFill>
+              </a:rPr>
+              <a:t>UPDATE seriales </a:t>
+            </a:r>
+            <a:br>
+              <a:rPr lang="es-CO" sz="1400" dirty="0">
+                <a:solidFill>
+                  <a:srgbClr val="002060"/>
+                </a:solidFill>
+              </a:rPr>
+            </a:br>
+            <a:r>
+              <a:rPr lang="es-CO" sz="1400" dirty="0">
+                <a:solidFill>
+                  <a:srgbClr val="002060"/>
+                </a:solidFill>
+              </a:rPr>
+              <a:t>RM a prefijo único9e0a6c8 </a:t>
+            </a:r>
+            <a:br>
+              <a:rPr lang="es-CO" sz="1400" dirty="0">
+                <a:solidFill>
+                  <a:srgbClr val="002060"/>
+                </a:solidFill>
+              </a:rPr>
+            </a:br>
+            <a:r>
+              <a:rPr lang="es-CO" sz="1400" dirty="0">
+                <a:solidFill>
+                  <a:srgbClr val="002060"/>
+                </a:solidFill>
+              </a:rPr>
+              <a:t>ADD </a:t>
+            </a:r>
+            <a:r>
+              <a:rPr lang="es-CO" sz="1400" dirty="0" err="1">
+                <a:solidFill>
+                  <a:srgbClr val="002060"/>
+                </a:solidFill>
+              </a:rPr>
+              <a:t>InsertPaquetes.sql</a:t>
+            </a:r>
+            <a:r>
+              <a:rPr lang="es-CO" sz="1400" dirty="0">
+                <a:solidFill>
+                  <a:srgbClr val="002060"/>
+                </a:solidFill>
+              </a:rPr>
+              <a:t> con cajas gaylorb3d7f1e </a:t>
+            </a:r>
+            <a:br>
+              <a:rPr lang="es-CO" sz="1400" dirty="0">
+                <a:solidFill>
+                  <a:srgbClr val="002060"/>
+                </a:solidFill>
+              </a:rPr>
+            </a:br>
+            <a:r>
+              <a:rPr lang="es-CO" sz="1400" dirty="0">
+                <a:solidFill>
+                  <a:srgbClr val="002060"/>
+                </a:solidFill>
+              </a:rPr>
+              <a:t>INSERT 800 clientes del mundoa5c9e2d </a:t>
+            </a:r>
+          </a:p>
+          <a:p>
+            <a:r>
+              <a:rPr lang="es-CO" sz="1400" dirty="0">
+                <a:solidFill>
+                  <a:srgbClr val="002060"/>
+                </a:solidFill>
+              </a:rPr>
+              <a:t>UPDATE precio con IVA incluido6e5b1c8 </a:t>
+            </a:r>
+          </a:p>
+          <a:p>
+            <a:r>
+              <a:rPr lang="es-CO" sz="1400" dirty="0">
+                <a:solidFill>
+                  <a:srgbClr val="002060"/>
+                </a:solidFill>
+              </a:rPr>
+              <a:t>ADD script CreateDB.sqld9f2e4b </a:t>
+            </a:r>
+          </a:p>
+          <a:p>
+            <a:r>
+              <a:rPr lang="es-CO" sz="1400" dirty="0">
+                <a:solidFill>
+                  <a:srgbClr val="002060"/>
+                </a:solidFill>
+              </a:rPr>
+              <a:t>INSERT roles de la aplicación7a3c8d1</a:t>
+            </a:r>
+          </a:p>
+          <a:p>
+            <a:r>
+              <a:rPr lang="es-CO" sz="1400" dirty="0">
+                <a:solidFill>
+                  <a:srgbClr val="002060"/>
+                </a:solidFill>
+              </a:rPr>
+              <a:t>CREATE tabla item_venta5d1e7c9 </a:t>
+            </a:r>
+          </a:p>
+          <a:p>
+            <a:r>
+              <a:rPr lang="es-CO" sz="1400" dirty="0">
+                <a:solidFill>
+                  <a:srgbClr val="002060"/>
+                </a:solidFill>
+              </a:rPr>
+              <a:t>CREATE tabla productob6a8d4e </a:t>
+            </a:r>
+          </a:p>
+          <a:p>
+            <a:r>
+              <a:rPr lang="es-CO" sz="1400" dirty="0">
+                <a:solidFill>
+                  <a:srgbClr val="002060"/>
+                </a:solidFill>
+              </a:rPr>
+              <a:t>CREATE tabla usuario_rol3f7c2b0 </a:t>
+            </a:r>
+          </a:p>
+          <a:p>
+            <a:r>
+              <a:rPr lang="es-CO" sz="1400" dirty="0">
+                <a:solidFill>
+                  <a:srgbClr val="002060"/>
+                </a:solidFill>
+              </a:rPr>
+              <a:t>CREATE tabla paquete</a:t>
+            </a:r>
+          </a:p>
+        </p:txBody>
+      </p:sp>
+      <p:sp>
+        <p:nvSpPr>
+          <p:cNvPr id="5" name="CuadroTexto 4">
+            <a:extLst>
+              <a:ext uri="{FF2B5EF4-FFF2-40B4-BE49-F238E27FC236}">
+                <a16:creationId xmlns:a16="http://schemas.microsoft.com/office/drawing/2014/main" id="{CD45DA16-BDBB-3BEC-CEA5-D564C459CC40}"/>
+              </a:ext>
+            </a:extLst>
+          </p:cNvPr>
+          <p:cNvSpPr txBox="1"/>
+          <p:nvPr/>
+        </p:nvSpPr>
+        <p:spPr>
+          <a:xfrm>
+            <a:off x="8798560" y="2128411"/>
+            <a:ext cx="2736088" cy="646331"/>
+          </a:xfrm>
+          <a:prstGeom prst="rect">
+            <a:avLst/>
+          </a:prstGeom>
+          <a:solidFill>
+            <a:schemeClr val="accent3">
+              <a:lumMod val="40000"/>
+              <a:lumOff val="60000"/>
+            </a:schemeClr>
+          </a:solidFill>
+          <a:ln w="19050">
+            <a:solidFill>
+              <a:srgbClr val="FF0000"/>
+            </a:solidFill>
+          </a:ln>
+        </p:spPr>
+        <p:style>
+          <a:lnRef idx="2">
+            <a:schemeClr val="accent2"/>
+          </a:lnRef>
+          <a:fillRef idx="1">
+            <a:schemeClr val="lt1"/>
+          </a:fillRef>
+          <a:effectRef idx="0">
+            <a:schemeClr val="accent2"/>
+          </a:effectRef>
+          <a:fontRef idx="minor">
+            <a:schemeClr val="dk1"/>
+          </a:fontRef>
+        </p:style>
+        <p:txBody>
+          <a:bodyPr wrap="square" rtlCol="0">
+            <a:spAutoFit/>
+          </a:bodyPr>
+          <a:lstStyle/>
+          <a:p>
+            <a:r>
+              <a:rPr lang="es-CO" dirty="0"/>
+              <a:t>RF01 — Página principal (</a:t>
+            </a:r>
+            <a:r>
+              <a:rPr lang="es-CO" dirty="0" err="1"/>
+              <a:t>dashboard</a:t>
+            </a:r>
+            <a:r>
+              <a:rPr lang="es-CO" dirty="0"/>
+              <a:t>)</a:t>
+            </a:r>
+          </a:p>
+        </p:txBody>
+      </p:sp>
+      <p:sp>
+        <p:nvSpPr>
+          <p:cNvPr id="6" name="CuadroTexto 5">
+            <a:extLst>
+              <a:ext uri="{FF2B5EF4-FFF2-40B4-BE49-F238E27FC236}">
+                <a16:creationId xmlns:a16="http://schemas.microsoft.com/office/drawing/2014/main" id="{A3B17192-58C7-3C36-C6FC-72E9CDCC28C1}"/>
+              </a:ext>
+            </a:extLst>
+          </p:cNvPr>
+          <p:cNvSpPr txBox="1"/>
+          <p:nvPr/>
+        </p:nvSpPr>
+        <p:spPr>
+          <a:xfrm>
+            <a:off x="8798560" y="3163837"/>
+            <a:ext cx="2377440" cy="646331"/>
+          </a:xfrm>
+          <a:prstGeom prst="rect">
+            <a:avLst/>
+          </a:prstGeom>
+          <a:solidFill>
+            <a:schemeClr val="accent3">
+              <a:lumMod val="40000"/>
+              <a:lumOff val="60000"/>
+            </a:schemeClr>
+          </a:solidFill>
+          <a:ln w="19050">
+            <a:solidFill>
+              <a:srgbClr val="FF0000"/>
+            </a:solidFill>
+          </a:ln>
+        </p:spPr>
+        <p:style>
+          <a:lnRef idx="2">
+            <a:schemeClr val="accent2"/>
+          </a:lnRef>
+          <a:fillRef idx="1">
+            <a:schemeClr val="lt1"/>
+          </a:fillRef>
+          <a:effectRef idx="0">
+            <a:schemeClr val="accent2"/>
+          </a:effectRef>
+          <a:fontRef idx="minor">
+            <a:schemeClr val="dk1"/>
+          </a:fontRef>
+        </p:style>
+        <p:txBody>
+          <a:bodyPr wrap="square" rtlCol="0">
+            <a:spAutoFit/>
+          </a:bodyPr>
+          <a:lstStyle>
+            <a:defPPr>
+              <a:defRPr lang="en-US"/>
+            </a:defPPr>
+            <a:lvl1pPr>
+              <a:defRPr>
+                <a:solidFill>
+                  <a:schemeClr val="dk1"/>
+                </a:solidFill>
+              </a:defRPr>
+            </a:lvl1pPr>
+            <a:lvl2pPr>
+              <a:defRPr>
+                <a:solidFill>
+                  <a:schemeClr val="dk1"/>
+                </a:solidFill>
+              </a:defRPr>
+            </a:lvl2pPr>
+            <a:lvl3pPr>
+              <a:defRPr>
+                <a:solidFill>
+                  <a:schemeClr val="dk1"/>
+                </a:solidFill>
+              </a:defRPr>
+            </a:lvl3pPr>
+            <a:lvl4pPr>
+              <a:defRPr>
+                <a:solidFill>
+                  <a:schemeClr val="dk1"/>
+                </a:solidFill>
+              </a:defRPr>
+            </a:lvl4pPr>
+            <a:lvl5pPr>
+              <a:defRPr>
+                <a:solidFill>
+                  <a:schemeClr val="dk1"/>
+                </a:solidFill>
+              </a:defRPr>
+            </a:lvl5pPr>
+            <a:lvl6pPr>
+              <a:defRPr>
+                <a:solidFill>
+                  <a:schemeClr val="dk1"/>
+                </a:solidFill>
+              </a:defRPr>
+            </a:lvl6pPr>
+            <a:lvl7pPr>
+              <a:defRPr>
+                <a:solidFill>
+                  <a:schemeClr val="dk1"/>
+                </a:solidFill>
+              </a:defRPr>
+            </a:lvl7pPr>
+            <a:lvl8pPr>
+              <a:defRPr>
+                <a:solidFill>
+                  <a:schemeClr val="dk1"/>
+                </a:solidFill>
+              </a:defRPr>
+            </a:lvl8pPr>
+            <a:lvl9pPr>
+              <a:defRPr>
+                <a:solidFill>
+                  <a:schemeClr val="dk1"/>
+                </a:solidFill>
+              </a:defRPr>
+            </a:lvl9pPr>
+          </a:lstStyle>
+          <a:p>
+            <a:r>
+              <a:rPr lang="es-CO" dirty="0"/>
+              <a:t>RF02 — Listado paginado por entidad</a:t>
+            </a:r>
+          </a:p>
+        </p:txBody>
+      </p:sp>
+      <p:sp>
+        <p:nvSpPr>
+          <p:cNvPr id="7" name="CuadroTexto 6">
+            <a:extLst>
+              <a:ext uri="{FF2B5EF4-FFF2-40B4-BE49-F238E27FC236}">
+                <a16:creationId xmlns:a16="http://schemas.microsoft.com/office/drawing/2014/main" id="{6F78845E-0585-9A29-2CE4-30FBFBA9CE93}"/>
+              </a:ext>
+            </a:extLst>
+          </p:cNvPr>
+          <p:cNvSpPr txBox="1"/>
+          <p:nvPr/>
+        </p:nvSpPr>
+        <p:spPr>
+          <a:xfrm>
+            <a:off x="8798560" y="4206458"/>
+            <a:ext cx="2377440" cy="646331"/>
+          </a:xfrm>
+          <a:prstGeom prst="rect">
+            <a:avLst/>
+          </a:prstGeom>
+          <a:solidFill>
+            <a:schemeClr val="accent3">
+              <a:lumMod val="40000"/>
+              <a:lumOff val="60000"/>
+            </a:schemeClr>
+          </a:solidFill>
+          <a:ln w="19050">
+            <a:solidFill>
+              <a:srgbClr val="FF0000"/>
+            </a:solidFill>
+          </a:ln>
+        </p:spPr>
+        <p:style>
+          <a:lnRef idx="2">
+            <a:schemeClr val="accent2"/>
+          </a:lnRef>
+          <a:fillRef idx="1">
+            <a:schemeClr val="lt1"/>
+          </a:fillRef>
+          <a:effectRef idx="0">
+            <a:schemeClr val="accent2"/>
+          </a:effectRef>
+          <a:fontRef idx="minor">
+            <a:schemeClr val="dk1"/>
+          </a:fontRef>
+        </p:style>
+        <p:txBody>
+          <a:bodyPr wrap="square" rtlCol="0">
+            <a:spAutoFit/>
+          </a:bodyPr>
+          <a:lstStyle>
+            <a:defPPr>
+              <a:defRPr lang="en-US"/>
+            </a:defPPr>
+            <a:lvl1pPr>
+              <a:defRPr>
+                <a:solidFill>
+                  <a:schemeClr val="dk1"/>
+                </a:solidFill>
+              </a:defRPr>
+            </a:lvl1pPr>
+            <a:lvl2pPr>
+              <a:defRPr>
+                <a:solidFill>
+                  <a:schemeClr val="dk1"/>
+                </a:solidFill>
+              </a:defRPr>
+            </a:lvl2pPr>
+            <a:lvl3pPr>
+              <a:defRPr>
+                <a:solidFill>
+                  <a:schemeClr val="dk1"/>
+                </a:solidFill>
+              </a:defRPr>
+            </a:lvl3pPr>
+            <a:lvl4pPr>
+              <a:defRPr>
+                <a:solidFill>
+                  <a:schemeClr val="dk1"/>
+                </a:solidFill>
+              </a:defRPr>
+            </a:lvl4pPr>
+            <a:lvl5pPr>
+              <a:defRPr>
+                <a:solidFill>
+                  <a:schemeClr val="dk1"/>
+                </a:solidFill>
+              </a:defRPr>
+            </a:lvl5pPr>
+            <a:lvl6pPr>
+              <a:defRPr>
+                <a:solidFill>
+                  <a:schemeClr val="dk1"/>
+                </a:solidFill>
+              </a:defRPr>
+            </a:lvl6pPr>
+            <a:lvl7pPr>
+              <a:defRPr>
+                <a:solidFill>
+                  <a:schemeClr val="dk1"/>
+                </a:solidFill>
+              </a:defRPr>
+            </a:lvl7pPr>
+            <a:lvl8pPr>
+              <a:defRPr>
+                <a:solidFill>
+                  <a:schemeClr val="dk1"/>
+                </a:solidFill>
+              </a:defRPr>
+            </a:lvl8pPr>
+            <a:lvl9pPr>
+              <a:defRPr>
+                <a:solidFill>
+                  <a:schemeClr val="dk1"/>
+                </a:solidFill>
+              </a:defRPr>
+            </a:lvl9pPr>
+          </a:lstStyle>
+          <a:p>
+            <a:r>
+              <a:rPr lang="es-MX"/>
+              <a:t>RF04</a:t>
+            </a:r>
+            <a:r>
+              <a:rPr lang="es-MX" dirty="0"/>
+              <a:t> — Creación de registros (Alta)</a:t>
+            </a:r>
+            <a:endParaRPr lang="es-CO" dirty="0"/>
+          </a:p>
+        </p:txBody>
+      </p:sp>
+      <p:sp>
+        <p:nvSpPr>
+          <p:cNvPr id="8" name="CuadroTexto 7">
+            <a:extLst>
+              <a:ext uri="{FF2B5EF4-FFF2-40B4-BE49-F238E27FC236}">
+                <a16:creationId xmlns:a16="http://schemas.microsoft.com/office/drawing/2014/main" id="{0183752F-D46D-FB6F-A5D9-1DA5F2A1875C}"/>
+              </a:ext>
+            </a:extLst>
+          </p:cNvPr>
+          <p:cNvSpPr txBox="1"/>
+          <p:nvPr/>
+        </p:nvSpPr>
+        <p:spPr>
+          <a:xfrm>
+            <a:off x="8798560" y="5112691"/>
+            <a:ext cx="2377440" cy="646331"/>
+          </a:xfrm>
+          <a:prstGeom prst="rect">
+            <a:avLst/>
+          </a:prstGeom>
+          <a:solidFill>
+            <a:schemeClr val="accent3">
+              <a:lumMod val="40000"/>
+              <a:lumOff val="60000"/>
+            </a:schemeClr>
+          </a:solidFill>
+          <a:ln w="19050">
+            <a:solidFill>
+              <a:srgbClr val="FF0000"/>
+            </a:solidFill>
+          </a:ln>
+        </p:spPr>
+        <p:style>
+          <a:lnRef idx="2">
+            <a:schemeClr val="accent2"/>
+          </a:lnRef>
+          <a:fillRef idx="1">
+            <a:schemeClr val="lt1"/>
+          </a:fillRef>
+          <a:effectRef idx="0">
+            <a:schemeClr val="accent2"/>
+          </a:effectRef>
+          <a:fontRef idx="minor">
+            <a:schemeClr val="dk1"/>
+          </a:fontRef>
+        </p:style>
+        <p:txBody>
+          <a:bodyPr wrap="square" rtlCol="0">
+            <a:spAutoFit/>
+          </a:bodyPr>
+          <a:lstStyle>
+            <a:defPPr>
+              <a:defRPr lang="en-US"/>
+            </a:defPPr>
+            <a:lvl1pPr>
+              <a:defRPr>
+                <a:solidFill>
+                  <a:schemeClr val="dk1"/>
+                </a:solidFill>
+              </a:defRPr>
+            </a:lvl1pPr>
+            <a:lvl2pPr>
+              <a:defRPr>
+                <a:solidFill>
+                  <a:schemeClr val="dk1"/>
+                </a:solidFill>
+              </a:defRPr>
+            </a:lvl2pPr>
+            <a:lvl3pPr>
+              <a:defRPr>
+                <a:solidFill>
+                  <a:schemeClr val="dk1"/>
+                </a:solidFill>
+              </a:defRPr>
+            </a:lvl3pPr>
+            <a:lvl4pPr>
+              <a:defRPr>
+                <a:solidFill>
+                  <a:schemeClr val="dk1"/>
+                </a:solidFill>
+              </a:defRPr>
+            </a:lvl4pPr>
+            <a:lvl5pPr>
+              <a:defRPr>
+                <a:solidFill>
+                  <a:schemeClr val="dk1"/>
+                </a:solidFill>
+              </a:defRPr>
+            </a:lvl5pPr>
+            <a:lvl6pPr>
+              <a:defRPr>
+                <a:solidFill>
+                  <a:schemeClr val="dk1"/>
+                </a:solidFill>
+              </a:defRPr>
+            </a:lvl6pPr>
+            <a:lvl7pPr>
+              <a:defRPr>
+                <a:solidFill>
+                  <a:schemeClr val="dk1"/>
+                </a:solidFill>
+              </a:defRPr>
+            </a:lvl7pPr>
+            <a:lvl8pPr>
+              <a:defRPr>
+                <a:solidFill>
+                  <a:schemeClr val="dk1"/>
+                </a:solidFill>
+              </a:defRPr>
+            </a:lvl8pPr>
+            <a:lvl9pPr>
+              <a:defRPr>
+                <a:solidFill>
+                  <a:schemeClr val="dk1"/>
+                </a:solidFill>
+              </a:defRPr>
+            </a:lvl9pPr>
+          </a:lstStyle>
+          <a:p>
+            <a:r>
+              <a:rPr lang="es-MX" dirty="0"/>
+              <a:t>RF06 — Eliminación de registros (Baja)</a:t>
+            </a:r>
+            <a:endParaRPr lang="es-CO" dirty="0"/>
+          </a:p>
+        </p:txBody>
+      </p:sp>
+      <p:sp>
+        <p:nvSpPr>
+          <p:cNvPr id="9" name="CuadroTexto 8">
+            <a:extLst>
+              <a:ext uri="{FF2B5EF4-FFF2-40B4-BE49-F238E27FC236}">
+                <a16:creationId xmlns:a16="http://schemas.microsoft.com/office/drawing/2014/main" id="{DE8E4BD2-637F-1987-1991-6EF769F833A9}"/>
+              </a:ext>
+            </a:extLst>
+          </p:cNvPr>
+          <p:cNvSpPr txBox="1"/>
+          <p:nvPr/>
+        </p:nvSpPr>
+        <p:spPr>
+          <a:xfrm>
+            <a:off x="924560" y="1787942"/>
+            <a:ext cx="6847840" cy="369332"/>
+          </a:xfrm>
+          <a:prstGeom prst="rect">
+            <a:avLst/>
+          </a:prstGeom>
+          <a:noFill/>
+        </p:spPr>
+        <p:txBody>
+          <a:bodyPr wrap="square" rtlCol="0">
+            <a:spAutoFit/>
+          </a:bodyPr>
+          <a:lstStyle/>
+          <a:p>
+            <a:r>
+              <a:rPr lang="es-CO" dirty="0"/>
+              <a:t>El historial</a:t>
+            </a:r>
+          </a:p>
+        </p:txBody>
+      </p:sp>
+      <p:sp>
+        <p:nvSpPr>
+          <p:cNvPr id="10" name="CuadroTexto 9">
+            <a:extLst>
+              <a:ext uri="{FF2B5EF4-FFF2-40B4-BE49-F238E27FC236}">
+                <a16:creationId xmlns:a16="http://schemas.microsoft.com/office/drawing/2014/main" id="{1FD649FF-4C6A-5F0B-9813-8AABE1EE4B14}"/>
+              </a:ext>
+            </a:extLst>
+          </p:cNvPr>
+          <p:cNvSpPr txBox="1"/>
+          <p:nvPr/>
+        </p:nvSpPr>
+        <p:spPr>
+          <a:xfrm>
+            <a:off x="8625840" y="1367522"/>
+            <a:ext cx="2377440" cy="369332"/>
+          </a:xfrm>
+          <a:prstGeom prst="rect">
+            <a:avLst/>
+          </a:prstGeom>
+          <a:noFill/>
+        </p:spPr>
+        <p:txBody>
+          <a:bodyPr wrap="square" rtlCol="0">
+            <a:spAutoFit/>
+          </a:bodyPr>
+          <a:lstStyle/>
+          <a:p>
+            <a:r>
+              <a:rPr lang="es-CO" dirty="0"/>
+              <a:t>Requerimientos</a:t>
+            </a:r>
+          </a:p>
+        </p:txBody>
+      </p:sp>
+      <p:sp>
+        <p:nvSpPr>
+          <p:cNvPr id="11" name="CuadroTexto 10">
+            <a:extLst>
+              <a:ext uri="{FF2B5EF4-FFF2-40B4-BE49-F238E27FC236}">
+                <a16:creationId xmlns:a16="http://schemas.microsoft.com/office/drawing/2014/main" id="{2A1F26B5-5741-0C28-0295-BA44E8278CBB}"/>
+              </a:ext>
+            </a:extLst>
+          </p:cNvPr>
+          <p:cNvSpPr txBox="1"/>
+          <p:nvPr/>
+        </p:nvSpPr>
+        <p:spPr>
+          <a:xfrm>
+            <a:off x="3840480" y="6123543"/>
+            <a:ext cx="5100320" cy="369332"/>
+          </a:xfrm>
+          <a:prstGeom prst="rect">
+            <a:avLst/>
+          </a:prstGeom>
+          <a:noFill/>
+        </p:spPr>
+        <p:txBody>
+          <a:bodyPr wrap="square" rtlCol="0">
+            <a:spAutoFit/>
+          </a:bodyPr>
+          <a:lstStyle/>
+          <a:p>
+            <a:r>
+              <a:rPr lang="es-CO" dirty="0"/>
+              <a:t>¿Cómo se sabe qué </a:t>
+            </a:r>
+            <a:r>
+              <a:rPr lang="es-CO" dirty="0" err="1"/>
+              <a:t>commit</a:t>
+            </a:r>
+            <a:r>
+              <a:rPr lang="es-CO" dirty="0"/>
+              <a:t> arregla qué cosa?</a:t>
+            </a:r>
+          </a:p>
+        </p:txBody>
+      </p:sp>
+      <p:pic>
+        <p:nvPicPr>
+          <p:cNvPr id="13" name="Imagen 12" descr="My Sena: Logotipo del sena">
+            <a:extLst>
+              <a:ext uri="{FF2B5EF4-FFF2-40B4-BE49-F238E27FC236}">
+                <a16:creationId xmlns:a16="http://schemas.microsoft.com/office/drawing/2014/main" id="{BB54A06A-1EE3-0EE8-E98D-F769C0BF6BD5}"/>
+              </a:ext>
+            </a:extLst>
+          </p:cNvPr>
+          <p:cNvPicPr>
+            <a:picLocks noChangeAspect="1"/>
+          </p:cNvPicPr>
+          <p:nvPr/>
+        </p:nvPicPr>
+        <p:blipFill>
+          <a:blip r:embed="rId2"/>
+          <a:stretch>
+            <a:fillRect/>
+          </a:stretch>
+        </p:blipFill>
+        <p:spPr>
+          <a:xfrm>
+            <a:off x="11054449" y="185270"/>
+            <a:ext cx="779930" cy="779930"/>
+          </a:xfrm>
+          <a:prstGeom prst="rect">
+            <a:avLst/>
+          </a:prstGeom>
+        </p:spPr>
+      </p:pic>
+      <p:sp>
+        <p:nvSpPr>
+          <p:cNvPr id="15" name="CuadroTexto 14">
+            <a:extLst>
+              <a:ext uri="{FF2B5EF4-FFF2-40B4-BE49-F238E27FC236}">
+                <a16:creationId xmlns:a16="http://schemas.microsoft.com/office/drawing/2014/main" id="{44CE165A-CDCE-644F-146E-2334D04B9CC0}"/>
+              </a:ext>
+            </a:extLst>
+          </p:cNvPr>
+          <p:cNvSpPr txBox="1"/>
+          <p:nvPr/>
+        </p:nvSpPr>
+        <p:spPr>
+          <a:xfrm>
+            <a:off x="1009650" y="6488064"/>
+            <a:ext cx="10058400" cy="369332"/>
+          </a:xfrm>
+          <a:prstGeom prst="rect">
+            <a:avLst/>
+          </a:prstGeom>
+          <a:solidFill>
+            <a:srgbClr val="92D050"/>
+          </a:solidFill>
+          <a:ln>
+            <a:solidFill>
+              <a:srgbClr val="C00000"/>
+            </a:solidFill>
+          </a:ln>
+        </p:spPr>
+        <p:txBody>
+          <a:bodyPr wrap="square" rtlCol="0">
+            <a:spAutoFit/>
+          </a:bodyPr>
+          <a:lstStyle/>
+          <a:p>
+            <a:r>
+              <a:rPr lang="es-CO" dirty="0"/>
+              <a:t>Nestor Arias - Instructor</a:t>
+            </a:r>
+          </a:p>
+        </p:txBody>
+      </p:sp>
+    </p:spTree>
+    <p:extLst>
+      <p:ext uri="{BB962C8B-B14F-4D97-AF65-F5344CB8AC3E}">
+        <p14:creationId xmlns:p14="http://schemas.microsoft.com/office/powerpoint/2010/main" val="2813860680"/>
+      </p:ext>
+    </p:extLst>
+  </p:cSld>
+  <p:clrMapOvr>
+    <a:masterClrMapping/>
+  </p:clrMapOvr>
+</p:sld>
+</file>
+
+<file path=ppt/slides/slide7.xml><?xml version="1.0" encoding="utf-8"?>
+<p:sld xmlns:a="http://schemas.openxmlformats.org/drawingml/2006/main" xmlns:r="http://schemas.openxmlformats.org/officeDocument/2006/relationships" xmlns:p="http://schemas.openxmlformats.org/presentationml/2006/main">
+  <p:cSld>
+    <p:spTree>
+      <p:nvGrpSpPr>
+        <p:cNvPr id="1" name=""/>
+        <p:cNvGrpSpPr/>
+        <p:nvPr/>
+      </p:nvGrpSpPr>
+      <p:grpSpPr>
+        <a:xfrm>
+          <a:off x="0" y="0"/>
+          <a:ext cx="0" cy="0"/>
+          <a:chOff x="0" y="0"/>
+          <a:chExt cx="0" cy="0"/>
+        </a:xfrm>
+      </p:grpSpPr>
+      <p:sp>
+        <p:nvSpPr>
+          <p:cNvPr id="2" name="Título 1">
+            <a:extLst>
+              <a:ext uri="{FF2B5EF4-FFF2-40B4-BE49-F238E27FC236}">
                 <a16:creationId xmlns:a16="http://schemas.microsoft.com/office/drawing/2014/main" id="{88F0C506-2764-D6B9-416D-637FB1E0659D}"/>
               </a:ext>
             </a:extLst>
@@ -5736,7 +8651,7 @@
         </p:blipFill>
         <p:spPr>
           <a:xfrm>
-            <a:off x="3127575" y="1690688"/>
+            <a:off x="3452695" y="2093976"/>
             <a:ext cx="3616125" cy="3792682"/>
           </a:xfrm>
           <a:prstGeom prst="rect">
@@ -5744,6 +8659,78 @@
           </a:prstGeom>
         </p:spPr>
       </p:pic>
+      <p:pic>
+        <p:nvPicPr>
+          <p:cNvPr id="11" name="Imagen 10" descr="My Sena: Logotipo del sena">
+            <a:extLst>
+              <a:ext uri="{FF2B5EF4-FFF2-40B4-BE49-F238E27FC236}">
+                <a16:creationId xmlns:a16="http://schemas.microsoft.com/office/drawing/2014/main" id="{89E327E6-F2B0-0D7D-97AD-1D8FA2A2736F}"/>
+              </a:ext>
+            </a:extLst>
+          </p:cNvPr>
+          <p:cNvPicPr>
+            <a:picLocks noChangeAspect="1"/>
+          </p:cNvPicPr>
+          <p:nvPr/>
+        </p:nvPicPr>
+        <p:blipFill>
+          <a:blip r:embed="rId3"/>
+          <a:stretch>
+            <a:fillRect/>
+          </a:stretch>
+        </p:blipFill>
+        <p:spPr>
+          <a:xfrm>
+            <a:off x="11054449" y="185270"/>
+            <a:ext cx="779930" cy="779930"/>
+          </a:xfrm>
+          <a:prstGeom prst="rect">
+            <a:avLst/>
+          </a:prstGeom>
+        </p:spPr>
+      </p:pic>
+      <p:sp>
+        <p:nvSpPr>
+          <p:cNvPr id="13" name="CuadroTexto 12">
+            <a:extLst>
+              <a:ext uri="{FF2B5EF4-FFF2-40B4-BE49-F238E27FC236}">
+                <a16:creationId xmlns:a16="http://schemas.microsoft.com/office/drawing/2014/main" id="{EDC6B17C-DD31-CD5E-1A0A-3666695F2825}"/>
+              </a:ext>
+            </a:extLst>
+          </p:cNvPr>
+          <p:cNvSpPr txBox="1"/>
+          <p:nvPr/>
+        </p:nvSpPr>
+        <p:spPr>
+          <a:xfrm>
+            <a:off x="1009650" y="6488064"/>
+            <a:ext cx="10058400" cy="369332"/>
+          </a:xfrm>
+          <a:prstGeom prst="rect">
+            <a:avLst/>
+          </a:prstGeom>
+          <a:solidFill>
+            <a:srgbClr val="92D050"/>
+          </a:solidFill>
+          <a:ln>
+            <a:solidFill>
+              <a:srgbClr val="C00000"/>
+            </a:solidFill>
+          </a:ln>
+        </p:spPr>
+        <p:txBody>
+          <a:bodyPr wrap="square" rtlCol="0">
+            <a:spAutoFit/>
+          </a:bodyPr>
+          <a:lstStyle/>
+          <a:p>
+            <a:r>
+              <a:rPr lang="es-CO" dirty="0"/>
+              <a:t>Nestor Arias - Instructor</a:t>
+            </a:r>
+          </a:p>
+        </p:txBody>
+      </p:sp>
     </p:spTree>
     <p:extLst>
       <p:ext uri="{BB962C8B-B14F-4D97-AF65-F5344CB8AC3E}">
@@ -5757,7 +8744,7 @@
 </p:sld>
 </file>
 
-<file path=ppt/slides/slide7.xml><?xml version="1.0" encoding="utf-8"?>
+<file path=ppt/slides/slide8.xml><?xml version="1.0" encoding="utf-8"?>
 <p:sld xmlns:a="http://schemas.openxmlformats.org/drawingml/2006/main" xmlns:r="http://schemas.openxmlformats.org/officeDocument/2006/relationships" xmlns:p="http://schemas.openxmlformats.org/presentationml/2006/main">
   <p:cSld>
     <p:spTree>
@@ -5918,6 +8905,78 @@
           </a:p>
         </p:txBody>
       </p:sp>
+      <p:pic>
+        <p:nvPicPr>
+          <p:cNvPr id="10" name="Imagen 9" descr="My Sena: Logotipo del sena">
+            <a:extLst>
+              <a:ext uri="{FF2B5EF4-FFF2-40B4-BE49-F238E27FC236}">
+                <a16:creationId xmlns:a16="http://schemas.microsoft.com/office/drawing/2014/main" id="{362654D3-2CEF-47B0-B7D1-A9D134490899}"/>
+              </a:ext>
+            </a:extLst>
+          </p:cNvPr>
+          <p:cNvPicPr>
+            <a:picLocks noChangeAspect="1"/>
+          </p:cNvPicPr>
+          <p:nvPr/>
+        </p:nvPicPr>
+        <p:blipFill>
+          <a:blip r:embed="rId4"/>
+          <a:stretch>
+            <a:fillRect/>
+          </a:stretch>
+        </p:blipFill>
+        <p:spPr>
+          <a:xfrm>
+            <a:off x="11054449" y="185270"/>
+            <a:ext cx="779930" cy="779930"/>
+          </a:xfrm>
+          <a:prstGeom prst="rect">
+            <a:avLst/>
+          </a:prstGeom>
+        </p:spPr>
+      </p:pic>
+      <p:sp>
+        <p:nvSpPr>
+          <p:cNvPr id="12" name="CuadroTexto 11">
+            <a:extLst>
+              <a:ext uri="{FF2B5EF4-FFF2-40B4-BE49-F238E27FC236}">
+                <a16:creationId xmlns:a16="http://schemas.microsoft.com/office/drawing/2014/main" id="{E3A22376-5A14-7C03-0257-9C43D6298DBC}"/>
+              </a:ext>
+            </a:extLst>
+          </p:cNvPr>
+          <p:cNvSpPr txBox="1"/>
+          <p:nvPr/>
+        </p:nvSpPr>
+        <p:spPr>
+          <a:xfrm>
+            <a:off x="1009650" y="6488064"/>
+            <a:ext cx="10058400" cy="369332"/>
+          </a:xfrm>
+          <a:prstGeom prst="rect">
+            <a:avLst/>
+          </a:prstGeom>
+          <a:solidFill>
+            <a:srgbClr val="92D050"/>
+          </a:solidFill>
+          <a:ln>
+            <a:solidFill>
+              <a:srgbClr val="C00000"/>
+            </a:solidFill>
+          </a:ln>
+        </p:spPr>
+        <p:txBody>
+          <a:bodyPr wrap="square" rtlCol="0">
+            <a:spAutoFit/>
+          </a:bodyPr>
+          <a:lstStyle/>
+          <a:p>
+            <a:r>
+              <a:rPr lang="es-CO" dirty="0"/>
+              <a:t>Nestor Arias - Instructor</a:t>
+            </a:r>
+          </a:p>
+        </p:txBody>
+      </p:sp>
     </p:spTree>
     <p:extLst>
       <p:ext uri="{BB962C8B-B14F-4D97-AF65-F5344CB8AC3E}">
@@ -5931,7 +8990,7 @@
 </p:sld>
 </file>
 
-<file path=ppt/slides/slide8.xml><?xml version="1.0" encoding="utf-8"?>
+<file path=ppt/slides/slide9.xml><?xml version="1.0" encoding="utf-8"?>
 <p:sld xmlns:a="http://schemas.openxmlformats.org/drawingml/2006/main" xmlns:r="http://schemas.openxmlformats.org/officeDocument/2006/relationships" xmlns:p="http://schemas.openxmlformats.org/presentationml/2006/main">
   <p:cSld>
     <p:spTree>
@@ -6091,6 +9150,78 @@
           </a:p>
         </p:txBody>
       </p:sp>
+      <p:pic>
+        <p:nvPicPr>
+          <p:cNvPr id="11" name="Imagen 10" descr="My Sena: Logotipo del sena">
+            <a:extLst>
+              <a:ext uri="{FF2B5EF4-FFF2-40B4-BE49-F238E27FC236}">
+                <a16:creationId xmlns:a16="http://schemas.microsoft.com/office/drawing/2014/main" id="{248173F2-89E6-8360-89DD-B7B1A2A4C8B9}"/>
+              </a:ext>
+            </a:extLst>
+          </p:cNvPr>
+          <p:cNvPicPr>
+            <a:picLocks noChangeAspect="1"/>
+          </p:cNvPicPr>
+          <p:nvPr/>
+        </p:nvPicPr>
+        <p:blipFill>
+          <a:blip r:embed="rId4"/>
+          <a:stretch>
+            <a:fillRect/>
+          </a:stretch>
+        </p:blipFill>
+        <p:spPr>
+          <a:xfrm>
+            <a:off x="11054449" y="185270"/>
+            <a:ext cx="779930" cy="779930"/>
+          </a:xfrm>
+          <a:prstGeom prst="rect">
+            <a:avLst/>
+          </a:prstGeom>
+        </p:spPr>
+      </p:pic>
+      <p:sp>
+        <p:nvSpPr>
+          <p:cNvPr id="13" name="CuadroTexto 12">
+            <a:extLst>
+              <a:ext uri="{FF2B5EF4-FFF2-40B4-BE49-F238E27FC236}">
+                <a16:creationId xmlns:a16="http://schemas.microsoft.com/office/drawing/2014/main" id="{81E77FE9-0A58-40B5-C3E2-F4CED93C394D}"/>
+              </a:ext>
+            </a:extLst>
+          </p:cNvPr>
+          <p:cNvSpPr txBox="1"/>
+          <p:nvPr/>
+        </p:nvSpPr>
+        <p:spPr>
+          <a:xfrm>
+            <a:off x="1009650" y="6488064"/>
+            <a:ext cx="10058400" cy="369332"/>
+          </a:xfrm>
+          <a:prstGeom prst="rect">
+            <a:avLst/>
+          </a:prstGeom>
+          <a:solidFill>
+            <a:srgbClr val="92D050"/>
+          </a:solidFill>
+          <a:ln>
+            <a:solidFill>
+              <a:srgbClr val="C00000"/>
+            </a:solidFill>
+          </a:ln>
+        </p:spPr>
+        <p:txBody>
+          <a:bodyPr wrap="square" rtlCol="0">
+            <a:spAutoFit/>
+          </a:bodyPr>
+          <a:lstStyle/>
+          <a:p>
+            <a:r>
+              <a:rPr lang="es-CO" dirty="0"/>
+              <a:t>Nestor Arias - Instructor</a:t>
+            </a:r>
+          </a:p>
+        </p:txBody>
+      </p:sp>
     </p:spTree>
     <p:extLst>
       <p:ext uri="{BB962C8B-B14F-4D97-AF65-F5344CB8AC3E}">
@@ -6104,574 +9235,10 @@
 </p:sld>
 </file>
 
-<file path=ppt/slides/slide9.xml><?xml version="1.0" encoding="utf-8"?>
-<p:sld xmlns:a="http://schemas.openxmlformats.org/drawingml/2006/main" xmlns:r="http://schemas.openxmlformats.org/officeDocument/2006/relationships" xmlns:p="http://schemas.openxmlformats.org/presentationml/2006/main">
-  <p:cSld>
-    <p:spTree>
-      <p:nvGrpSpPr>
-        <p:cNvPr id="1" name=""/>
-        <p:cNvGrpSpPr/>
-        <p:nvPr/>
-      </p:nvGrpSpPr>
-      <p:grpSpPr>
-        <a:xfrm>
-          <a:off x="0" y="0"/>
-          <a:ext cx="0" cy="0"/>
-          <a:chOff x="0" y="0"/>
-          <a:chExt cx="0" cy="0"/>
-        </a:xfrm>
-      </p:grpSpPr>
-      <p:sp>
-        <p:nvSpPr>
-          <p:cNvPr id="2" name="Título 1">
-            <a:extLst>
-              <a:ext uri="{FF2B5EF4-FFF2-40B4-BE49-F238E27FC236}">
-                <a16:creationId xmlns:a16="http://schemas.microsoft.com/office/drawing/2014/main" id="{8860EE9C-C2CD-CE6C-9FA8-6F5ACF7DB4A1}"/>
-              </a:ext>
-            </a:extLst>
-          </p:cNvPr>
-          <p:cNvSpPr>
-            <a:spLocks noGrp="1"/>
-          </p:cNvSpPr>
-          <p:nvPr>
-            <p:ph type="title"/>
-          </p:nvPr>
-        </p:nvSpPr>
-        <p:spPr/>
-        <p:txBody>
-          <a:bodyPr/>
-          <a:lstStyle/>
-          <a:p>
-            <a:r>
-              <a:rPr lang="es-CO" dirty="0"/>
-              <a:t>Nombres de </a:t>
-            </a:r>
-            <a:r>
-              <a:rPr lang="es-CO" dirty="0" err="1"/>
-              <a:t>Commits</a:t>
-            </a:r>
-            <a:r>
-              <a:rPr lang="es-CO" dirty="0"/>
-              <a:t>&gt;Nombres sugeridos</a:t>
-            </a:r>
-          </a:p>
-        </p:txBody>
-      </p:sp>
-      <p:graphicFrame>
-        <p:nvGraphicFramePr>
-          <p:cNvPr id="4" name="Marcador de contenido 3">
-            <a:extLst>
-              <a:ext uri="{FF2B5EF4-FFF2-40B4-BE49-F238E27FC236}">
-                <a16:creationId xmlns:a16="http://schemas.microsoft.com/office/drawing/2014/main" id="{BEDD294B-CF29-75C8-BD41-8B95F0442403}"/>
-              </a:ext>
-            </a:extLst>
-          </p:cNvPr>
-          <p:cNvGraphicFramePr>
-            <a:graphicFrameLocks noGrp="1"/>
-          </p:cNvGraphicFramePr>
-          <p:nvPr>
-            <p:ph idx="1"/>
-            <p:extLst>
-              <p:ext uri="{D42A27DB-BD31-4B8C-83A1-F6EECF244321}">
-                <p14:modId xmlns:p14="http://schemas.microsoft.com/office/powerpoint/2010/main" val="609982273"/>
-              </p:ext>
-            </p:extLst>
-          </p:nvPr>
-        </p:nvGraphicFramePr>
-        <p:xfrm>
-          <a:off x="838200" y="1825625"/>
-          <a:ext cx="10515600" cy="3479800"/>
-        </p:xfrm>
-        <a:graphic>
-          <a:graphicData uri="http://schemas.openxmlformats.org/drawingml/2006/table">
-            <a:tbl>
-              <a:tblPr firstRow="1" bandRow="1">
-                <a:tableStyleId>{5C22544A-7EE6-4342-B048-85BDC9FD1C3A}</a:tableStyleId>
-              </a:tblPr>
-              <a:tblGrid>
-                <a:gridCol w="2628900">
-                  <a:extLst>
-                    <a:ext uri="{9D8B030D-6E8A-4147-A177-3AD203B41FA5}">
-                      <a16:colId xmlns:a16="http://schemas.microsoft.com/office/drawing/2014/main" val="1730618614"/>
-                    </a:ext>
-                  </a:extLst>
-                </a:gridCol>
-                <a:gridCol w="1084580">
-                  <a:extLst>
-                    <a:ext uri="{9D8B030D-6E8A-4147-A177-3AD203B41FA5}">
-                      <a16:colId xmlns:a16="http://schemas.microsoft.com/office/drawing/2014/main" val="2970207448"/>
-                    </a:ext>
-                  </a:extLst>
-                </a:gridCol>
-                <a:gridCol w="3210560">
-                  <a:extLst>
-                    <a:ext uri="{9D8B030D-6E8A-4147-A177-3AD203B41FA5}">
-                      <a16:colId xmlns:a16="http://schemas.microsoft.com/office/drawing/2014/main" val="3394549187"/>
-                    </a:ext>
-                  </a:extLst>
-                </a:gridCol>
-                <a:gridCol w="3591560">
-                  <a:extLst>
-                    <a:ext uri="{9D8B030D-6E8A-4147-A177-3AD203B41FA5}">
-                      <a16:colId xmlns:a16="http://schemas.microsoft.com/office/drawing/2014/main" val="936640203"/>
-                    </a:ext>
-                  </a:extLst>
-                </a:gridCol>
-              </a:tblGrid>
-              <a:tr h="370840">
-                <a:tc>
-                  <a:txBody>
-                    <a:bodyPr/>
-                    <a:lstStyle/>
-                    <a:p>
-                      <a:r>
-                        <a:rPr lang="es-CO" dirty="0"/>
-                        <a:t>Tipo de cambio</a:t>
-                      </a:r>
-                    </a:p>
-                  </a:txBody>
-                  <a:tcPr/>
-                </a:tc>
-                <a:tc>
-                  <a:txBody>
-                    <a:bodyPr/>
-                    <a:lstStyle/>
-                    <a:p>
-                      <a:r>
-                        <a:rPr lang="es-CO" dirty="0"/>
-                        <a:t>Prefijo</a:t>
-                      </a:r>
-                    </a:p>
-                  </a:txBody>
-                  <a:tcPr/>
-                </a:tc>
-                <a:tc gridSpan="2">
-                  <a:txBody>
-                    <a:bodyPr/>
-                    <a:lstStyle/>
-                    <a:p>
-                      <a:r>
-                        <a:rPr lang="es-CO" dirty="0"/>
-                        <a:t>Ejemplos</a:t>
-                      </a:r>
-                    </a:p>
-                  </a:txBody>
-                  <a:tcPr/>
-                </a:tc>
-                <a:tc hMerge="1">
-                  <a:txBody>
-                    <a:bodyPr/>
-                    <a:lstStyle/>
-                    <a:p>
-                      <a:endParaRPr lang="es-CO" dirty="0"/>
-                    </a:p>
-                  </a:txBody>
-                  <a:tcPr/>
-                </a:tc>
-                <a:extLst>
-                  <a:ext uri="{0D108BD9-81ED-4DB2-BD59-A6C34878D82A}">
-                    <a16:rowId xmlns:a16="http://schemas.microsoft.com/office/drawing/2014/main" val="3255754326"/>
-                  </a:ext>
-                </a:extLst>
-              </a:tr>
-              <a:tr h="370840">
-                <a:tc>
-                  <a:txBody>
-                    <a:bodyPr/>
-                    <a:lstStyle/>
-                    <a:p>
-                      <a:r>
-                        <a:rPr lang="es-CO" dirty="0"/>
-                        <a:t>Característica nueva</a:t>
-                      </a:r>
-                    </a:p>
-                  </a:txBody>
-                  <a:tcPr/>
-                </a:tc>
-                <a:tc>
-                  <a:txBody>
-                    <a:bodyPr/>
-                    <a:lstStyle/>
-                    <a:p>
-                      <a:r>
-                        <a:rPr lang="es-CO" dirty="0" err="1"/>
-                        <a:t>feat</a:t>
-                      </a:r>
-                      <a:endParaRPr lang="es-CO" dirty="0"/>
-                    </a:p>
-                  </a:txBody>
-                  <a:tcPr/>
-                </a:tc>
-                <a:tc>
-                  <a:txBody>
-                    <a:bodyPr/>
-                    <a:lstStyle/>
-                    <a:p>
-                      <a:pPr marL="0" marR="0" lvl="0" indent="0" algn="l" defTabSz="914400" rtl="0" eaLnBrk="1" fontAlgn="auto" latinLnBrk="0" hangingPunct="1">
-                        <a:lnSpc>
-                          <a:spcPct val="100000"/>
-                        </a:lnSpc>
-                        <a:spcBef>
-                          <a:spcPts val="0"/>
-                        </a:spcBef>
-                        <a:spcAft>
-                          <a:spcPts val="0"/>
-                        </a:spcAft>
-                        <a:buClrTx/>
-                        <a:buSzTx/>
-                        <a:buFontTx/>
-                        <a:buNone/>
-                        <a:tabLst/>
-                        <a:defRPr/>
-                      </a:pPr>
-                      <a:r>
-                        <a:rPr lang="es-CO" sz="1800" b="0" kern="1200" dirty="0" err="1">
-                          <a:solidFill>
-                            <a:schemeClr val="dk1"/>
-                          </a:solidFill>
-                          <a:effectLst/>
-                          <a:latin typeface="+mn-lt"/>
-                          <a:ea typeface="+mn-ea"/>
-                          <a:cs typeface="+mn-cs"/>
-                        </a:rPr>
-                        <a:t>feat</a:t>
-                      </a:r>
-                      <a:r>
-                        <a:rPr lang="es-CO" sz="1800" b="0" kern="1200" dirty="0">
-                          <a:solidFill>
-                            <a:schemeClr val="dk1"/>
-                          </a:solidFill>
-                          <a:effectLst/>
-                          <a:latin typeface="+mn-lt"/>
-                          <a:ea typeface="+mn-ea"/>
-                          <a:cs typeface="+mn-cs"/>
-                        </a:rPr>
-                        <a:t>: Repositorio inicial</a:t>
-                      </a:r>
-                    </a:p>
-                  </a:txBody>
-                  <a:tcPr/>
-                </a:tc>
-                <a:tc>
-                  <a:txBody>
-                    <a:bodyPr/>
-                    <a:lstStyle/>
-                    <a:p>
-                      <a:r>
-                        <a:rPr lang="es-CO" dirty="0" err="1"/>
-                        <a:t>feat</a:t>
-                      </a:r>
-                      <a:r>
-                        <a:rPr lang="es-CO" dirty="0"/>
-                        <a:t>: RF06 implementado/compila, pero faltan ajustes</a:t>
-                      </a:r>
-                    </a:p>
-                  </a:txBody>
-                  <a:tcPr/>
-                </a:tc>
-                <a:extLst>
-                  <a:ext uri="{0D108BD9-81ED-4DB2-BD59-A6C34878D82A}">
-                    <a16:rowId xmlns:a16="http://schemas.microsoft.com/office/drawing/2014/main" val="3251121197"/>
-                  </a:ext>
-                </a:extLst>
-              </a:tr>
-              <a:tr h="370840">
-                <a:tc>
-                  <a:txBody>
-                    <a:bodyPr/>
-                    <a:lstStyle/>
-                    <a:p>
-                      <a:r>
-                        <a:rPr lang="es-CO" dirty="0"/>
-                        <a:t>Corrección de Errores</a:t>
-                      </a:r>
-                    </a:p>
-                  </a:txBody>
-                  <a:tcPr/>
-                </a:tc>
-                <a:tc>
-                  <a:txBody>
-                    <a:bodyPr/>
-                    <a:lstStyle/>
-                    <a:p>
-                      <a:r>
-                        <a:rPr lang="es-CO" dirty="0" err="1"/>
-                        <a:t>bugfix</a:t>
-                      </a:r>
-                      <a:endParaRPr lang="es-CO" dirty="0"/>
-                    </a:p>
-                  </a:txBody>
-                  <a:tcPr/>
-                </a:tc>
-                <a:tc>
-                  <a:txBody>
-                    <a:bodyPr/>
-                    <a:lstStyle/>
-                    <a:p>
-                      <a:r>
-                        <a:rPr lang="es-CO" dirty="0" err="1"/>
-                        <a:t>bugfix</a:t>
-                      </a:r>
-                      <a:r>
-                        <a:rPr lang="es-CO" dirty="0"/>
-                        <a:t>: Error al borrar las cookies</a:t>
-                      </a:r>
-                    </a:p>
-                  </a:txBody>
-                  <a:tcPr/>
-                </a:tc>
-                <a:tc>
-                  <a:txBody>
-                    <a:bodyPr/>
-                    <a:lstStyle/>
-                    <a:p>
-                      <a:r>
-                        <a:rPr lang="es-CO" dirty="0" err="1"/>
-                        <a:t>bugfix</a:t>
-                      </a:r>
-                      <a:r>
-                        <a:rPr lang="es-CO" dirty="0"/>
-                        <a:t>: RF07 se estaba mostrando una columna id en muebles.</a:t>
-                      </a:r>
-                    </a:p>
-                  </a:txBody>
-                  <a:tcPr/>
-                </a:tc>
-                <a:extLst>
-                  <a:ext uri="{0D108BD9-81ED-4DB2-BD59-A6C34878D82A}">
-                    <a16:rowId xmlns:a16="http://schemas.microsoft.com/office/drawing/2014/main" val="3955919551"/>
-                  </a:ext>
-                </a:extLst>
-              </a:tr>
-              <a:tr h="370840">
-                <a:tc>
-                  <a:txBody>
-                    <a:bodyPr/>
-                    <a:lstStyle/>
-                    <a:p>
-                      <a:r>
-                        <a:rPr lang="es-CO" dirty="0"/>
-                        <a:t>Cambios para liberación</a:t>
-                      </a:r>
-                    </a:p>
-                  </a:txBody>
-                  <a:tcPr/>
-                </a:tc>
-                <a:tc>
-                  <a:txBody>
-                    <a:bodyPr/>
-                    <a:lstStyle/>
-                    <a:p>
-                      <a:r>
-                        <a:rPr lang="es-CO" dirty="0" err="1"/>
-                        <a:t>release</a:t>
-                      </a:r>
-                      <a:endParaRPr lang="es-CO" dirty="0"/>
-                    </a:p>
-                  </a:txBody>
-                  <a:tcPr/>
-                </a:tc>
-                <a:tc>
-                  <a:txBody>
-                    <a:bodyPr/>
-                    <a:lstStyle/>
-                    <a:p>
-                      <a:r>
-                        <a:rPr lang="es-CO" dirty="0" err="1"/>
-                        <a:t>release</a:t>
-                      </a:r>
-                      <a:r>
-                        <a:rPr lang="es-CO" dirty="0"/>
-                        <a:t>: Segundo pago</a:t>
-                      </a:r>
-                    </a:p>
-                  </a:txBody>
-                  <a:tcPr/>
-                </a:tc>
-                <a:tc>
-                  <a:txBody>
-                    <a:bodyPr/>
-                    <a:lstStyle/>
-                    <a:p>
-                      <a:r>
-                        <a:rPr lang="es-CO" dirty="0" err="1"/>
-                        <a:t>Release</a:t>
-                      </a:r>
-                      <a:r>
-                        <a:rPr lang="es-CO" dirty="0"/>
-                        <a:t>: RF08 Probado y listo para enviar a </a:t>
-                      </a:r>
-                      <a:r>
-                        <a:rPr lang="es-CO" dirty="0" err="1"/>
-                        <a:t>main</a:t>
-                      </a:r>
-                      <a:r>
-                        <a:rPr lang="es-CO" dirty="0"/>
-                        <a:t>.</a:t>
-                      </a:r>
-                    </a:p>
-                  </a:txBody>
-                  <a:tcPr/>
-                </a:tc>
-                <a:extLst>
-                  <a:ext uri="{0D108BD9-81ED-4DB2-BD59-A6C34878D82A}">
-                    <a16:rowId xmlns:a16="http://schemas.microsoft.com/office/drawing/2014/main" val="3203977087"/>
-                  </a:ext>
-                </a:extLst>
-              </a:tr>
-              <a:tr h="370840">
-                <a:tc>
-                  <a:txBody>
-                    <a:bodyPr/>
-                    <a:lstStyle/>
-                    <a:p>
-                      <a:r>
-                        <a:rPr lang="es-CO" dirty="0"/>
-                        <a:t>Arreglos en caliente (fuera del horario o periodicidad normal)</a:t>
-                      </a:r>
-                    </a:p>
-                  </a:txBody>
-                  <a:tcPr/>
-                </a:tc>
-                <a:tc>
-                  <a:txBody>
-                    <a:bodyPr/>
-                    <a:lstStyle/>
-                    <a:p>
-                      <a:r>
-                        <a:rPr lang="es-CO" dirty="0" err="1"/>
-                        <a:t>hotfix</a:t>
-                      </a:r>
-                      <a:endParaRPr lang="es-CO" dirty="0"/>
-                    </a:p>
-                  </a:txBody>
-                  <a:tcPr/>
-                </a:tc>
-                <a:tc>
-                  <a:txBody>
-                    <a:bodyPr/>
-                    <a:lstStyle/>
-                    <a:p>
-                      <a:r>
-                        <a:rPr lang="es-CO" dirty="0" err="1"/>
-                        <a:t>hotfix</a:t>
-                      </a:r>
-                      <a:r>
-                        <a:rPr lang="es-CO" dirty="0"/>
-                        <a:t>: Se garantiza compatibilidad con </a:t>
-                      </a:r>
-                      <a:r>
-                        <a:rPr lang="es-CO" dirty="0" err="1"/>
-                        <a:t>Jquery</a:t>
-                      </a:r>
-                      <a:endParaRPr lang="es-CO" dirty="0"/>
-                    </a:p>
-                  </a:txBody>
-                  <a:tcPr/>
-                </a:tc>
-                <a:tc>
-                  <a:txBody>
-                    <a:bodyPr/>
-                    <a:lstStyle/>
-                    <a:p>
-                      <a:r>
-                        <a:rPr lang="es-CO" dirty="0" err="1"/>
-                        <a:t>hotfix</a:t>
-                      </a:r>
-                      <a:r>
-                        <a:rPr lang="es-CO" dirty="0"/>
-                        <a:t>: RF09 fallaba con el mensaje “</a:t>
-                      </a:r>
-                      <a:r>
-                        <a:rPr lang="es-CO" dirty="0" err="1"/>
-                        <a:t>Index</a:t>
-                      </a:r>
-                      <a:r>
-                        <a:rPr lang="es-CO" dirty="0"/>
-                        <a:t> </a:t>
-                      </a:r>
-                      <a:r>
-                        <a:rPr lang="es-CO" dirty="0" err="1"/>
-                        <a:t>not</a:t>
-                      </a:r>
-                      <a:r>
-                        <a:rPr lang="es-CO" dirty="0"/>
-                        <a:t> </a:t>
-                      </a:r>
-                      <a:r>
-                        <a:rPr lang="es-CO" dirty="0" err="1"/>
-                        <a:t>found</a:t>
-                      </a:r>
-                      <a:r>
-                        <a:rPr lang="es-CO" dirty="0"/>
-                        <a:t>”</a:t>
-                      </a:r>
-                    </a:p>
-                  </a:txBody>
-                  <a:tcPr/>
-                </a:tc>
-                <a:extLst>
-                  <a:ext uri="{0D108BD9-81ED-4DB2-BD59-A6C34878D82A}">
-                    <a16:rowId xmlns:a16="http://schemas.microsoft.com/office/drawing/2014/main" val="1579185881"/>
-                  </a:ext>
-                </a:extLst>
-              </a:tr>
-            </a:tbl>
-          </a:graphicData>
-        </a:graphic>
-      </p:graphicFrame>
-      <p:sp>
-        <p:nvSpPr>
-          <p:cNvPr id="6" name="CuadroTexto 5">
-            <a:extLst>
-              <a:ext uri="{FF2B5EF4-FFF2-40B4-BE49-F238E27FC236}">
-                <a16:creationId xmlns:a16="http://schemas.microsoft.com/office/drawing/2014/main" id="{4D09E09A-B2B6-7F14-C818-49ADBA4B6C66}"/>
-              </a:ext>
-            </a:extLst>
-          </p:cNvPr>
-          <p:cNvSpPr txBox="1"/>
-          <p:nvPr/>
-        </p:nvSpPr>
-        <p:spPr>
-          <a:xfrm>
-            <a:off x="838200" y="5846544"/>
-            <a:ext cx="10033000" cy="369332"/>
-          </a:xfrm>
-          <a:prstGeom prst="rect">
-            <a:avLst/>
-          </a:prstGeom>
-          <a:noFill/>
-        </p:spPr>
-        <p:txBody>
-          <a:bodyPr wrap="square" rtlCol="0">
-            <a:spAutoFit/>
-          </a:bodyPr>
-          <a:lstStyle/>
-          <a:p>
-            <a:r>
-              <a:rPr lang="es-CO" dirty="0"/>
-              <a:t>Cada cambio debe indicar qué RF, RNF, HU, ET, Error implementa o soluciona</a:t>
-            </a:r>
-          </a:p>
-        </p:txBody>
-      </p:sp>
-    </p:spTree>
-    <p:extLst>
-      <p:ext uri="{BB962C8B-B14F-4D97-AF65-F5344CB8AC3E}">
-        <p14:creationId xmlns:p14="http://schemas.microsoft.com/office/powerpoint/2010/main" val="287048700"/>
-      </p:ext>
-    </p:extLst>
-  </p:cSld>
-  <p:clrMapOvr>
-    <a:masterClrMapping/>
-  </p:clrMapOvr>
-</p:sld>
-</file>
-
 <file path=ppt/theme/theme1.xml><?xml version="1.0" encoding="utf-8"?>
-<a:theme xmlns:a="http://schemas.openxmlformats.org/drawingml/2006/main" name="Tema de Office">
+<a:theme xmlns:a="http://schemas.openxmlformats.org/drawingml/2006/main" name="Letras en madera">
   <a:themeElements>
-    <a:clrScheme name="Office">
+    <a:clrScheme name="Letras en madera">
       <a:dk1>
         <a:sysClr val="windowText" lastClr="000000"/>
       </a:dk1>
@@ -6679,48 +9246,86 @@
         <a:sysClr val="window" lastClr="FFFFFF"/>
       </a:lt1>
       <a:dk2>
-        <a:srgbClr val="0E2841"/>
+        <a:srgbClr val="696464"/>
       </a:dk2>
       <a:lt2>
-        <a:srgbClr val="E8E8E8"/>
+        <a:srgbClr val="E9E5DC"/>
       </a:lt2>
       <a:accent1>
-        <a:srgbClr val="156082"/>
+        <a:srgbClr val="D34817"/>
       </a:accent1>
       <a:accent2>
-        <a:srgbClr val="E97132"/>
+        <a:srgbClr val="9B2D1F"/>
       </a:accent2>
       <a:accent3>
-        <a:srgbClr val="196B24"/>
+        <a:srgbClr val="A28E6A"/>
       </a:accent3>
       <a:accent4>
-        <a:srgbClr val="0F9ED5"/>
+        <a:srgbClr val="956251"/>
       </a:accent4>
       <a:accent5>
-        <a:srgbClr val="A02B93"/>
+        <a:srgbClr val="918485"/>
       </a:accent5>
       <a:accent6>
-        <a:srgbClr val="4EA72E"/>
+        <a:srgbClr val="855D5D"/>
       </a:accent6>
       <a:hlink>
-        <a:srgbClr val="467886"/>
+        <a:srgbClr val="CC9900"/>
       </a:hlink>
       <a:folHlink>
-        <a:srgbClr val="96607D"/>
+        <a:srgbClr val="96A9A9"/>
       </a:folHlink>
     </a:clrScheme>
-    <a:fontScheme name="Office">
+    <a:fontScheme name="Letras en madera">
       <a:majorFont>
-        <a:latin typeface="Aptos Display" panose="02110004020202020204"/>
+        <a:latin typeface="Rockwell Condensed" panose="02060603050405020104"/>
         <a:ea typeface=""/>
         <a:cs typeface=""/>
-        <a:font script="Jpan" typeface="游ゴシック Light"/>
-        <a:font script="Hang" typeface="맑은 고딕"/>
-        <a:font script="Hans" typeface="等线 Light"/>
-        <a:font script="Hant" typeface="新細明體"/>
+        <a:font script="Grek" typeface="Cambria"/>
+        <a:font script="Cyrl" typeface="Cambria"/>
+        <a:font script="Jpan" typeface="HG明朝B"/>
+        <a:font script="Hang" typeface="바탕"/>
+        <a:font script="Hans" typeface="方正姚体"/>
+        <a:font script="Hant" typeface="微軟正黑體"/>
         <a:font script="Arab" typeface="Times New Roman"/>
-        <a:font script="Hebr" typeface="Times New Roman"/>
-        <a:font script="Thai" typeface="Angsana New"/>
+        <a:font script="Hebr" typeface="David"/>
+        <a:font script="Thai" typeface="JasmineUPC"/>
+        <a:font script="Ethi" typeface="Nyala"/>
+        <a:font script="Beng" typeface="Vrinda"/>
+        <a:font script="Gujr" typeface="Shruti"/>
+        <a:font script="Khmr" typeface="MoolBoran"/>
+        <a:font script="Knda" typeface="Tunga"/>
+        <a:font script="Guru" typeface="Raavi"/>
+        <a:font script="Cans" typeface="Euphemia"/>
+        <a:font script="Cher" typeface="Plantagenet Cherokee"/>
+        <a:font script="Yiii" typeface="Microsoft Yi Baiti"/>
+        <a:font script="Tibt" typeface="Microsoft Himalaya"/>
+        <a:font script="Thaa" typeface="MV Boli"/>
+        <a:font script="Deva" typeface="Mangal"/>
+        <a:font script="Telu" typeface="Gautami"/>
+        <a:font script="Taml" typeface="Latha"/>
+        <a:font script="Syrc" typeface="Estrangelo Edessa"/>
+        <a:font script="Orya" typeface="Kalinga"/>
+        <a:font script="Mlym" typeface="Kartika"/>
+        <a:font script="Laoo" typeface="DokChampa"/>
+        <a:font script="Sinh" typeface="Iskoola Pota"/>
+        <a:font script="Mong" typeface="Mongolian Baiti"/>
+        <a:font script="Viet" typeface="Arial"/>
+        <a:font script="Uigh" typeface="Microsoft Uighur"/>
+      </a:majorFont>
+      <a:minorFont>
+        <a:latin typeface="Rockwell" panose="02060603020205020403"/>
+        <a:ea typeface=""/>
+        <a:cs typeface=""/>
+        <a:font script="Grek" typeface="Cambria"/>
+        <a:font script="Cyrl" typeface="Cambria"/>
+        <a:font script="Jpan" typeface="HG明朝B"/>
+        <a:font script="Hang" typeface="바탕"/>
+        <a:font script="Hans" typeface="方正姚体"/>
+        <a:font script="Hant" typeface="標楷體"/>
+        <a:font script="Arab" typeface="Times New Roman"/>
+        <a:font script="Hebr" typeface="David"/>
+        <a:font script="Thai" typeface="JasmineUPC"/>
         <a:font script="Ethi" typeface="Nyala"/>
         <a:font script="Beng" typeface="Vrinda"/>
         <a:font script="Gujr" typeface="Shruti"/>
@@ -6743,157 +9348,61 @@
         <a:font script="Mong" typeface="Mongolian Baiti"/>
         <a:font script="Viet" typeface="Times New Roman"/>
         <a:font script="Uigh" typeface="Microsoft Uighur"/>
-        <a:font script="Geor" typeface="Sylfaen"/>
-        <a:font script="Armn" typeface="Arial"/>
-        <a:font script="Bugi" typeface="Leelawadee UI"/>
-        <a:font script="Bopo" typeface="Microsoft JhengHei"/>
-        <a:font script="Java" typeface="Javanese Text"/>
-        <a:font script="Lisu" typeface="Segoe UI"/>
-        <a:font script="Mymr" typeface="Myanmar Text"/>
-        <a:font script="Nkoo" typeface="Ebrima"/>
-        <a:font script="Olck" typeface="Nirmala UI"/>
-        <a:font script="Osma" typeface="Ebrima"/>
-        <a:font script="Phag" typeface="Phagspa"/>
-        <a:font script="Syrn" typeface="Estrangelo Edessa"/>
-        <a:font script="Syrj" typeface="Estrangelo Edessa"/>
-        <a:font script="Syre" typeface="Estrangelo Edessa"/>
-        <a:font script="Sora" typeface="Nirmala UI"/>
-        <a:font script="Tale" typeface="Microsoft Tai Le"/>
-        <a:font script="Talu" typeface="Microsoft New Tai Lue"/>
-        <a:font script="Tfng" typeface="Ebrima"/>
-      </a:majorFont>
-      <a:minorFont>
-        <a:latin typeface="Aptos" panose="02110004020202020204"/>
-        <a:ea typeface=""/>
-        <a:cs typeface=""/>
-        <a:font script="Jpan" typeface="游ゴシック"/>
-        <a:font script="Hang" typeface="맑은 고딕"/>
-        <a:font script="Hans" typeface="等线"/>
-        <a:font script="Hant" typeface="新細明體"/>
-        <a:font script="Arab" typeface="Arial"/>
-        <a:font script="Hebr" typeface="Arial"/>
-        <a:font script="Thai" typeface="Cordia New"/>
-        <a:font script="Ethi" typeface="Nyala"/>
-        <a:font script="Beng" typeface="Vrinda"/>
-        <a:font script="Gujr" typeface="Shruti"/>
-        <a:font script="Khmr" typeface="DaunPenh"/>
-        <a:font script="Knda" typeface="Tunga"/>
-        <a:font script="Guru" typeface="Raavi"/>
-        <a:font script="Cans" typeface="Euphemia"/>
-        <a:font script="Cher" typeface="Plantagenet Cherokee"/>
-        <a:font script="Yiii" typeface="Microsoft Yi Baiti"/>
-        <a:font script="Tibt" typeface="Microsoft Himalaya"/>
-        <a:font script="Thaa" typeface="MV Boli"/>
-        <a:font script="Deva" typeface="Mangal"/>
-        <a:font script="Telu" typeface="Gautami"/>
-        <a:font script="Taml" typeface="Latha"/>
-        <a:font script="Syrc" typeface="Estrangelo Edessa"/>
-        <a:font script="Orya" typeface="Kalinga"/>
-        <a:font script="Mlym" typeface="Kartika"/>
-        <a:font script="Laoo" typeface="DokChampa"/>
-        <a:font script="Sinh" typeface="Iskoola Pota"/>
-        <a:font script="Mong" typeface="Mongolian Baiti"/>
-        <a:font script="Viet" typeface="Arial"/>
-        <a:font script="Uigh" typeface="Microsoft Uighur"/>
-        <a:font script="Geor" typeface="Sylfaen"/>
-        <a:font script="Armn" typeface="Arial"/>
-        <a:font script="Bugi" typeface="Leelawadee UI"/>
-        <a:font script="Bopo" typeface="Microsoft JhengHei"/>
-        <a:font script="Java" typeface="Javanese Text"/>
-        <a:font script="Lisu" typeface="Segoe UI"/>
-        <a:font script="Mymr" typeface="Myanmar Text"/>
-        <a:font script="Nkoo" typeface="Ebrima"/>
-        <a:font script="Olck" typeface="Nirmala UI"/>
-        <a:font script="Osma" typeface="Ebrima"/>
-        <a:font script="Phag" typeface="Phagspa"/>
-        <a:font script="Syrn" typeface="Estrangelo Edessa"/>
-        <a:font script="Syrj" typeface="Estrangelo Edessa"/>
-        <a:font script="Syre" typeface="Estrangelo Edessa"/>
-        <a:font script="Sora" typeface="Nirmala UI"/>
-        <a:font script="Tale" typeface="Microsoft Tai Le"/>
-        <a:font script="Talu" typeface="Microsoft New Tai Lue"/>
-        <a:font script="Tfng" typeface="Ebrima"/>
       </a:minorFont>
     </a:fontScheme>
-    <a:fmtScheme name="Office">
+    <a:fmtScheme name="Letras en madera">
       <a:fillStyleLst>
         <a:solidFill>
           <a:schemeClr val="phClr"/>
         </a:solidFill>
-        <a:gradFill rotWithShape="1">
-          <a:gsLst>
-            <a:gs pos="0">
+        <a:blipFill rotWithShape="1">
+          <a:blip xmlns:r="http://schemas.openxmlformats.org/officeDocument/2006/relationships" r:embed="rId1">
+            <a:duotone>
               <a:schemeClr val="phClr">
-                <a:lumMod val="110000"/>
-                <a:satMod val="105000"/>
-                <a:tint val="67000"/>
+                <a:tint val="70000"/>
+                <a:shade val="63000"/>
               </a:schemeClr>
-            </a:gs>
-            <a:gs pos="50000">
               <a:schemeClr val="phClr">
-                <a:lumMod val="105000"/>
-                <a:satMod val="103000"/>
-                <a:tint val="73000"/>
+                <a:tint val="10000"/>
+                <a:satMod val="150000"/>
               </a:schemeClr>
-            </a:gs>
-            <a:gs pos="100000">
+            </a:duotone>
+          </a:blip>
+          <a:tile tx="0" ty="0" sx="60000" sy="59000" flip="none" algn="tl"/>
+        </a:blipFill>
+        <a:blipFill rotWithShape="1">
+          <a:blip xmlns:r="http://schemas.openxmlformats.org/officeDocument/2006/relationships" r:embed="rId1">
+            <a:duotone>
               <a:schemeClr val="phClr">
-                <a:lumMod val="105000"/>
-                <a:satMod val="109000"/>
-                <a:tint val="81000"/>
+                <a:shade val="36000"/>
+                <a:satMod val="120000"/>
               </a:schemeClr>
-            </a:gs>
-          </a:gsLst>
-          <a:lin ang="5400000" scaled="0"/>
-        </a:gradFill>
-        <a:gradFill rotWithShape="1">
-          <a:gsLst>
-            <a:gs pos="0">
               <a:schemeClr val="phClr">
-                <a:satMod val="103000"/>
-                <a:lumMod val="102000"/>
-                <a:tint val="94000"/>
+                <a:tint val="40000"/>
               </a:schemeClr>
-            </a:gs>
-            <a:gs pos="50000">
-              <a:schemeClr val="phClr">
-                <a:satMod val="110000"/>
-                <a:lumMod val="100000"/>
-                <a:shade val="100000"/>
-              </a:schemeClr>
-            </a:gs>
-            <a:gs pos="100000">
-              <a:schemeClr val="phClr">
-                <a:lumMod val="99000"/>
-                <a:satMod val="120000"/>
-                <a:shade val="78000"/>
-              </a:schemeClr>
-            </a:gs>
-          </a:gsLst>
-          <a:lin ang="5400000" scaled="0"/>
-        </a:gradFill>
+            </a:duotone>
+          </a:blip>
+          <a:tile tx="0" ty="0" sx="60000" sy="59000" flip="none" algn="tl"/>
+        </a:blipFill>
       </a:fillStyleLst>
       <a:lnStyleLst>
+        <a:ln w="6350" cap="flat" cmpd="sng" algn="ctr">
+          <a:solidFill>
+            <a:schemeClr val="phClr"/>
+          </a:solidFill>
+          <a:prstDash val="solid"/>
+        </a:ln>
         <a:ln w="12700" cap="flat" cmpd="sng" algn="ctr">
           <a:solidFill>
             <a:schemeClr val="phClr"/>
           </a:solidFill>
           <a:prstDash val="solid"/>
-          <a:miter lim="800000"/>
         </a:ln>
         <a:ln w="19050" cap="flat" cmpd="sng" algn="ctr">
           <a:solidFill>
             <a:schemeClr val="phClr"/>
           </a:solidFill>
           <a:prstDash val="solid"/>
-          <a:miter lim="800000"/>
-        </a:ln>
-        <a:ln w="25400" cap="flat" cmpd="sng" algn="ctr">
-          <a:solidFill>
-            <a:schemeClr val="phClr"/>
-          </a:solidFill>
-          <a:prstDash val="solid"/>
-          <a:miter lim="800000"/>
         </a:ln>
       </a:lnStyleLst>
       <a:effectStyleLst>
@@ -6901,15 +9410,18 @@
           <a:effectLst/>
         </a:effectStyle>
         <a:effectStyle>
-          <a:effectLst/>
+          <a:effectLst>
+            <a:softEdge rad="12700"/>
+          </a:effectLst>
         </a:effectStyle>
         <a:effectStyle>
           <a:effectLst>
-            <a:outerShdw blurRad="57150" dist="19050" dir="5400000" algn="ctr" rotWithShape="0">
+            <a:outerShdw blurRad="50800" dist="19050" dir="5400000" algn="tl" rotWithShape="0">
               <a:srgbClr val="000000">
-                <a:alpha val="63000"/>
+                <a:alpha val="60000"/>
               </a:srgbClr>
             </a:outerShdw>
+            <a:softEdge rad="12700"/>
           </a:effectLst>
         </a:effectStyle>
       </a:effectStyleLst>
@@ -6919,65 +9431,34 @@
         </a:solidFill>
         <a:solidFill>
           <a:schemeClr val="phClr">
-            <a:tint val="95000"/>
-            <a:satMod val="170000"/>
+            <a:shade val="97000"/>
+            <a:satMod val="150000"/>
           </a:schemeClr>
         </a:solidFill>
-        <a:gradFill rotWithShape="1">
-          <a:gsLst>
-            <a:gs pos="0">
+        <a:blipFill rotWithShape="1">
+          <a:blip xmlns:r="http://schemas.openxmlformats.org/officeDocument/2006/relationships" r:embed="rId1">
+            <a:duotone>
               <a:schemeClr val="phClr">
-                <a:tint val="93000"/>
-                <a:satMod val="150000"/>
-                <a:shade val="98000"/>
-                <a:lumMod val="102000"/>
-              </a:schemeClr>
-            </a:gs>
-            <a:gs pos="50000">
-              <a:schemeClr val="phClr">
-                <a:tint val="98000"/>
-                <a:satMod val="130000"/>
-                <a:shade val="90000"/>
-                <a:lumMod val="103000"/>
-              </a:schemeClr>
-            </a:gs>
-            <a:gs pos="100000">
-              <a:schemeClr val="phClr">
-                <a:shade val="63000"/>
+                <a:tint val="75000"/>
+                <a:shade val="58000"/>
                 <a:satMod val="120000"/>
               </a:schemeClr>
-            </a:gs>
-          </a:gsLst>
-          <a:lin ang="5400000" scaled="0"/>
-        </a:gradFill>
+              <a:schemeClr val="phClr">
+                <a:tint val="50000"/>
+                <a:shade val="96000"/>
+              </a:schemeClr>
+            </a:duotone>
+          </a:blip>
+          <a:tile tx="0" ty="0" sx="100000" sy="100000" flip="none" algn="tl"/>
+        </a:blipFill>
       </a:bgFillStyleLst>
     </a:fmtScheme>
   </a:themeElements>
-  <a:objectDefaults>
-    <a:lnDef>
-      <a:spPr/>
-      <a:bodyPr/>
-      <a:lstStyle/>
-      <a:style>
-        <a:lnRef idx="2">
-          <a:schemeClr val="accent1"/>
-        </a:lnRef>
-        <a:fillRef idx="0">
-          <a:schemeClr val="accent1"/>
-        </a:fillRef>
-        <a:effectRef idx="1">
-          <a:schemeClr val="accent1"/>
-        </a:effectRef>
-        <a:fontRef idx="minor">
-          <a:schemeClr val="tx1"/>
-        </a:fontRef>
-      </a:style>
-    </a:lnDef>
-  </a:objectDefaults>
+  <a:objectDefaults/>
   <a:extraClrSchemeLst/>
   <a:extLst>
     <a:ext uri="{05A4C25C-085E-4340-85A3-A5531E510DB2}">
-      <thm15:themeFamily xmlns:thm15="http://schemas.microsoft.com/office/thememl/2012/main" name="Office Theme" id="{2E142A2C-CD16-42D6-873A-C26D2A0506FA}" vid="{1BDDFF52-6CD6-40A5-AB3C-68EB2F1E4D0A}"/>
+      <thm15:themeFamily xmlns:thm15="http://schemas.microsoft.com/office/thememl/2012/main" name="Wood Type" id="{7ACABC62-BF99-48CF-A9DC-4DB89C7B13DC}" vid="{142A1326-48AB-42A9-8428-CB14AA30176D}"/>
     </a:ext>
   </a:extLst>
 </a:theme>
